--- a/Records/Literacture review.pptx
+++ b/Records/Literacture review.pptx
@@ -5,7 +5,7 @@
     <p:sldMasterId id="2147483648" r:id="rId1"/>
   </p:sldMasterIdLst>
   <p:notesMasterIdLst>
-    <p:notesMasterId r:id="rId19"/>
+    <p:notesMasterId r:id="rId20"/>
   </p:notesMasterIdLst>
   <p:sldIdLst>
     <p:sldId id="256" r:id="rId2"/>
@@ -16,15 +16,16 @@
     <p:sldId id="274" r:id="rId7"/>
     <p:sldId id="277" r:id="rId8"/>
     <p:sldId id="276" r:id="rId9"/>
-    <p:sldId id="259" r:id="rId10"/>
-    <p:sldId id="270" r:id="rId11"/>
-    <p:sldId id="271" r:id="rId12"/>
-    <p:sldId id="257" r:id="rId13"/>
-    <p:sldId id="260" r:id="rId14"/>
-    <p:sldId id="261" r:id="rId15"/>
-    <p:sldId id="265" r:id="rId16"/>
-    <p:sldId id="267" r:id="rId17"/>
-    <p:sldId id="268" r:id="rId18"/>
+    <p:sldId id="278" r:id="rId10"/>
+    <p:sldId id="259" r:id="rId11"/>
+    <p:sldId id="270" r:id="rId12"/>
+    <p:sldId id="271" r:id="rId13"/>
+    <p:sldId id="257" r:id="rId14"/>
+    <p:sldId id="260" r:id="rId15"/>
+    <p:sldId id="261" r:id="rId16"/>
+    <p:sldId id="265" r:id="rId17"/>
+    <p:sldId id="267" r:id="rId18"/>
+    <p:sldId id="268" r:id="rId19"/>
   </p:sldIdLst>
   <p:sldSz cx="12192000" cy="6858000"/>
   <p:notesSz cx="6858000" cy="9144000"/>
@@ -140,6 +141,7 @@
             <p14:sldId id="274"/>
             <p14:sldId id="277"/>
             <p14:sldId id="276"/>
+            <p14:sldId id="278"/>
             <p14:sldId id="259"/>
             <p14:sldId id="270"/>
             <p14:sldId id="271"/>
@@ -163,7 +165,7 @@
 <file path=ppt/revisionInfo.xml><?xml version="1.0" encoding="utf-8"?>
 <p1510:revInfo xmlns:a="http://schemas.openxmlformats.org/drawingml/2006/main" xmlns:r="http://schemas.openxmlformats.org/officeDocument/2006/relationships" xmlns:p1510="http://schemas.microsoft.com/office/powerpoint/2015/10/main">
   <p1510:revLst>
-    <p1510:client id="{043DC9CB-6B43-3641-B86E-33B80EA7B515}" v="105" dt="2026-06-24T13:25:03.537"/>
+    <p1510:client id="{7980C0CE-4C80-8647-838F-7D9830C50597}" v="50" dt="2026-08-04T14:59:40.917"/>
   </p1510:revLst>
 </p1510:revInfo>
 </file>
@@ -173,579 +175,504 @@
   <pc:docChgLst>
     <pc:chgData name="耀泉 马" userId="19e30af8d5659de2" providerId="LiveId" clId="{C3594856-CEDA-5129-B2AF-7962E3CA4CA3}"/>
     <pc:docChg chg="undo custSel addSld delSld modSld sldOrd addSection delSection modSection">
-      <pc:chgData name="耀泉 马" userId="19e30af8d5659de2" providerId="LiveId" clId="{C3594856-CEDA-5129-B2AF-7962E3CA4CA3}" dt="2026-06-24T13:25:21.295" v="4712" actId="20577"/>
+      <pc:chgData name="耀泉 马" userId="19e30af8d5659de2" providerId="LiveId" clId="{C3594856-CEDA-5129-B2AF-7962E3CA4CA3}" dt="2026-08-04T15:05:59.033" v="5686" actId="20577"/>
       <pc:docMkLst>
         <pc:docMk/>
       </pc:docMkLst>
-      <pc:sldChg chg="modSp mod">
-        <pc:chgData name="耀泉 马" userId="19e30af8d5659de2" providerId="LiveId" clId="{C3594856-CEDA-5129-B2AF-7962E3CA4CA3}" dt="2026-05-27T10:24:08.631" v="580" actId="20577"/>
+      <pc:sldChg chg="addSp delSp modSp add mod">
+        <pc:chgData name="耀泉 马" userId="19e30af8d5659de2" providerId="LiveId" clId="{C3594856-CEDA-5129-B2AF-7962E3CA4CA3}" dt="2026-08-04T15:05:59.033" v="5686" actId="20577"/>
         <pc:sldMkLst>
           <pc:docMk/>
-          <pc:sldMk cId="2290531363" sldId="256"/>
+          <pc:sldMk cId="3119878381" sldId="278"/>
         </pc:sldMkLst>
-        <pc:spChg chg="mod">
-          <ac:chgData name="耀泉 马" userId="19e30af8d5659de2" providerId="LiveId" clId="{C3594856-CEDA-5129-B2AF-7962E3CA4CA3}" dt="2026-05-27T10:24:08.631" v="580" actId="20577"/>
+        <pc:spChg chg="del">
+          <ac:chgData name="耀泉 马" userId="19e30af8d5659de2" providerId="LiveId" clId="{C3594856-CEDA-5129-B2AF-7962E3CA4CA3}" dt="2026-08-04T13:35:07.191" v="4807" actId="478"/>
           <ac:spMkLst>
             <pc:docMk/>
-            <pc:sldMk cId="2290531363" sldId="256"/>
-            <ac:spMk id="2" creationId="{F0E8EB94-C6DD-EB25-B42A-C0EE77F781F9}"/>
+            <pc:sldMk cId="3119878381" sldId="278"/>
+            <ac:spMk id="2" creationId="{731D0589-65BA-350C-57B3-ED0B1A5CAD76}"/>
           </ac:spMkLst>
         </pc:spChg>
-      </pc:sldChg>
-      <pc:sldChg chg="modSp mod ord modShow">
-        <pc:chgData name="耀泉 马" userId="19e30af8d5659de2" providerId="LiveId" clId="{C3594856-CEDA-5129-B2AF-7962E3CA4CA3}" dt="2026-06-24T01:56:32.788" v="3943" actId="34476"/>
-        <pc:sldMkLst>
-          <pc:docMk/>
-          <pc:sldMk cId="2621794148" sldId="257"/>
-        </pc:sldMkLst>
-        <pc:spChg chg="mod">
-          <ac:chgData name="耀泉 马" userId="19e30af8d5659de2" providerId="LiveId" clId="{C3594856-CEDA-5129-B2AF-7962E3CA4CA3}" dt="2026-05-30T12:46:41.666" v="1617" actId="20577"/>
+        <pc:spChg chg="add del mod">
+          <ac:chgData name="耀泉 马" userId="19e30af8d5659de2" providerId="LiveId" clId="{C3594856-CEDA-5129-B2AF-7962E3CA4CA3}" dt="2026-08-04T13:27:39.465" v="4722" actId="478"/>
           <ac:spMkLst>
             <pc:docMk/>
-            <pc:sldMk cId="2621794148" sldId="257"/>
-            <ac:spMk id="2" creationId="{73FF0AC1-191B-A69F-9504-49F22BCD7B03}"/>
+            <pc:sldMk cId="3119878381" sldId="278"/>
+            <ac:spMk id="4" creationId="{61E644F7-AE8F-2F32-7FB1-DF477222E742}"/>
           </ac:spMkLst>
         </pc:spChg>
-        <pc:spChg chg="mod">
-          <ac:chgData name="耀泉 马" userId="19e30af8d5659de2" providerId="LiveId" clId="{C3594856-CEDA-5129-B2AF-7962E3CA4CA3}" dt="2026-05-30T12:48:38.217" v="1636" actId="21"/>
+        <pc:spChg chg="add del">
+          <ac:chgData name="耀泉 马" userId="19e30af8d5659de2" providerId="LiveId" clId="{C3594856-CEDA-5129-B2AF-7962E3CA4CA3}" dt="2026-08-04T13:27:20.249" v="4716" actId="11529"/>
           <ac:spMkLst>
             <pc:docMk/>
-            <pc:sldMk cId="2621794148" sldId="257"/>
-            <ac:spMk id="3" creationId="{C0190995-3564-B1CE-A3D1-396A01B6A52D}"/>
-          </ac:spMkLst>
-        </pc:spChg>
-      </pc:sldChg>
-      <pc:sldChg chg="modSp new del mod ord">
-        <pc:chgData name="耀泉 马" userId="19e30af8d5659de2" providerId="LiveId" clId="{C3594856-CEDA-5129-B2AF-7962E3CA4CA3}" dt="2026-06-24T01:54:51.439" v="3911" actId="2696"/>
-        <pc:sldMkLst>
-          <pc:docMk/>
-          <pc:sldMk cId="1448075068" sldId="258"/>
-        </pc:sldMkLst>
-      </pc:sldChg>
-      <pc:sldChg chg="delSp modSp new mod">
-        <pc:chgData name="耀泉 马" userId="19e30af8d5659de2" providerId="LiveId" clId="{C3594856-CEDA-5129-B2AF-7962E3CA4CA3}" dt="2026-06-24T11:27:30.240" v="4673" actId="21"/>
-        <pc:sldMkLst>
-          <pc:docMk/>
-          <pc:sldMk cId="2290997006" sldId="259"/>
-        </pc:sldMkLst>
-        <pc:spChg chg="mod">
-          <ac:chgData name="耀泉 马" userId="19e30af8d5659de2" providerId="LiveId" clId="{C3594856-CEDA-5129-B2AF-7962E3CA4CA3}" dt="2026-05-29T11:03:48.727" v="1598" actId="20577"/>
-          <ac:spMkLst>
-            <pc:docMk/>
-            <pc:sldMk cId="2290997006" sldId="259"/>
-            <ac:spMk id="2" creationId="{C4C9DB24-529F-E8F9-536A-6C8005194892}"/>
-          </ac:spMkLst>
-        </pc:spChg>
-        <pc:spChg chg="mod">
-          <ac:chgData name="耀泉 马" userId="19e30af8d5659de2" providerId="LiveId" clId="{C3594856-CEDA-5129-B2AF-7962E3CA4CA3}" dt="2026-06-24T11:27:30.240" v="4673" actId="21"/>
-          <ac:spMkLst>
-            <pc:docMk/>
-            <pc:sldMk cId="2290997006" sldId="259"/>
-            <ac:spMk id="3" creationId="{21F482A8-7823-7754-9344-36EA99AB2D06}"/>
+            <pc:sldMk cId="3119878381" sldId="278"/>
+            <ac:spMk id="5" creationId="{34A65818-1CEC-FB1F-61D7-C34FBEA135F9}"/>
           </ac:spMkLst>
         </pc:spChg>
         <pc:spChg chg="del">
-          <ac:chgData name="耀泉 马" userId="19e30af8d5659de2" providerId="LiveId" clId="{C3594856-CEDA-5129-B2AF-7962E3CA4CA3}" dt="2026-06-24T09:21:20.289" v="4640" actId="478"/>
+          <ac:chgData name="耀泉 马" userId="19e30af8d5659de2" providerId="LiveId" clId="{C3594856-CEDA-5129-B2AF-7962E3CA4CA3}" dt="2026-08-04T13:26:56.317" v="4714" actId="478"/>
           <ac:spMkLst>
             <pc:docMk/>
-            <pc:sldMk cId="2290997006" sldId="259"/>
-            <ac:spMk id="4" creationId="{DF5A7550-6A6F-9663-805A-FD359D882D32}"/>
+            <pc:sldMk cId="3119878381" sldId="278"/>
+            <ac:spMk id="7" creationId="{8964B4F0-0E7A-4549-5365-87217DB72E9C}"/>
           </ac:spMkLst>
         </pc:spChg>
-      </pc:sldChg>
-      <pc:sldChg chg="modSp new mod ord modShow">
-        <pc:chgData name="耀泉 马" userId="19e30af8d5659de2" providerId="LiveId" clId="{C3594856-CEDA-5129-B2AF-7962E3CA4CA3}" dt="2026-06-24T01:56:32.788" v="3943" actId="34476"/>
-        <pc:sldMkLst>
-          <pc:docMk/>
-          <pc:sldMk cId="4138975813" sldId="260"/>
-        </pc:sldMkLst>
-        <pc:spChg chg="mod">
-          <ac:chgData name="耀泉 马" userId="19e30af8d5659de2" providerId="LiveId" clId="{C3594856-CEDA-5129-B2AF-7962E3CA4CA3}" dt="2026-05-30T12:46:37.414" v="1612" actId="20577"/>
+        <pc:spChg chg="add mod">
+          <ac:chgData name="耀泉 马" userId="19e30af8d5659de2" providerId="LiveId" clId="{C3594856-CEDA-5129-B2AF-7962E3CA4CA3}" dt="2026-08-04T14:43:30.301" v="5438" actId="20577"/>
           <ac:spMkLst>
             <pc:docMk/>
-            <pc:sldMk cId="4138975813" sldId="260"/>
-            <ac:spMk id="2" creationId="{E44F908C-28C7-6B0F-B44D-D2DA2C3C6071}"/>
+            <pc:sldMk cId="3119878381" sldId="278"/>
+            <ac:spMk id="8" creationId="{7AC27DC5-5F28-899C-44FA-33772F71BDF9}"/>
           </ac:spMkLst>
         </pc:spChg>
-        <pc:spChg chg="mod">
-          <ac:chgData name="耀泉 马" userId="19e30af8d5659de2" providerId="LiveId" clId="{C3594856-CEDA-5129-B2AF-7962E3CA4CA3}" dt="2026-06-08T10:18:11.467" v="3089" actId="20577"/>
+        <pc:spChg chg="add mod">
+          <ac:chgData name="耀泉 马" userId="19e30af8d5659de2" providerId="LiveId" clId="{C3594856-CEDA-5129-B2AF-7962E3CA4CA3}" dt="2026-08-04T14:43:34.101" v="5442" actId="20577"/>
           <ac:spMkLst>
             <pc:docMk/>
-            <pc:sldMk cId="4138975813" sldId="260"/>
-            <ac:spMk id="3" creationId="{8F04DE2E-D81A-FC94-4DA8-8CE8BD15DED1}"/>
+            <pc:sldMk cId="3119878381" sldId="278"/>
+            <ac:spMk id="9" creationId="{B7A8941D-0DE7-F132-B4FD-7B0F7263AF29}"/>
           </ac:spMkLst>
         </pc:spChg>
-      </pc:sldChg>
-      <pc:sldChg chg="modSp new mod ord modShow">
-        <pc:chgData name="耀泉 马" userId="19e30af8d5659de2" providerId="LiveId" clId="{C3594856-CEDA-5129-B2AF-7962E3CA4CA3}" dt="2026-06-24T01:56:32.788" v="3943" actId="34476"/>
-        <pc:sldMkLst>
-          <pc:docMk/>
-          <pc:sldMk cId="3186421945" sldId="261"/>
-        </pc:sldMkLst>
-        <pc:spChg chg="mod">
-          <ac:chgData name="耀泉 马" userId="19e30af8d5659de2" providerId="LiveId" clId="{C3594856-CEDA-5129-B2AF-7962E3CA4CA3}" dt="2026-05-30T12:49:29.750" v="1658" actId="20577"/>
+        <pc:spChg chg="add mod">
+          <ac:chgData name="耀泉 马" userId="19e30af8d5659de2" providerId="LiveId" clId="{C3594856-CEDA-5129-B2AF-7962E3CA4CA3}" dt="2026-08-04T15:04:00.392" v="5651" actId="1038"/>
           <ac:spMkLst>
             <pc:docMk/>
-            <pc:sldMk cId="3186421945" sldId="261"/>
-            <ac:spMk id="2" creationId="{B72AF47D-19A6-CBF7-155E-C22C0B9CEB17}"/>
+            <pc:sldMk cId="3119878381" sldId="278"/>
+            <ac:spMk id="10" creationId="{C4DDAB4C-1AE7-1922-F4BC-A65CC78224B1}"/>
           </ac:spMkLst>
         </pc:spChg>
-        <pc:spChg chg="mod">
-          <ac:chgData name="耀泉 马" userId="19e30af8d5659de2" providerId="LiveId" clId="{C3594856-CEDA-5129-B2AF-7962E3CA4CA3}" dt="2026-06-08T08:46:38.316" v="3050" actId="21"/>
+        <pc:spChg chg="add mod">
+          <ac:chgData name="耀泉 马" userId="19e30af8d5659de2" providerId="LiveId" clId="{C3594856-CEDA-5129-B2AF-7962E3CA4CA3}" dt="2026-08-04T15:03:57.420" v="5650" actId="1038"/>
           <ac:spMkLst>
             <pc:docMk/>
-            <pc:sldMk cId="3186421945" sldId="261"/>
-            <ac:spMk id="3" creationId="{27F09DC5-3A9E-91B2-7AC9-A3742F077DAE}"/>
+            <pc:sldMk cId="3119878381" sldId="278"/>
+            <ac:spMk id="11" creationId="{C164E22E-05CA-BBCC-AFE8-D3CE758510BC}"/>
           </ac:spMkLst>
         </pc:spChg>
-      </pc:sldChg>
-      <pc:sldChg chg="modSp new del mod">
-        <pc:chgData name="耀泉 马" userId="19e30af8d5659de2" providerId="LiveId" clId="{C3594856-CEDA-5129-B2AF-7962E3CA4CA3}" dt="2026-06-23T23:41:41.618" v="3614" actId="2696"/>
-        <pc:sldMkLst>
-          <pc:docMk/>
-          <pc:sldMk cId="2309705259" sldId="262"/>
-        </pc:sldMkLst>
-      </pc:sldChg>
-      <pc:sldChg chg="addSp delSp modSp new del mod">
-        <pc:chgData name="耀泉 马" userId="19e30af8d5659de2" providerId="LiveId" clId="{C3594856-CEDA-5129-B2AF-7962E3CA4CA3}" dt="2026-06-23T16:15:20.125" v="3548" actId="2696"/>
-        <pc:sldMkLst>
-          <pc:docMk/>
-          <pc:sldMk cId="1460251189" sldId="264"/>
-        </pc:sldMkLst>
         <pc:spChg chg="add mod">
-          <ac:chgData name="耀泉 马" userId="19e30af8d5659de2" providerId="LiveId" clId="{C3594856-CEDA-5129-B2AF-7962E3CA4CA3}" dt="2026-06-23T15:03:14.441" v="3535" actId="478"/>
+          <ac:chgData name="耀泉 马" userId="19e30af8d5659de2" providerId="LiveId" clId="{C3594856-CEDA-5129-B2AF-7962E3CA4CA3}" dt="2026-08-04T15:03:52.841" v="5649" actId="1038"/>
           <ac:spMkLst>
             <pc:docMk/>
-            <pc:sldMk cId="1460251189" sldId="264"/>
-            <ac:spMk id="6" creationId="{5FE27286-F888-4CC9-0FFA-F600AF0FA391}"/>
+            <pc:sldMk cId="3119878381" sldId="278"/>
+            <ac:spMk id="12" creationId="{2D66A471-B91A-D358-C21D-74AB14268A12}"/>
           </ac:spMkLst>
         </pc:spChg>
-        <pc:graphicFrameChg chg="add del mod ord modGraphic">
-          <ac:chgData name="耀泉 马" userId="19e30af8d5659de2" providerId="LiveId" clId="{C3594856-CEDA-5129-B2AF-7962E3CA4CA3}" dt="2026-06-23T15:03:14.441" v="3535" actId="478"/>
-          <ac:graphicFrameMkLst>
-            <pc:docMk/>
-            <pc:sldMk cId="1460251189" sldId="264"/>
-            <ac:graphicFrameMk id="5" creationId="{70791B32-F5E3-0A59-4F83-9F0310339322}"/>
-          </ac:graphicFrameMkLst>
-        </pc:graphicFrameChg>
-      </pc:sldChg>
-      <pc:sldChg chg="add">
-        <pc:chgData name="耀泉 马" userId="19e30af8d5659de2" providerId="LiveId" clId="{C3594856-CEDA-5129-B2AF-7962E3CA4CA3}" dt="2026-06-23T15:26:27.346" v="3546"/>
-        <pc:sldMkLst>
-          <pc:docMk/>
-          <pc:sldMk cId="1868540481" sldId="265"/>
-        </pc:sldMkLst>
-      </pc:sldChg>
-      <pc:sldChg chg="modSp add del mod">
-        <pc:chgData name="耀泉 马" userId="19e30af8d5659de2" providerId="LiveId" clId="{C3594856-CEDA-5129-B2AF-7962E3CA4CA3}" dt="2026-06-23T15:26:22.794" v="3545" actId="2696"/>
-        <pc:sldMkLst>
-          <pc:docMk/>
-          <pc:sldMk cId="3118782796" sldId="265"/>
-        </pc:sldMkLst>
-      </pc:sldChg>
-      <pc:sldChg chg="modSp add del mod">
-        <pc:chgData name="耀泉 马" userId="19e30af8d5659de2" providerId="LiveId" clId="{C3594856-CEDA-5129-B2AF-7962E3CA4CA3}" dt="2026-06-23T15:26:22.794" v="3545" actId="2696"/>
-        <pc:sldMkLst>
-          <pc:docMk/>
-          <pc:sldMk cId="2827491839" sldId="267"/>
-        </pc:sldMkLst>
-      </pc:sldChg>
-      <pc:sldChg chg="add">
-        <pc:chgData name="耀泉 马" userId="19e30af8d5659de2" providerId="LiveId" clId="{C3594856-CEDA-5129-B2AF-7962E3CA4CA3}" dt="2026-06-23T15:26:27.346" v="3546"/>
-        <pc:sldMkLst>
-          <pc:docMk/>
-          <pc:sldMk cId="3190719270" sldId="267"/>
-        </pc:sldMkLst>
-      </pc:sldChg>
-      <pc:sldChg chg="add">
-        <pc:chgData name="耀泉 马" userId="19e30af8d5659de2" providerId="LiveId" clId="{C3594856-CEDA-5129-B2AF-7962E3CA4CA3}" dt="2026-06-23T15:26:27.346" v="3546"/>
-        <pc:sldMkLst>
-          <pc:docMk/>
-          <pc:sldMk cId="2112930540" sldId="268"/>
-        </pc:sldMkLst>
-      </pc:sldChg>
-      <pc:sldChg chg="modSp new del mod">
-        <pc:chgData name="耀泉 马" userId="19e30af8d5659de2" providerId="LiveId" clId="{C3594856-CEDA-5129-B2AF-7962E3CA4CA3}" dt="2026-06-23T15:26:22.794" v="3545" actId="2696"/>
-        <pc:sldMkLst>
-          <pc:docMk/>
-          <pc:sldMk cId="3891100127" sldId="268"/>
-        </pc:sldMkLst>
-      </pc:sldChg>
-      <pc:sldChg chg="addSp delSp modSp add mod">
-        <pc:chgData name="耀泉 马" userId="19e30af8d5659de2" providerId="LiveId" clId="{C3594856-CEDA-5129-B2AF-7962E3CA4CA3}" dt="2026-06-24T02:01:46.126" v="4011" actId="20577"/>
-        <pc:sldMkLst>
-          <pc:docMk/>
-          <pc:sldMk cId="1166682950" sldId="269"/>
-        </pc:sldMkLst>
-        <pc:spChg chg="mod">
-          <ac:chgData name="耀泉 马" userId="19e30af8d5659de2" providerId="LiveId" clId="{C3594856-CEDA-5129-B2AF-7962E3CA4CA3}" dt="2026-06-24T01:48:42.583" v="3892" actId="20577"/>
+        <pc:spChg chg="add mod">
+          <ac:chgData name="耀泉 马" userId="19e30af8d5659de2" providerId="LiveId" clId="{C3594856-CEDA-5129-B2AF-7962E3CA4CA3}" dt="2026-08-04T14:41:59.421" v="5408" actId="1038"/>
           <ac:spMkLst>
             <pc:docMk/>
-            <pc:sldMk cId="1166682950" sldId="269"/>
-            <ac:spMk id="2" creationId="{20E56253-1225-28D3-AE49-6350DFCF1E16}"/>
-          </ac:spMkLst>
-        </pc:spChg>
-        <pc:spChg chg="del">
-          <ac:chgData name="耀泉 马" userId="19e30af8d5659de2" providerId="LiveId" clId="{C3594856-CEDA-5129-B2AF-7962E3CA4CA3}" dt="2026-06-23T15:03:39.743" v="3541" actId="478"/>
-          <ac:spMkLst>
-            <pc:docMk/>
-            <pc:sldMk cId="1166682950" sldId="269"/>
-            <ac:spMk id="4" creationId="{14716716-92C1-8645-2CD1-D2992DF28D1D}"/>
+            <pc:sldMk cId="3119878381" sldId="278"/>
+            <ac:spMk id="18" creationId="{88F9D4CC-1D62-1860-9604-2F25D8CAD055}"/>
           </ac:spMkLst>
         </pc:spChg>
         <pc:spChg chg="add del mod">
-          <ac:chgData name="耀泉 马" userId="19e30af8d5659de2" providerId="LiveId" clId="{C3594856-CEDA-5129-B2AF-7962E3CA4CA3}" dt="2026-06-23T15:03:32.367" v="3539"/>
+          <ac:chgData name="耀泉 马" userId="19e30af8d5659de2" providerId="LiveId" clId="{C3594856-CEDA-5129-B2AF-7962E3CA4CA3}" dt="2026-08-04T14:42:13.553" v="5412" actId="478"/>
           <ac:spMkLst>
             <pc:docMk/>
-            <pc:sldMk cId="1166682950" sldId="269"/>
-            <ac:spMk id="6" creationId="{D014F67C-DBD8-0352-CD0A-6296EFF50F8A}"/>
+            <pc:sldMk cId="3119878381" sldId="278"/>
+            <ac:spMk id="20" creationId="{A6C0849B-DA5E-BD96-7B74-FDB458FA6CCC}"/>
           </ac:spMkLst>
         </pc:spChg>
         <pc:spChg chg="add del mod">
-          <ac:chgData name="耀泉 马" userId="19e30af8d5659de2" providerId="LiveId" clId="{C3594856-CEDA-5129-B2AF-7962E3CA4CA3}" dt="2026-06-23T16:48:28.673" v="3554" actId="3680"/>
+          <ac:chgData name="耀泉 马" userId="19e30af8d5659de2" providerId="LiveId" clId="{C3594856-CEDA-5129-B2AF-7962E3CA4CA3}" dt="2026-08-04T13:35:10.067" v="4808" actId="478"/>
           <ac:spMkLst>
             <pc:docMk/>
-            <pc:sldMk cId="1166682950" sldId="269"/>
-            <ac:spMk id="9" creationId="{6AE662AD-BFAD-F7AC-12CA-4EE66CFB1B2F}"/>
+            <pc:sldMk cId="3119878381" sldId="278"/>
+            <ac:spMk id="22" creationId="{4B1F8400-EA09-AD27-9945-9BAE076C7D94}"/>
           </ac:spMkLst>
         </pc:spChg>
-        <pc:graphicFrameChg chg="del">
-          <ac:chgData name="耀泉 马" userId="19e30af8d5659de2" providerId="LiveId" clId="{C3594856-CEDA-5129-B2AF-7962E3CA4CA3}" dt="2026-06-23T15:03:20.092" v="3538" actId="478"/>
-          <ac:graphicFrameMkLst>
-            <pc:docMk/>
-            <pc:sldMk cId="1166682950" sldId="269"/>
-            <ac:graphicFrameMk id="5" creationId="{141C8503-93A7-A3CE-9B67-526ADCAEDDAF}"/>
-          </ac:graphicFrameMkLst>
-        </pc:graphicFrameChg>
-        <pc:graphicFrameChg chg="add mod ord modGraphic">
-          <ac:chgData name="耀泉 马" userId="19e30af8d5659de2" providerId="LiveId" clId="{C3594856-CEDA-5129-B2AF-7962E3CA4CA3}" dt="2026-06-24T02:01:46.126" v="4011" actId="20577"/>
-          <ac:graphicFrameMkLst>
-            <pc:docMk/>
-            <pc:sldMk cId="1166682950" sldId="269"/>
-            <ac:graphicFrameMk id="10" creationId="{B631E433-B7DC-20F5-BDB8-5FFC5DFB35B0}"/>
-          </ac:graphicFrameMkLst>
-        </pc:graphicFrameChg>
-        <pc:picChg chg="add del mod">
-          <ac:chgData name="耀泉 马" userId="19e30af8d5659de2" providerId="LiveId" clId="{C3594856-CEDA-5129-B2AF-7962E3CA4CA3}" dt="2026-06-23T16:48:05.365" v="3553" actId="478"/>
-          <ac:picMkLst>
-            <pc:docMk/>
-            <pc:sldMk cId="1166682950" sldId="269"/>
-            <ac:picMk id="7" creationId="{BDFA5987-DEF5-BA81-E3A0-84532F67985E}"/>
-          </ac:picMkLst>
-        </pc:picChg>
-      </pc:sldChg>
-      <pc:sldChg chg="add del">
-        <pc:chgData name="耀泉 马" userId="19e30af8d5659de2" providerId="LiveId" clId="{C3594856-CEDA-5129-B2AF-7962E3CA4CA3}" dt="2026-06-23T15:03:16.109" v="3537"/>
-        <pc:sldMkLst>
-          <pc:docMk/>
-          <pc:sldMk cId="404743716" sldId="270"/>
-        </pc:sldMkLst>
-      </pc:sldChg>
-      <pc:sldChg chg="modSp new mod">
-        <pc:chgData name="耀泉 马" userId="19e30af8d5659de2" providerId="LiveId" clId="{C3594856-CEDA-5129-B2AF-7962E3CA4CA3}" dt="2026-06-23T23:47:16.405" v="3698"/>
-        <pc:sldMkLst>
-          <pc:docMk/>
-          <pc:sldMk cId="2672122693" sldId="270"/>
-        </pc:sldMkLst>
-        <pc:spChg chg="mod">
-          <ac:chgData name="耀泉 马" userId="19e30af8d5659de2" providerId="LiveId" clId="{C3594856-CEDA-5129-B2AF-7962E3CA4CA3}" dt="2026-06-23T23:41:36.505" v="3613"/>
+        <pc:spChg chg="add del mod">
+          <ac:chgData name="耀泉 马" userId="19e30af8d5659de2" providerId="LiveId" clId="{C3594856-CEDA-5129-B2AF-7962E3CA4CA3}" dt="2026-08-04T14:42:23.024" v="5417" actId="478"/>
           <ac:spMkLst>
             <pc:docMk/>
-            <pc:sldMk cId="2672122693" sldId="270"/>
-            <ac:spMk id="2" creationId="{152DB0DE-3E87-978D-3FA2-7EB999849C3B}"/>
+            <pc:sldMk cId="3119878381" sldId="278"/>
+            <ac:spMk id="23" creationId="{F7171F72-131D-7D8D-E047-12A1516F09BD}"/>
           </ac:spMkLst>
         </pc:spChg>
-        <pc:spChg chg="mod">
-          <ac:chgData name="耀泉 马" userId="19e30af8d5659de2" providerId="LiveId" clId="{C3594856-CEDA-5129-B2AF-7962E3CA4CA3}" dt="2026-06-23T23:46:54.475" v="3697" actId="20577"/>
+        <pc:spChg chg="add del mod">
+          <ac:chgData name="耀泉 马" userId="19e30af8d5659de2" providerId="LiveId" clId="{C3594856-CEDA-5129-B2AF-7962E3CA4CA3}" dt="2026-08-04T14:31:59.381" v="5213" actId="478"/>
           <ac:spMkLst>
             <pc:docMk/>
-            <pc:sldMk cId="2672122693" sldId="270"/>
-            <ac:spMk id="3" creationId="{4EDADF3A-A897-EF56-200A-C51EA0241D5A}"/>
+            <pc:sldMk cId="3119878381" sldId="278"/>
+            <ac:spMk id="25" creationId="{0C289C8B-75AF-3DF8-5AED-F74E878A947B}"/>
           </ac:spMkLst>
         </pc:spChg>
-        <pc:spChg chg="mod">
-          <ac:chgData name="耀泉 马" userId="19e30af8d5659de2" providerId="LiveId" clId="{C3594856-CEDA-5129-B2AF-7962E3CA4CA3}" dt="2026-06-23T23:47:16.405" v="3698"/>
+        <pc:spChg chg="add del mod">
+          <ac:chgData name="耀泉 马" userId="19e30af8d5659de2" providerId="LiveId" clId="{C3594856-CEDA-5129-B2AF-7962E3CA4CA3}" dt="2026-08-04T13:39:07.337" v="4863"/>
           <ac:spMkLst>
             <pc:docMk/>
-            <pc:sldMk cId="2672122693" sldId="270"/>
-            <ac:spMk id="4" creationId="{C942C2E9-1980-DE28-BD7D-FD75F8B97B49}"/>
+            <pc:sldMk cId="3119878381" sldId="278"/>
+            <ac:spMk id="26" creationId="{E5E15298-7329-782E-D3EA-51391DAF4B14}"/>
           </ac:spMkLst>
         </pc:spChg>
-      </pc:sldChg>
-      <pc:sldChg chg="modSp add mod">
-        <pc:chgData name="耀泉 马" userId="19e30af8d5659de2" providerId="LiveId" clId="{C3594856-CEDA-5129-B2AF-7962E3CA4CA3}" dt="2026-06-24T01:55:53.758" v="3942" actId="20577"/>
-        <pc:sldMkLst>
-          <pc:docMk/>
-          <pc:sldMk cId="3929797536" sldId="271"/>
-        </pc:sldMkLst>
-        <pc:spChg chg="mod">
-          <ac:chgData name="耀泉 马" userId="19e30af8d5659de2" providerId="LiveId" clId="{C3594856-CEDA-5129-B2AF-7962E3CA4CA3}" dt="2026-06-24T01:55:53.758" v="3942" actId="20577"/>
+        <pc:spChg chg="add del mod">
+          <ac:chgData name="耀泉 马" userId="19e30af8d5659de2" providerId="LiveId" clId="{C3594856-CEDA-5129-B2AF-7962E3CA4CA3}" dt="2026-08-04T14:32:54.944" v="5241"/>
           <ac:spMkLst>
             <pc:docMk/>
-            <pc:sldMk cId="3929797536" sldId="271"/>
-            <ac:spMk id="2" creationId="{E9C65EE4-EBFB-6CC9-B51A-03C82DDDCB06}"/>
+            <pc:sldMk cId="3119878381" sldId="278"/>
+            <ac:spMk id="27" creationId="{F63E378E-A6CE-6980-B7B5-932F20344D3A}"/>
           </ac:spMkLst>
         </pc:spChg>
-      </pc:sldChg>
-      <pc:sldChg chg="modSp add mod">
-        <pc:chgData name="耀泉 马" userId="19e30af8d5659de2" providerId="LiveId" clId="{C3594856-CEDA-5129-B2AF-7962E3CA4CA3}" dt="2026-06-24T01:48:46.559" v="3896" actId="20577"/>
-        <pc:sldMkLst>
-          <pc:docMk/>
-          <pc:sldMk cId="3417823520" sldId="272"/>
-        </pc:sldMkLst>
-        <pc:spChg chg="mod">
-          <ac:chgData name="耀泉 马" userId="19e30af8d5659de2" providerId="LiveId" clId="{C3594856-CEDA-5129-B2AF-7962E3CA4CA3}" dt="2026-06-24T01:48:46.559" v="3896" actId="20577"/>
+        <pc:spChg chg="add del mod">
+          <ac:chgData name="耀泉 马" userId="19e30af8d5659de2" providerId="LiveId" clId="{C3594856-CEDA-5129-B2AF-7962E3CA4CA3}" dt="2026-08-04T13:40:36.708" v="4954"/>
           <ac:spMkLst>
             <pc:docMk/>
-            <pc:sldMk cId="3417823520" sldId="272"/>
-            <ac:spMk id="2" creationId="{4342E1B2-3CBD-6234-30FE-114832EA0415}"/>
-          </ac:spMkLst>
-        </pc:spChg>
-        <pc:graphicFrameChg chg="mod modGraphic">
-          <ac:chgData name="耀泉 马" userId="19e30af8d5659de2" providerId="LiveId" clId="{C3594856-CEDA-5129-B2AF-7962E3CA4CA3}" dt="2026-06-24T01:29:07.228" v="3756" actId="20577"/>
-          <ac:graphicFrameMkLst>
-            <pc:docMk/>
-            <pc:sldMk cId="3417823520" sldId="272"/>
-            <ac:graphicFrameMk id="10" creationId="{0245C92B-A193-1D64-635E-503E3033EF64}"/>
-          </ac:graphicFrameMkLst>
-        </pc:graphicFrameChg>
-      </pc:sldChg>
-      <pc:sldChg chg="modSp add mod modNotesTx">
-        <pc:chgData name="耀泉 马" userId="19e30af8d5659de2" providerId="LiveId" clId="{C3594856-CEDA-5129-B2AF-7962E3CA4CA3}" dt="2026-06-24T13:25:07.292" v="4710" actId="20577"/>
-        <pc:sldMkLst>
-          <pc:docMk/>
-          <pc:sldMk cId="2193795063" sldId="273"/>
-        </pc:sldMkLst>
-        <pc:spChg chg="mod">
-          <ac:chgData name="耀泉 马" userId="19e30af8d5659de2" providerId="LiveId" clId="{C3594856-CEDA-5129-B2AF-7962E3CA4CA3}" dt="2026-06-24T01:48:50.072" v="3900" actId="20577"/>
-          <ac:spMkLst>
-            <pc:docMk/>
-            <pc:sldMk cId="2193795063" sldId="273"/>
-            <ac:spMk id="2" creationId="{F0C33540-61D0-4173-C6CA-19A1B3E62A09}"/>
-          </ac:spMkLst>
-        </pc:spChg>
-        <pc:graphicFrameChg chg="mod modGraphic">
-          <ac:chgData name="耀泉 马" userId="19e30af8d5659de2" providerId="LiveId" clId="{C3594856-CEDA-5129-B2AF-7962E3CA4CA3}" dt="2026-06-24T13:25:07.292" v="4710" actId="20577"/>
-          <ac:graphicFrameMkLst>
-            <pc:docMk/>
-            <pc:sldMk cId="2193795063" sldId="273"/>
-            <ac:graphicFrameMk id="10" creationId="{F91321FB-9101-E648-1EBE-2A17519DD438}"/>
-          </ac:graphicFrameMkLst>
-        </pc:graphicFrameChg>
-      </pc:sldChg>
-      <pc:sldChg chg="add del">
-        <pc:chgData name="耀泉 马" userId="19e30af8d5659de2" providerId="LiveId" clId="{C3594856-CEDA-5129-B2AF-7962E3CA4CA3}" dt="2026-06-24T01:22:54.188" v="3724" actId="2696"/>
-        <pc:sldMkLst>
-          <pc:docMk/>
-          <pc:sldMk cId="134176596" sldId="274"/>
-        </pc:sldMkLst>
-      </pc:sldChg>
-      <pc:sldChg chg="add del">
-        <pc:chgData name="耀泉 马" userId="19e30af8d5659de2" providerId="LiveId" clId="{C3594856-CEDA-5129-B2AF-7962E3CA4CA3}" dt="2026-06-24T01:46:56.706" v="3864" actId="2696"/>
-        <pc:sldMkLst>
-          <pc:docMk/>
-          <pc:sldMk cId="272629484" sldId="274"/>
-        </pc:sldMkLst>
-      </pc:sldChg>
-      <pc:sldChg chg="modSp add mod">
-        <pc:chgData name="耀泉 马" userId="19e30af8d5659de2" providerId="LiveId" clId="{C3594856-CEDA-5129-B2AF-7962E3CA4CA3}" dt="2026-06-24T13:25:21.295" v="4712" actId="20577"/>
-        <pc:sldMkLst>
-          <pc:docMk/>
-          <pc:sldMk cId="2397392965" sldId="274"/>
-        </pc:sldMkLst>
-        <pc:spChg chg="mod">
-          <ac:chgData name="耀泉 马" userId="19e30af8d5659de2" providerId="LiveId" clId="{C3594856-CEDA-5129-B2AF-7962E3CA4CA3}" dt="2026-06-24T01:48:54.334" v="3904" actId="20577"/>
-          <ac:spMkLst>
-            <pc:docMk/>
-            <pc:sldMk cId="2397392965" sldId="274"/>
-            <ac:spMk id="2" creationId="{7EFBBF97-492F-15A3-4FE4-A6FD40273145}"/>
-          </ac:spMkLst>
-        </pc:spChg>
-        <pc:graphicFrameChg chg="mod modGraphic">
-          <ac:chgData name="耀泉 马" userId="19e30af8d5659de2" providerId="LiveId" clId="{C3594856-CEDA-5129-B2AF-7962E3CA4CA3}" dt="2026-06-24T13:25:21.295" v="4712" actId="20577"/>
-          <ac:graphicFrameMkLst>
-            <pc:docMk/>
-            <pc:sldMk cId="2397392965" sldId="274"/>
-            <ac:graphicFrameMk id="10" creationId="{8584577C-DA11-81F2-4273-1F74575E0F60}"/>
-          </ac:graphicFrameMkLst>
-        </pc:graphicFrameChg>
-      </pc:sldChg>
-      <pc:sldChg chg="add del">
-        <pc:chgData name="耀泉 马" userId="19e30af8d5659de2" providerId="LiveId" clId="{C3594856-CEDA-5129-B2AF-7962E3CA4CA3}" dt="2026-06-24T01:21:34.420" v="3709"/>
-        <pc:sldMkLst>
-          <pc:docMk/>
-          <pc:sldMk cId="3527994373" sldId="274"/>
-        </pc:sldMkLst>
-      </pc:sldChg>
-      <pc:sldChg chg="modSp add del mod">
-        <pc:chgData name="耀泉 马" userId="19e30af8d5659de2" providerId="LiveId" clId="{C3594856-CEDA-5129-B2AF-7962E3CA4CA3}" dt="2026-06-24T01:45:59.665" v="3839" actId="2696"/>
-        <pc:sldMkLst>
-          <pc:docMk/>
-          <pc:sldMk cId="3967696160" sldId="274"/>
-        </pc:sldMkLst>
-        <pc:graphicFrameChg chg="mod modGraphic">
-          <ac:chgData name="耀泉 马" userId="19e30af8d5659de2" providerId="LiveId" clId="{C3594856-CEDA-5129-B2AF-7962E3CA4CA3}" dt="2026-06-24T01:45:50.168" v="3838" actId="20577"/>
-          <ac:graphicFrameMkLst>
-            <pc:docMk/>
-            <pc:sldMk cId="3967696160" sldId="274"/>
-            <ac:graphicFrameMk id="10" creationId="{0E448083-180A-4F6E-CCF3-6BB808124D80}"/>
-          </ac:graphicFrameMkLst>
-        </pc:graphicFrameChg>
-      </pc:sldChg>
-      <pc:sldChg chg="addSp delSp modSp new mod modNotesTx">
-        <pc:chgData name="耀泉 马" userId="19e30af8d5659de2" providerId="LiveId" clId="{C3594856-CEDA-5129-B2AF-7962E3CA4CA3}" dt="2026-06-24T11:34:30.157" v="4684" actId="20577"/>
-        <pc:sldMkLst>
-          <pc:docMk/>
-          <pc:sldMk cId="497191526" sldId="275"/>
-        </pc:sldMkLst>
-        <pc:spChg chg="mod">
-          <ac:chgData name="耀泉 马" userId="19e30af8d5659de2" providerId="LiveId" clId="{C3594856-CEDA-5129-B2AF-7962E3CA4CA3}" dt="2026-06-24T01:59:36.650" v="4005" actId="20577"/>
-          <ac:spMkLst>
-            <pc:docMk/>
-            <pc:sldMk cId="497191526" sldId="275"/>
-            <ac:spMk id="2" creationId="{F2B0B489-2C50-AC2E-9C89-EAD07D82D7C2}"/>
-          </ac:spMkLst>
-        </pc:spChg>
-        <pc:spChg chg="del">
-          <ac:chgData name="耀泉 马" userId="19e30af8d5659de2" providerId="LiveId" clId="{C3594856-CEDA-5129-B2AF-7962E3CA4CA3}" dt="2026-06-24T01:59:10.028" v="3947"/>
-          <ac:spMkLst>
-            <pc:docMk/>
-            <pc:sldMk cId="497191526" sldId="275"/>
-            <ac:spMk id="3" creationId="{A772D118-AD67-C1A0-DCE8-DF594606E104}"/>
-          </ac:spMkLst>
-        </pc:spChg>
-        <pc:spChg chg="del mod">
-          <ac:chgData name="耀泉 马" userId="19e30af8d5659de2" providerId="LiveId" clId="{C3594856-CEDA-5129-B2AF-7962E3CA4CA3}" dt="2026-06-24T01:59:46.643" v="4007" actId="478"/>
-          <ac:spMkLst>
-            <pc:docMk/>
-            <pc:sldMk cId="497191526" sldId="275"/>
-            <ac:spMk id="4" creationId="{0B2253A1-9BC1-11D3-395F-B15168F74575}"/>
+            <pc:sldMk cId="3119878381" sldId="278"/>
+            <ac:spMk id="28" creationId="{A5734EB0-F5E4-F4F1-B4DF-5AD3198AFEFD}"/>
           </ac:spMkLst>
         </pc:spChg>
         <pc:spChg chg="add mod">
-          <ac:chgData name="耀泉 马" userId="19e30af8d5659de2" providerId="LiveId" clId="{C3594856-CEDA-5129-B2AF-7962E3CA4CA3}" dt="2026-06-24T02:01:02.957" v="4010" actId="14100"/>
+          <ac:chgData name="耀泉 马" userId="19e30af8d5659de2" providerId="LiveId" clId="{C3594856-CEDA-5129-B2AF-7962E3CA4CA3}" dt="2026-08-04T14:59:40.917" v="5599" actId="167"/>
           <ac:spMkLst>
             <pc:docMk/>
-            <pc:sldMk cId="497191526" sldId="275"/>
-            <ac:spMk id="7" creationId="{1922252E-2022-2E9B-5941-BB5C00BBE8B6}"/>
-          </ac:spMkLst>
-        </pc:spChg>
-        <pc:picChg chg="add mod">
-          <ac:chgData name="耀泉 马" userId="19e30af8d5659de2" providerId="LiveId" clId="{C3594856-CEDA-5129-B2AF-7962E3CA4CA3}" dt="2026-06-24T01:59:41.158" v="4006" actId="1076"/>
-          <ac:picMkLst>
-            <pc:docMk/>
-            <pc:sldMk cId="497191526" sldId="275"/>
-            <ac:picMk id="5" creationId="{175CE7D6-33CB-62FD-CE37-D17A77DC6539}"/>
-          </ac:picMkLst>
-        </pc:picChg>
-      </pc:sldChg>
-      <pc:sldChg chg="add del">
-        <pc:chgData name="耀泉 马" userId="19e30af8d5659de2" providerId="LiveId" clId="{C3594856-CEDA-5129-B2AF-7962E3CA4CA3}" dt="2026-06-24T01:22:09.800" v="3712"/>
-        <pc:sldMkLst>
-          <pc:docMk/>
-          <pc:sldMk cId="2559788825" sldId="275"/>
-        </pc:sldMkLst>
-      </pc:sldChg>
-      <pc:sldChg chg="add del">
-        <pc:chgData name="耀泉 马" userId="19e30af8d5659de2" providerId="LiveId" clId="{C3594856-CEDA-5129-B2AF-7962E3CA4CA3}" dt="2026-06-24T01:23:02.669" v="3725" actId="2696"/>
-        <pc:sldMkLst>
-          <pc:docMk/>
-          <pc:sldMk cId="3954899924" sldId="275"/>
-        </pc:sldMkLst>
-      </pc:sldChg>
-      <pc:sldChg chg="addSp delSp modSp new mod">
-        <pc:chgData name="耀泉 马" userId="19e30af8d5659de2" providerId="LiveId" clId="{C3594856-CEDA-5129-B2AF-7962E3CA4CA3}" dt="2026-06-24T08:42:19.258" v="4298" actId="20577"/>
-        <pc:sldMkLst>
-          <pc:docMk/>
-          <pc:sldMk cId="290400329" sldId="276"/>
-        </pc:sldMkLst>
-        <pc:spChg chg="mod">
-          <ac:chgData name="耀泉 马" userId="19e30af8d5659de2" providerId="LiveId" clId="{C3594856-CEDA-5129-B2AF-7962E3CA4CA3}" dt="2026-06-24T08:27:52.003" v="4273" actId="20577"/>
-          <ac:spMkLst>
-            <pc:docMk/>
-            <pc:sldMk cId="290400329" sldId="276"/>
-            <ac:spMk id="2" creationId="{E6F04C8C-CFC1-3A57-E942-7158372B98BD}"/>
-          </ac:spMkLst>
-        </pc:spChg>
-        <pc:spChg chg="del">
-          <ac:chgData name="耀泉 马" userId="19e30af8d5659de2" providerId="LiveId" clId="{C3594856-CEDA-5129-B2AF-7962E3CA4CA3}" dt="2026-06-24T08:30:55.353" v="4275"/>
-          <ac:spMkLst>
-            <pc:docMk/>
-            <pc:sldMk cId="290400329" sldId="276"/>
-            <ac:spMk id="3" creationId="{80170F4B-5E73-07C9-C50E-EE7ACCB631E0}"/>
-          </ac:spMkLst>
-        </pc:spChg>
-        <pc:spChg chg="del mod">
-          <ac:chgData name="耀泉 马" userId="19e30af8d5659de2" providerId="LiveId" clId="{C3594856-CEDA-5129-B2AF-7962E3CA4CA3}" dt="2026-06-24T08:31:06.231" v="4278" actId="478"/>
-          <ac:spMkLst>
-            <pc:docMk/>
-            <pc:sldMk cId="290400329" sldId="276"/>
-            <ac:spMk id="4" creationId="{C52FBA3E-6D52-C1BD-EFC4-ECA3A7B3A849}"/>
+            <pc:sldMk cId="3119878381" sldId="278"/>
+            <ac:spMk id="29" creationId="{494FA997-2D10-E415-416A-76FAE0307F92}"/>
           </ac:spMkLst>
         </pc:spChg>
         <pc:spChg chg="add mod">
-          <ac:chgData name="耀泉 马" userId="19e30af8d5659de2" providerId="LiveId" clId="{C3594856-CEDA-5129-B2AF-7962E3CA4CA3}" dt="2026-06-24T08:42:19.258" v="4298" actId="20577"/>
+          <ac:chgData name="耀泉 马" userId="19e30af8d5659de2" providerId="LiveId" clId="{C3594856-CEDA-5129-B2AF-7962E3CA4CA3}" dt="2026-08-04T14:16:09.216" v="5024" actId="255"/>
           <ac:spMkLst>
             <pc:docMk/>
-            <pc:sldMk cId="290400329" sldId="276"/>
-            <ac:spMk id="7" creationId="{2C277453-62C5-D513-A72C-ECC353F60FEC}"/>
-          </ac:spMkLst>
-        </pc:spChg>
-        <pc:picChg chg="add mod ord">
-          <ac:chgData name="耀泉 马" userId="19e30af8d5659de2" providerId="LiveId" clId="{C3594856-CEDA-5129-B2AF-7962E3CA4CA3}" dt="2026-06-24T08:41:50.065" v="4292" actId="14100"/>
-          <ac:picMkLst>
-            <pc:docMk/>
-            <pc:sldMk cId="290400329" sldId="276"/>
-            <ac:picMk id="6" creationId="{D503E789-0E6C-5B3F-A111-0DA22162E5E7}"/>
-          </ac:picMkLst>
-        </pc:picChg>
-      </pc:sldChg>
-      <pc:sldChg chg="addSp delSp modSp new mod">
-        <pc:chgData name="耀泉 马" userId="19e30af8d5659de2" providerId="LiveId" clId="{C3594856-CEDA-5129-B2AF-7962E3CA4CA3}" dt="2026-06-24T09:19:33.085" v="4608" actId="20577"/>
-        <pc:sldMkLst>
-          <pc:docMk/>
-          <pc:sldMk cId="3357630599" sldId="277"/>
-        </pc:sldMkLst>
-        <pc:spChg chg="mod">
-          <ac:chgData name="耀泉 马" userId="19e30af8d5659de2" providerId="LiveId" clId="{C3594856-CEDA-5129-B2AF-7962E3CA4CA3}" dt="2026-06-24T09:17:19.899" v="4520" actId="1076"/>
-          <ac:spMkLst>
-            <pc:docMk/>
-            <pc:sldMk cId="3357630599" sldId="277"/>
-            <ac:spMk id="2" creationId="{C1C5F2E3-35C1-E8F3-4BCE-00822C4B620A}"/>
-          </ac:spMkLst>
-        </pc:spChg>
-        <pc:spChg chg="mod">
-          <ac:chgData name="耀泉 马" userId="19e30af8d5659de2" providerId="LiveId" clId="{C3594856-CEDA-5129-B2AF-7962E3CA4CA3}" dt="2026-06-24T09:17:33.008" v="4521" actId="1076"/>
-          <ac:spMkLst>
-            <pc:docMk/>
-            <pc:sldMk cId="3357630599" sldId="277"/>
-            <ac:spMk id="3" creationId="{9AAE8A98-549D-53AF-021A-D36A2EC758C3}"/>
-          </ac:spMkLst>
-        </pc:spChg>
-        <pc:spChg chg="del mod">
-          <ac:chgData name="耀泉 马" userId="19e30af8d5659de2" providerId="LiveId" clId="{C3594856-CEDA-5129-B2AF-7962E3CA4CA3}" dt="2026-06-24T08:48:10.504" v="4364" actId="478"/>
-          <ac:spMkLst>
-            <pc:docMk/>
-            <pc:sldMk cId="3357630599" sldId="277"/>
-            <ac:spMk id="4" creationId="{B0CE8D91-E6D0-C7FA-FD2A-F6913F8F31A5}"/>
+            <pc:sldMk cId="3119878381" sldId="278"/>
+            <ac:spMk id="34" creationId="{86AB97C0-EB97-54D2-A50E-0D07B0057592}"/>
           </ac:spMkLst>
         </pc:spChg>
         <pc:spChg chg="add mod">
-          <ac:chgData name="耀泉 马" userId="19e30af8d5659de2" providerId="LiveId" clId="{C3594856-CEDA-5129-B2AF-7962E3CA4CA3}" dt="2026-06-24T09:17:33.008" v="4521" actId="1076"/>
+          <ac:chgData name="耀泉 马" userId="19e30af8d5659de2" providerId="LiveId" clId="{C3594856-CEDA-5129-B2AF-7962E3CA4CA3}" dt="2026-08-04T14:30:23.557" v="5185" actId="1035"/>
           <ac:spMkLst>
             <pc:docMk/>
-            <pc:sldMk cId="3357630599" sldId="277"/>
-            <ac:spMk id="5" creationId="{E1F2CC37-57C3-C460-C13B-BAE5121F38F4}"/>
+            <pc:sldMk cId="3119878381" sldId="278"/>
+            <ac:spMk id="35" creationId="{CC8BFBAC-0B5E-B210-8F18-00548CEF9F66}"/>
           </ac:spMkLst>
         </pc:spChg>
         <pc:spChg chg="add mod">
-          <ac:chgData name="耀泉 马" userId="19e30af8d5659de2" providerId="LiveId" clId="{C3594856-CEDA-5129-B2AF-7962E3CA4CA3}" dt="2026-06-24T09:19:33.085" v="4608" actId="20577"/>
+          <ac:chgData name="耀泉 马" userId="19e30af8d5659de2" providerId="LiveId" clId="{C3594856-CEDA-5129-B2AF-7962E3CA4CA3}" dt="2026-08-04T14:30:18.955" v="5173" actId="1035"/>
           <ac:spMkLst>
             <pc:docMk/>
-            <pc:sldMk cId="3357630599" sldId="277"/>
-            <ac:spMk id="6" creationId="{1317F66F-F524-94AA-15D5-B44DC8A41F54}"/>
+            <pc:sldMk cId="3119878381" sldId="278"/>
+            <ac:spMk id="36" creationId="{1BB18A80-BC94-3685-3609-92BA732DFA61}"/>
           </ac:spMkLst>
         </pc:spChg>
+        <pc:spChg chg="add del mod">
+          <ac:chgData name="耀泉 马" userId="19e30af8d5659de2" providerId="LiveId" clId="{C3594856-CEDA-5129-B2AF-7962E3CA4CA3}" dt="2026-08-04T15:05:43.114" v="5652" actId="21"/>
+          <ac:spMkLst>
+            <pc:docMk/>
+            <pc:sldMk cId="3119878381" sldId="278"/>
+            <ac:spMk id="41" creationId="{0047C7E7-2CA2-E082-8991-F338702255C5}"/>
+          </ac:spMkLst>
+        </pc:spChg>
+        <pc:spChg chg="add mod">
+          <ac:chgData name="耀泉 马" userId="19e30af8d5659de2" providerId="LiveId" clId="{C3594856-CEDA-5129-B2AF-7962E3CA4CA3}" dt="2026-08-04T15:03:37.709" v="5646" actId="1036"/>
+          <ac:spMkLst>
+            <pc:docMk/>
+            <pc:sldMk cId="3119878381" sldId="278"/>
+            <ac:spMk id="48" creationId="{0BBC7B86-E722-E1D1-E9B1-4F06B98866AE}"/>
+          </ac:spMkLst>
+        </pc:spChg>
+        <pc:spChg chg="add mod">
+          <ac:chgData name="耀泉 马" userId="19e30af8d5659de2" providerId="LiveId" clId="{C3594856-CEDA-5129-B2AF-7962E3CA4CA3}" dt="2026-08-04T14:57:49.814" v="5587" actId="20577"/>
+          <ac:spMkLst>
+            <pc:docMk/>
+            <pc:sldMk cId="3119878381" sldId="278"/>
+            <ac:spMk id="49" creationId="{2A414B40-0706-EEE1-4362-180FB7A57B75}"/>
+          </ac:spMkLst>
+        </pc:spChg>
+        <pc:spChg chg="add mod">
+          <ac:chgData name="耀泉 马" userId="19e30af8d5659de2" providerId="LiveId" clId="{C3594856-CEDA-5129-B2AF-7962E3CA4CA3}" dt="2026-08-04T14:32:34.450" v="5226"/>
+          <ac:spMkLst>
+            <pc:docMk/>
+            <pc:sldMk cId="3119878381" sldId="278"/>
+            <ac:spMk id="50" creationId="{2E625D0F-A90A-86C5-4282-226666DD3BA6}"/>
+          </ac:spMkLst>
+        </pc:spChg>
+        <pc:spChg chg="add mod">
+          <ac:chgData name="耀泉 马" userId="19e30af8d5659de2" providerId="LiveId" clId="{C3594856-CEDA-5129-B2AF-7962E3CA4CA3}" dt="2026-08-04T14:49:19.955" v="5474" actId="1036"/>
+          <ac:spMkLst>
+            <pc:docMk/>
+            <pc:sldMk cId="3119878381" sldId="278"/>
+            <ac:spMk id="51" creationId="{B21157A1-75C7-7D39-C50E-74EBDD6B82AA}"/>
+          </ac:spMkLst>
+        </pc:spChg>
+        <pc:spChg chg="add mod">
+          <ac:chgData name="耀泉 马" userId="19e30af8d5659de2" providerId="LiveId" clId="{C3594856-CEDA-5129-B2AF-7962E3CA4CA3}" dt="2026-08-04T14:57:53.396" v="5589" actId="20577"/>
+          <ac:spMkLst>
+            <pc:docMk/>
+            <pc:sldMk cId="3119878381" sldId="278"/>
+            <ac:spMk id="56" creationId="{F102A57D-098F-4011-B740-8D7704BE1B91}"/>
+          </ac:spMkLst>
+        </pc:spChg>
+        <pc:spChg chg="add mod">
+          <ac:chgData name="耀泉 马" userId="19e30af8d5659de2" providerId="LiveId" clId="{C3594856-CEDA-5129-B2AF-7962E3CA4CA3}" dt="2026-08-04T15:03:37.709" v="5646" actId="1036"/>
+          <ac:spMkLst>
+            <pc:docMk/>
+            <pc:sldMk cId="3119878381" sldId="278"/>
+            <ac:spMk id="57" creationId="{48B03B15-0CF5-4DDD-F885-C0B99F2E55CB}"/>
+          </ac:spMkLst>
+        </pc:spChg>
+        <pc:spChg chg="add mod">
+          <ac:chgData name="耀泉 马" userId="19e30af8d5659de2" providerId="LiveId" clId="{C3594856-CEDA-5129-B2AF-7962E3CA4CA3}" dt="2026-08-04T14:42:18.007" v="5414"/>
+          <ac:spMkLst>
+            <pc:docMk/>
+            <pc:sldMk cId="3119878381" sldId="278"/>
+            <ac:spMk id="58" creationId="{5A639947-7071-0E60-4F67-A444EF1B513B}"/>
+          </ac:spMkLst>
+        </pc:spChg>
+        <pc:spChg chg="add del mod">
+          <ac:chgData name="耀泉 马" userId="19e30af8d5659de2" providerId="LiveId" clId="{C3594856-CEDA-5129-B2AF-7962E3CA4CA3}" dt="2026-08-04T14:56:39.061" v="5579" actId="478"/>
+          <ac:spMkLst>
+            <pc:docMk/>
+            <pc:sldMk cId="3119878381" sldId="278"/>
+            <ac:spMk id="59" creationId="{DF807CB9-A6D2-59DD-0BF1-1CAD25BE0017}"/>
+          </ac:spMkLst>
+        </pc:spChg>
+        <pc:spChg chg="add mod">
+          <ac:chgData name="耀泉 马" userId="19e30af8d5659de2" providerId="LiveId" clId="{C3594856-CEDA-5129-B2AF-7962E3CA4CA3}" dt="2026-08-04T14:37:28.591" v="5320"/>
+          <ac:spMkLst>
+            <pc:docMk/>
+            <pc:sldMk cId="3119878381" sldId="278"/>
+            <ac:spMk id="60" creationId="{98AB59E9-36B3-D81C-2833-5742A666128C}"/>
+          </ac:spMkLst>
+        </pc:spChg>
+        <pc:spChg chg="add del">
+          <ac:chgData name="耀泉 马" userId="19e30af8d5659de2" providerId="LiveId" clId="{C3594856-CEDA-5129-B2AF-7962E3CA4CA3}" dt="2026-08-04T14:38:26.761" v="5341" actId="11529"/>
+          <ac:spMkLst>
+            <pc:docMk/>
+            <pc:sldMk cId="3119878381" sldId="278"/>
+            <ac:spMk id="66" creationId="{E31A07AB-D45E-551C-DDDA-2EEB2846959D}"/>
+          </ac:spMkLst>
+        </pc:spChg>
+        <pc:spChg chg="add mod">
+          <ac:chgData name="耀泉 马" userId="19e30af8d5659de2" providerId="LiveId" clId="{C3594856-CEDA-5129-B2AF-7962E3CA4CA3}" dt="2026-08-04T15:03:37.709" v="5646" actId="1036"/>
+          <ac:spMkLst>
+            <pc:docMk/>
+            <pc:sldMk cId="3119878381" sldId="278"/>
+            <ac:spMk id="67" creationId="{2E3DBB46-C938-2DC5-97D9-EB88A127BCBA}"/>
+          </ac:spMkLst>
+        </pc:spChg>
+        <pc:spChg chg="add del mod">
+          <ac:chgData name="耀泉 马" userId="19e30af8d5659de2" providerId="LiveId" clId="{C3594856-CEDA-5129-B2AF-7962E3CA4CA3}" dt="2026-08-04T14:56:41.727" v="5580" actId="478"/>
+          <ac:spMkLst>
+            <pc:docMk/>
+            <pc:sldMk cId="3119878381" sldId="278"/>
+            <ac:spMk id="68" creationId="{BE58A273-1ECA-BCA0-CE6D-9B269DDA81E9}"/>
+          </ac:spMkLst>
+        </pc:spChg>
+        <pc:spChg chg="add mod">
+          <ac:chgData name="耀泉 马" userId="19e30af8d5659de2" providerId="LiveId" clId="{C3594856-CEDA-5129-B2AF-7962E3CA4CA3}" dt="2026-08-04T14:40:52.037" v="5391" actId="14100"/>
+          <ac:spMkLst>
+            <pc:docMk/>
+            <pc:sldMk cId="3119878381" sldId="278"/>
+            <ac:spMk id="69" creationId="{DA8C3B23-AEE1-1DC4-61E5-B707E620234A}"/>
+          </ac:spMkLst>
+        </pc:spChg>
+        <pc:spChg chg="add mod">
+          <ac:chgData name="耀泉 马" userId="19e30af8d5659de2" providerId="LiveId" clId="{C3594856-CEDA-5129-B2AF-7962E3CA4CA3}" dt="2026-08-04T14:40:45.028" v="5390" actId="14100"/>
+          <ac:spMkLst>
+            <pc:docMk/>
+            <pc:sldMk cId="3119878381" sldId="278"/>
+            <ac:spMk id="70" creationId="{6A7BBC29-A0EE-F4A3-4348-DFFB531DC605}"/>
+          </ac:spMkLst>
+        </pc:spChg>
+        <pc:spChg chg="add mod">
+          <ac:chgData name="耀泉 马" userId="19e30af8d5659de2" providerId="LiveId" clId="{C3594856-CEDA-5129-B2AF-7962E3CA4CA3}" dt="2026-08-04T14:42:28.893" v="5418"/>
+          <ac:spMkLst>
+            <pc:docMk/>
+            <pc:sldMk cId="3119878381" sldId="278"/>
+            <ac:spMk id="76" creationId="{836B97C0-E73C-2183-E423-593959FC569A}"/>
+          </ac:spMkLst>
+        </pc:spChg>
+        <pc:spChg chg="add mod">
+          <ac:chgData name="耀泉 马" userId="19e30af8d5659de2" providerId="LiveId" clId="{C3594856-CEDA-5129-B2AF-7962E3CA4CA3}" dt="2026-08-04T14:42:36.311" v="5419"/>
+          <ac:spMkLst>
+            <pc:docMk/>
+            <pc:sldMk cId="3119878381" sldId="278"/>
+            <ac:spMk id="77" creationId="{6CAA9B10-72C4-FD23-B865-58BF79A472CE}"/>
+          </ac:spMkLst>
+        </pc:spChg>
+        <pc:spChg chg="add mod">
+          <ac:chgData name="耀泉 马" userId="19e30af8d5659de2" providerId="LiveId" clId="{C3594856-CEDA-5129-B2AF-7962E3CA4CA3}" dt="2026-08-04T14:42:36.311" v="5419"/>
+          <ac:spMkLst>
+            <pc:docMk/>
+            <pc:sldMk cId="3119878381" sldId="278"/>
+            <ac:spMk id="78" creationId="{3A57EE04-7DC9-9772-FF86-0E8D1283B7A4}"/>
+          </ac:spMkLst>
+        </pc:spChg>
+        <pc:spChg chg="add mod">
+          <ac:chgData name="耀泉 马" userId="19e30af8d5659de2" providerId="LiveId" clId="{C3594856-CEDA-5129-B2AF-7962E3CA4CA3}" dt="2026-08-04T14:42:36.311" v="5419"/>
+          <ac:spMkLst>
+            <pc:docMk/>
+            <pc:sldMk cId="3119878381" sldId="278"/>
+            <ac:spMk id="79" creationId="{A5A69CF1-2069-37FF-0469-6ADF2BED6183}"/>
+          </ac:spMkLst>
+        </pc:spChg>
+        <pc:spChg chg="add mod">
+          <ac:chgData name="耀泉 马" userId="19e30af8d5659de2" providerId="LiveId" clId="{C3594856-CEDA-5129-B2AF-7962E3CA4CA3}" dt="2026-08-04T14:42:36.311" v="5419"/>
+          <ac:spMkLst>
+            <pc:docMk/>
+            <pc:sldMk cId="3119878381" sldId="278"/>
+            <ac:spMk id="80" creationId="{2B0B94CD-7308-EDCB-8639-A52C054EE9DB}"/>
+          </ac:spMkLst>
+        </pc:spChg>
+        <pc:spChg chg="add del mod">
+          <ac:chgData name="耀泉 马" userId="19e30af8d5659de2" providerId="LiveId" clId="{C3594856-CEDA-5129-B2AF-7962E3CA4CA3}" dt="2026-08-04T14:58:54.966" v="5590" actId="21"/>
+          <ac:spMkLst>
+            <pc:docMk/>
+            <pc:sldMk cId="3119878381" sldId="278"/>
+            <ac:spMk id="81" creationId="{FE00956F-B2B0-0645-6E8E-86412AE90912}"/>
+          </ac:spMkLst>
+        </pc:spChg>
+        <pc:spChg chg="add del mod">
+          <ac:chgData name="耀泉 马" userId="19e30af8d5659de2" providerId="LiveId" clId="{C3594856-CEDA-5129-B2AF-7962E3CA4CA3}" dt="2026-08-04T14:47:53.092" v="5458" actId="478"/>
+          <ac:spMkLst>
+            <pc:docMk/>
+            <pc:sldMk cId="3119878381" sldId="278"/>
+            <ac:spMk id="82" creationId="{FF713B1C-AA03-C6D1-F7EE-5CCAB9FD08DF}"/>
+          </ac:spMkLst>
+        </pc:spChg>
+        <pc:spChg chg="add del mod">
+          <ac:chgData name="耀泉 马" userId="19e30af8d5659de2" providerId="LiveId" clId="{C3594856-CEDA-5129-B2AF-7962E3CA4CA3}" dt="2026-08-04T14:47:55.520" v="5459" actId="478"/>
+          <ac:spMkLst>
+            <pc:docMk/>
+            <pc:sldMk cId="3119878381" sldId="278"/>
+            <ac:spMk id="83" creationId="{D2E40215-7C97-D2D6-F2EC-606D0D8A7274}"/>
+          </ac:spMkLst>
+        </pc:spChg>
+        <pc:spChg chg="add mod">
+          <ac:chgData name="耀泉 马" userId="19e30af8d5659de2" providerId="LiveId" clId="{C3594856-CEDA-5129-B2AF-7962E3CA4CA3}" dt="2026-08-04T14:59:03.214" v="5592" actId="14100"/>
+          <ac:spMkLst>
+            <pc:docMk/>
+            <pc:sldMk cId="3119878381" sldId="278"/>
+            <ac:spMk id="104" creationId="{C6BB7DEB-225F-C068-6B63-7AD28F411E56}"/>
+          </ac:spMkLst>
+        </pc:spChg>
+        <pc:spChg chg="add del mod">
+          <ac:chgData name="耀泉 马" userId="19e30af8d5659de2" providerId="LiveId" clId="{C3594856-CEDA-5129-B2AF-7962E3CA4CA3}" dt="2026-08-04T14:58:57.493" v="5591" actId="478"/>
+          <ac:spMkLst>
+            <pc:docMk/>
+            <pc:sldMk cId="3119878381" sldId="278"/>
+            <ac:spMk id="105" creationId="{DF733B75-E3AB-9D63-FBEF-2F6F87B99BE9}"/>
+          </ac:spMkLst>
+        </pc:spChg>
+        <pc:spChg chg="add del mod">
+          <ac:chgData name="耀泉 马" userId="19e30af8d5659de2" providerId="LiveId" clId="{C3594856-CEDA-5129-B2AF-7962E3CA4CA3}" dt="2026-08-04T15:02:32.751" v="5608" actId="21"/>
+          <ac:spMkLst>
+            <pc:docMk/>
+            <pc:sldMk cId="3119878381" sldId="278"/>
+            <ac:spMk id="106" creationId="{6901B576-A332-2448-F537-3F67793773B1}"/>
+          </ac:spMkLst>
+        </pc:spChg>
+        <pc:spChg chg="add mod">
+          <ac:chgData name="耀泉 马" userId="19e30af8d5659de2" providerId="LiveId" clId="{C3594856-CEDA-5129-B2AF-7962E3CA4CA3}" dt="2026-08-04T15:05:59.033" v="5686" actId="20577"/>
+          <ac:spMkLst>
+            <pc:docMk/>
+            <pc:sldMk cId="3119878381" sldId="278"/>
+            <ac:spMk id="108" creationId="{C1CEEDE8-E9EB-8338-7BC9-0A1EAE87CAE6}"/>
+          </ac:spMkLst>
+        </pc:spChg>
+        <pc:picChg chg="del">
+          <ac:chgData name="耀泉 马" userId="19e30af8d5659de2" providerId="LiveId" clId="{C3594856-CEDA-5129-B2AF-7962E3CA4CA3}" dt="2026-08-04T13:26:56.317" v="4714" actId="478"/>
+          <ac:picMkLst>
+            <pc:docMk/>
+            <pc:sldMk cId="3119878381" sldId="278"/>
+            <ac:picMk id="6" creationId="{2864CD42-FA9A-89F2-14E2-6E2E71286A33}"/>
+          </ac:picMkLst>
+        </pc:picChg>
+        <pc:cxnChg chg="add mod">
+          <ac:chgData name="耀泉 马" userId="19e30af8d5659de2" providerId="LiveId" clId="{C3594856-CEDA-5129-B2AF-7962E3CA4CA3}" dt="2026-08-04T15:04:00.392" v="5651" actId="1038"/>
+          <ac:cxnSpMkLst>
+            <pc:docMk/>
+            <pc:sldMk cId="3119878381" sldId="278"/>
+            <ac:cxnSpMk id="14" creationId="{9DDE814D-729A-80CC-789C-CDCD3D8519AF}"/>
+          </ac:cxnSpMkLst>
+        </pc:cxnChg>
+        <pc:cxnChg chg="add mod">
+          <ac:chgData name="耀泉 马" userId="19e30af8d5659de2" providerId="LiveId" clId="{C3594856-CEDA-5129-B2AF-7962E3CA4CA3}" dt="2026-08-04T15:03:57.420" v="5650" actId="1038"/>
+          <ac:cxnSpMkLst>
+            <pc:docMk/>
+            <pc:sldMk cId="3119878381" sldId="278"/>
+            <ac:cxnSpMk id="17" creationId="{D7DDBCB5-7D6E-7A8C-4429-CEC9907BD60D}"/>
+          </ac:cxnSpMkLst>
+        </pc:cxnChg>
+        <pc:cxnChg chg="add mod">
+          <ac:chgData name="耀泉 马" userId="19e30af8d5659de2" providerId="LiveId" clId="{C3594856-CEDA-5129-B2AF-7962E3CA4CA3}" dt="2026-08-04T15:03:52.841" v="5649" actId="1038"/>
+          <ac:cxnSpMkLst>
+            <pc:docMk/>
+            <pc:sldMk cId="3119878381" sldId="278"/>
+            <ac:cxnSpMk id="38" creationId="{F2F27438-F9C2-5B9D-DCBC-AE29DACD9A4D}"/>
+          </ac:cxnSpMkLst>
+        </pc:cxnChg>
+        <pc:cxnChg chg="add mod">
+          <ac:chgData name="耀泉 马" userId="19e30af8d5659de2" providerId="LiveId" clId="{C3594856-CEDA-5129-B2AF-7962E3CA4CA3}" dt="2026-08-04T14:30:29.058" v="5186" actId="14100"/>
+          <ac:cxnSpMkLst>
+            <pc:docMk/>
+            <pc:sldMk cId="3119878381" sldId="278"/>
+            <ac:cxnSpMk id="43" creationId="{2C959B12-81D1-01EE-0C45-2AA93BA6963A}"/>
+          </ac:cxnSpMkLst>
+        </pc:cxnChg>
+        <pc:cxnChg chg="add mod">
+          <ac:chgData name="耀泉 马" userId="19e30af8d5659de2" providerId="LiveId" clId="{C3594856-CEDA-5129-B2AF-7962E3CA4CA3}" dt="2026-08-04T14:30:23.557" v="5185" actId="1035"/>
+          <ac:cxnSpMkLst>
+            <pc:docMk/>
+            <pc:sldMk cId="3119878381" sldId="278"/>
+            <ac:cxnSpMk id="45" creationId="{6AF4A15B-0AA0-F584-7A5D-EE410872F786}"/>
+          </ac:cxnSpMkLst>
+        </pc:cxnChg>
+        <pc:cxnChg chg="add mod">
+          <ac:chgData name="耀泉 马" userId="19e30af8d5659de2" providerId="LiveId" clId="{C3594856-CEDA-5129-B2AF-7962E3CA4CA3}" dt="2026-08-04T14:49:19.955" v="5474" actId="1036"/>
+          <ac:cxnSpMkLst>
+            <pc:docMk/>
+            <pc:sldMk cId="3119878381" sldId="278"/>
+            <ac:cxnSpMk id="55" creationId="{23AACDE0-8837-06D5-AC5D-6AED4E6160E4}"/>
+          </ac:cxnSpMkLst>
+        </pc:cxnChg>
+        <pc:cxnChg chg="add del mod">
+          <ac:chgData name="耀泉 马" userId="19e30af8d5659de2" providerId="LiveId" clId="{C3594856-CEDA-5129-B2AF-7962E3CA4CA3}" dt="2026-08-04T14:38:17.353" v="5337" actId="478"/>
+          <ac:cxnSpMkLst>
+            <pc:docMk/>
+            <pc:sldMk cId="3119878381" sldId="278"/>
+            <ac:cxnSpMk id="62" creationId="{ED7484EA-8FF5-EDD7-E2E5-FD1B75A7BCC8}"/>
+          </ac:cxnSpMkLst>
+        </pc:cxnChg>
+        <pc:cxnChg chg="add del mod">
+          <ac:chgData name="耀泉 马" userId="19e30af8d5659de2" providerId="LiveId" clId="{C3594856-CEDA-5129-B2AF-7962E3CA4CA3}" dt="2026-08-04T14:38:15.049" v="5336" actId="478"/>
+          <ac:cxnSpMkLst>
+            <pc:docMk/>
+            <pc:sldMk cId="3119878381" sldId="278"/>
+            <ac:cxnSpMk id="63" creationId="{5E176BAC-F3C9-22D7-53AF-53A15248BEA7}"/>
+          </ac:cxnSpMkLst>
+        </pc:cxnChg>
+        <pc:cxnChg chg="add mod">
+          <ac:chgData name="耀泉 马" userId="19e30af8d5659de2" providerId="LiveId" clId="{C3594856-CEDA-5129-B2AF-7962E3CA4CA3}" dt="2026-08-04T15:03:37.709" v="5646" actId="1036"/>
+          <ac:cxnSpMkLst>
+            <pc:docMk/>
+            <pc:sldMk cId="3119878381" sldId="278"/>
+            <ac:cxnSpMk id="72" creationId="{D3BBAA70-1361-82C9-01DF-441081A74775}"/>
+          </ac:cxnSpMkLst>
+        </pc:cxnChg>
+        <pc:cxnChg chg="add mod">
+          <ac:chgData name="耀泉 马" userId="19e30af8d5659de2" providerId="LiveId" clId="{C3594856-CEDA-5129-B2AF-7962E3CA4CA3}" dt="2026-08-04T14:44:17.741" v="5443" actId="692"/>
+          <ac:cxnSpMkLst>
+            <pc:docMk/>
+            <pc:sldMk cId="3119878381" sldId="278"/>
+            <ac:cxnSpMk id="74" creationId="{B8B3B404-2FFE-39B0-DCE2-D2BD9D1C53E9}"/>
+          </ac:cxnSpMkLst>
+        </pc:cxnChg>
+        <pc:cxnChg chg="add mod">
+          <ac:chgData name="耀泉 马" userId="19e30af8d5659de2" providerId="LiveId" clId="{C3594856-CEDA-5129-B2AF-7962E3CA4CA3}" dt="2026-08-04T15:03:37.709" v="5646" actId="1036"/>
+          <ac:cxnSpMkLst>
+            <pc:docMk/>
+            <pc:sldMk cId="3119878381" sldId="278"/>
+            <ac:cxnSpMk id="85" creationId="{A08011FF-EDC7-D46F-B1D7-40C485358480}"/>
+          </ac:cxnSpMkLst>
+        </pc:cxnChg>
+        <pc:cxnChg chg="add mod">
+          <ac:chgData name="耀泉 马" userId="19e30af8d5659de2" providerId="LiveId" clId="{C3594856-CEDA-5129-B2AF-7962E3CA4CA3}" dt="2026-08-04T14:49:19.955" v="5474" actId="1036"/>
+          <ac:cxnSpMkLst>
+            <pc:docMk/>
+            <pc:sldMk cId="3119878381" sldId="278"/>
+            <ac:cxnSpMk id="90" creationId="{F2345AD3-4445-C74A-7F76-68714DBEF64B}"/>
+          </ac:cxnSpMkLst>
+        </pc:cxnChg>
       </pc:sldChg>
     </pc:docChg>
   </pc:docChgLst>
@@ -834,7 +761,7 @@
           <a:p>
             <a:fld id="{D942D6C0-7D9E-504D-94AD-D6B570192357}" type="datetimeFigureOut">
               <a:rPr lang="en-US" smtClean="0"/>
-              <a:t>6/23/26</a:t>
+              <a:t>8/4/26</a:t>
             </a:fld>
             <a:endParaRPr lang="en-US"/>
           </a:p>
@@ -1516,6 +1443,114 @@
   <p:cSld>
     <p:spTree>
       <p:nvGrpSpPr>
+        <p:cNvPr id="1" name="">
+          <a:extLst>
+            <a:ext uri="{FF2B5EF4-FFF2-40B4-BE49-F238E27FC236}">
+              <a16:creationId xmlns:a16="http://schemas.microsoft.com/office/drawing/2014/main" id="{1213753B-653C-2F91-1F5F-94315D9F9D47}"/>
+            </a:ext>
+          </a:extLst>
+        </p:cNvPr>
+        <p:cNvGrpSpPr/>
+        <p:nvPr/>
+      </p:nvGrpSpPr>
+      <p:grpSpPr>
+        <a:xfrm>
+          <a:off x="0" y="0"/>
+          <a:ext cx="0" cy="0"/>
+          <a:chOff x="0" y="0"/>
+          <a:chExt cx="0" cy="0"/>
+        </a:xfrm>
+      </p:grpSpPr>
+      <p:sp>
+        <p:nvSpPr>
+          <p:cNvPr id="2" name="Slide Image Placeholder 1">
+            <a:extLst>
+              <a:ext uri="{FF2B5EF4-FFF2-40B4-BE49-F238E27FC236}">
+                <a16:creationId xmlns:a16="http://schemas.microsoft.com/office/drawing/2014/main" id="{7CE253D9-A9EF-93E5-0F16-BA9BB733790F}"/>
+              </a:ext>
+            </a:extLst>
+          </p:cNvPr>
+          <p:cNvSpPr>
+            <a:spLocks noGrp="1" noRot="1" noChangeAspect="1"/>
+          </p:cNvSpPr>
+          <p:nvPr>
+            <p:ph type="sldImg"/>
+          </p:nvPr>
+        </p:nvSpPr>
+        <p:spPr/>
+      </p:sp>
+      <p:sp>
+        <p:nvSpPr>
+          <p:cNvPr id="3" name="Notes Placeholder 2">
+            <a:extLst>
+              <a:ext uri="{FF2B5EF4-FFF2-40B4-BE49-F238E27FC236}">
+                <a16:creationId xmlns:a16="http://schemas.microsoft.com/office/drawing/2014/main" id="{F9E9B951-29EA-CAC5-9392-7DB1F3B6B93B}"/>
+              </a:ext>
+            </a:extLst>
+          </p:cNvPr>
+          <p:cNvSpPr>
+            <a:spLocks noGrp="1"/>
+          </p:cNvSpPr>
+          <p:nvPr>
+            <p:ph type="body" idx="1"/>
+          </p:nvPr>
+        </p:nvSpPr>
+        <p:spPr/>
+        <p:txBody>
+          <a:bodyPr/>
+          <a:lstStyle/>
+          <a:p>
+            <a:endParaRPr lang="en-US" dirty="0"/>
+          </a:p>
+        </p:txBody>
+      </p:sp>
+      <p:sp>
+        <p:nvSpPr>
+          <p:cNvPr id="4" name="Slide Number Placeholder 3">
+            <a:extLst>
+              <a:ext uri="{FF2B5EF4-FFF2-40B4-BE49-F238E27FC236}">
+                <a16:creationId xmlns:a16="http://schemas.microsoft.com/office/drawing/2014/main" id="{5FD3B49B-78FF-C378-E13C-15795181E5A7}"/>
+              </a:ext>
+            </a:extLst>
+          </p:cNvPr>
+          <p:cNvSpPr>
+            <a:spLocks noGrp="1"/>
+          </p:cNvSpPr>
+          <p:nvPr>
+            <p:ph type="sldNum" sz="quarter" idx="5"/>
+          </p:nvPr>
+        </p:nvSpPr>
+        <p:spPr/>
+        <p:txBody>
+          <a:bodyPr/>
+          <a:lstStyle/>
+          <a:p>
+            <a:fld id="{92CA3861-0D7D-5747-A14C-DDF3C33A59C2}" type="slidenum">
+              <a:rPr lang="en-US" smtClean="0"/>
+              <a:t>9</a:t>
+            </a:fld>
+            <a:endParaRPr lang="en-US"/>
+          </a:p>
+        </p:txBody>
+      </p:sp>
+    </p:spTree>
+    <p:extLst>
+      <p:ext uri="{BB962C8B-B14F-4D97-AF65-F5344CB8AC3E}">
+        <p14:creationId xmlns:p14="http://schemas.microsoft.com/office/powerpoint/2010/main" val="838537954"/>
+      </p:ext>
+    </p:extLst>
+  </p:cSld>
+  <p:clrMapOvr>
+    <a:masterClrMapping/>
+  </p:clrMapOvr>
+</p:notes>
+</file>
+
+<file path=ppt/notesSlides/notesSlide6.xml><?xml version="1.0" encoding="utf-8"?>
+<p:notes xmlns:a="http://schemas.openxmlformats.org/drawingml/2006/main" xmlns:r="http://schemas.openxmlformats.org/officeDocument/2006/relationships" xmlns:p="http://schemas.openxmlformats.org/presentationml/2006/main">
+  <p:cSld>
+    <p:spTree>
+      <p:nvGrpSpPr>
         <p:cNvPr id="1" name=""/>
         <p:cNvGrpSpPr/>
         <p:nvPr/>
@@ -1576,7 +1611,7 @@
           <a:p>
             <a:fld id="{92CA3861-0D7D-5747-A14C-DDF3C33A59C2}" type="slidenum">
               <a:rPr lang="en-US" smtClean="0"/>
-              <a:t>9</a:t>
+              <a:t>10</a:t>
             </a:fld>
             <a:endParaRPr lang="en-US"/>
           </a:p>
@@ -1744,7 +1779,7 @@
           <a:p>
             <a:fld id="{66953C98-49B1-1049-AD13-A5C3FE863A09}" type="datetime1">
               <a:rPr lang="en-GB" smtClean="0"/>
-              <a:t>23/06/2026</a:t>
+              <a:t>04/08/2026</a:t>
             </a:fld>
             <a:endParaRPr lang="en-US"/>
           </a:p>
@@ -1947,7 +1982,7 @@
           <a:p>
             <a:fld id="{634C675B-64FF-9C44-A019-CB02FE026880}" type="datetime1">
               <a:rPr lang="en-GB" smtClean="0"/>
-              <a:t>23/06/2026</a:t>
+              <a:t>04/08/2026</a:t>
             </a:fld>
             <a:endParaRPr lang="en-US"/>
           </a:p>
@@ -2160,7 +2195,7 @@
           <a:p>
             <a:fld id="{E9F3AEB0-98D9-D940-B26E-D6A1ED65D91A}" type="datetime1">
               <a:rPr lang="en-GB" smtClean="0"/>
-              <a:t>23/06/2026</a:t>
+              <a:t>04/08/2026</a:t>
             </a:fld>
             <a:endParaRPr lang="en-US"/>
           </a:p>
@@ -2363,7 +2398,7 @@
           <a:p>
             <a:fld id="{74B74ED2-CD06-C640-B058-524353BA429A}" type="datetime1">
               <a:rPr lang="en-GB" smtClean="0"/>
-              <a:t>23/06/2026</a:t>
+              <a:t>04/08/2026</a:t>
             </a:fld>
             <a:endParaRPr lang="en-US"/>
           </a:p>
@@ -2642,7 +2677,7 @@
           <a:p>
             <a:fld id="{3C668EC3-48D0-F24D-BCEF-46DD66DDB969}" type="datetime1">
               <a:rPr lang="en-GB" smtClean="0"/>
-              <a:t>23/06/2026</a:t>
+              <a:t>04/08/2026</a:t>
             </a:fld>
             <a:endParaRPr lang="en-US"/>
           </a:p>
@@ -2913,7 +2948,7 @@
           <a:p>
             <a:fld id="{C1E697FC-8A6E-1942-A4C2-502684F162C1}" type="datetime1">
               <a:rPr lang="en-GB" smtClean="0"/>
-              <a:t>23/06/2026</a:t>
+              <a:t>04/08/2026</a:t>
             </a:fld>
             <a:endParaRPr lang="en-US"/>
           </a:p>
@@ -3331,7 +3366,7 @@
           <a:p>
             <a:fld id="{72A424FF-AF90-2E46-A679-3B9EBE55933D}" type="datetime1">
               <a:rPr lang="en-GB" smtClean="0"/>
-              <a:t>23/06/2026</a:t>
+              <a:t>04/08/2026</a:t>
             </a:fld>
             <a:endParaRPr lang="en-US"/>
           </a:p>
@@ -3476,7 +3511,7 @@
           <a:p>
             <a:fld id="{C9DA4DDD-11EB-F246-AB7A-9CEDEADBD1E3}" type="datetime1">
               <a:rPr lang="en-GB" smtClean="0"/>
-              <a:t>23/06/2026</a:t>
+              <a:t>04/08/2026</a:t>
             </a:fld>
             <a:endParaRPr lang="en-US"/>
           </a:p>
@@ -3592,7 +3627,7 @@
           <a:p>
             <a:fld id="{8C9D5473-7AAD-CB46-A9CF-E0F92F18C158}" type="datetime1">
               <a:rPr lang="en-GB" smtClean="0"/>
-              <a:t>23/06/2026</a:t>
+              <a:t>04/08/2026</a:t>
             </a:fld>
             <a:endParaRPr lang="en-US"/>
           </a:p>
@@ -3908,7 +3943,7 @@
           <a:p>
             <a:fld id="{3AC58F6D-3F4A-DB48-AF7B-AA25146E46B7}" type="datetime1">
               <a:rPr lang="en-GB" smtClean="0"/>
-              <a:t>23/06/2026</a:t>
+              <a:t>04/08/2026</a:t>
             </a:fld>
             <a:endParaRPr lang="en-US"/>
           </a:p>
@@ -4200,7 +4235,7 @@
           <a:p>
             <a:fld id="{BAAC4FA6-ECCF-2748-B4C7-F5C8FE9BC957}" type="datetime1">
               <a:rPr lang="en-GB" smtClean="0"/>
-              <a:t>23/06/2026</a:t>
+              <a:t>04/08/2026</a:t>
             </a:fld>
             <a:endParaRPr lang="en-US"/>
           </a:p>
@@ -4446,7 +4481,7 @@
           <a:p>
             <a:fld id="{2BDDA0CB-5523-1E42-87CA-252FAC812744}" type="datetime1">
               <a:rPr lang="en-GB" smtClean="0"/>
-              <a:t>23/06/2026</a:t>
+              <a:t>04/08/2026</a:t>
             </a:fld>
             <a:endParaRPr lang="en-US"/>
           </a:p>
@@ -4992,6 +5027,247 @@
           <p:cNvPr id="2" name="Title 1">
             <a:extLst>
               <a:ext uri="{FF2B5EF4-FFF2-40B4-BE49-F238E27FC236}">
+                <a16:creationId xmlns:a16="http://schemas.microsoft.com/office/drawing/2014/main" id="{C4C9DB24-529F-E8F9-536A-6C8005194892}"/>
+              </a:ext>
+            </a:extLst>
+          </p:cNvPr>
+          <p:cNvSpPr>
+            <a:spLocks noGrp="1"/>
+          </p:cNvSpPr>
+          <p:nvPr>
+            <p:ph type="title"/>
+          </p:nvPr>
+        </p:nvSpPr>
+        <p:spPr/>
+        <p:txBody>
+          <a:bodyPr/>
+          <a:lstStyle/>
+          <a:p>
+            <a:r>
+              <a:rPr lang="en-US" altLang="zh-CN" dirty="0"/>
+              <a:t>Initial</a:t>
+            </a:r>
+            <a:r>
+              <a:rPr lang="zh-CN" altLang="en-US" dirty="0"/>
+              <a:t> </a:t>
+            </a:r>
+            <a:r>
+              <a:rPr lang="en-US" altLang="zh-CN" dirty="0"/>
+              <a:t>Ideas</a:t>
+            </a:r>
+            <a:endParaRPr lang="en-US" dirty="0"/>
+          </a:p>
+        </p:txBody>
+      </p:sp>
+      <p:sp>
+        <p:nvSpPr>
+          <p:cNvPr id="3" name="Content Placeholder 2">
+            <a:extLst>
+              <a:ext uri="{FF2B5EF4-FFF2-40B4-BE49-F238E27FC236}">
+                <a16:creationId xmlns:a16="http://schemas.microsoft.com/office/drawing/2014/main" id="{21F482A8-7823-7754-9344-36EA99AB2D06}"/>
+              </a:ext>
+            </a:extLst>
+          </p:cNvPr>
+          <p:cNvSpPr>
+            <a:spLocks noGrp="1"/>
+          </p:cNvSpPr>
+          <p:nvPr>
+            <p:ph idx="1"/>
+          </p:nvPr>
+        </p:nvSpPr>
+        <p:spPr/>
+        <p:txBody>
+          <a:bodyPr>
+            <a:normAutofit/>
+          </a:bodyPr>
+          <a:lstStyle/>
+          <a:p>
+            <a:r>
+              <a:rPr lang="en-GB" dirty="0"/>
+              <a:t>QUIC TLS 1.3</a:t>
+            </a:r>
+            <a:r>
+              <a:rPr lang="zh-CN" altLang="en-US" dirty="0"/>
+              <a:t> </a:t>
+            </a:r>
+            <a:r>
+              <a:rPr lang="en-US" altLang="zh-CN" dirty="0"/>
+              <a:t>(UDP,</a:t>
+            </a:r>
+            <a:r>
+              <a:rPr lang="zh-CN" altLang="en-US" dirty="0"/>
+              <a:t> </a:t>
+            </a:r>
+            <a:r>
+              <a:rPr lang="en-US" altLang="zh-CN" dirty="0"/>
+              <a:t>reduce</a:t>
+            </a:r>
+            <a:r>
+              <a:rPr lang="zh-CN" altLang="en-US" dirty="0"/>
+              <a:t> </a:t>
+            </a:r>
+            <a:r>
+              <a:rPr lang="en-US" altLang="zh-CN" dirty="0"/>
+              <a:t>latency,</a:t>
+            </a:r>
+            <a:r>
+              <a:rPr lang="zh-CN" altLang="en-US" dirty="0"/>
+              <a:t> </a:t>
+            </a:r>
+            <a:r>
+              <a:rPr lang="en-US" altLang="zh-CN" dirty="0"/>
+              <a:t>Encryption</a:t>
+            </a:r>
+            <a:r>
+              <a:rPr lang="zh-CN" altLang="en-US" dirty="0"/>
+              <a:t> </a:t>
+            </a:r>
+            <a:r>
+              <a:rPr lang="en-US" altLang="zh-CN" dirty="0"/>
+              <a:t>Algorithm,</a:t>
+            </a:r>
+            <a:r>
+              <a:rPr lang="zh-CN" altLang="en-US" dirty="0"/>
+              <a:t> </a:t>
+            </a:r>
+            <a:r>
+              <a:rPr lang="en-US" altLang="zh-CN" dirty="0"/>
+              <a:t>Key</a:t>
+            </a:r>
+            <a:r>
+              <a:rPr lang="zh-CN" altLang="en-US" dirty="0"/>
+              <a:t> </a:t>
+            </a:r>
+            <a:r>
+              <a:rPr lang="en-US" altLang="zh-CN" dirty="0"/>
+              <a:t>exchange)</a:t>
+            </a:r>
+            <a:r>
+              <a:rPr lang="zh-CN" altLang="en-US" dirty="0"/>
+              <a:t> </a:t>
+            </a:r>
+            <a:endParaRPr lang="en-GB" dirty="0"/>
+          </a:p>
+          <a:p>
+            <a:r>
+              <a:rPr lang="en-US" altLang="zh-CN" dirty="0" err="1"/>
+              <a:t>DataSet</a:t>
+            </a:r>
+            <a:r>
+              <a:rPr lang="en-US" altLang="zh-CN" dirty="0"/>
+              <a:t>: HuggingFaceM4 /</a:t>
+            </a:r>
+            <a:r>
+              <a:rPr lang="en-US" altLang="zh-CN" dirty="0" err="1"/>
+              <a:t>the_cauldron</a:t>
+            </a:r>
+            <a:r>
+              <a:rPr lang="en-US" altLang="zh-CN" dirty="0"/>
+              <a:t> AI2D subset</a:t>
+            </a:r>
+          </a:p>
+          <a:p>
+            <a:r>
+              <a:rPr lang="en-US" dirty="0"/>
+              <a:t>Model: </a:t>
+            </a:r>
+            <a:r>
+              <a:rPr lang="en-US" altLang="zh-CN" dirty="0" err="1"/>
+              <a:t>nanoVLM</a:t>
+            </a:r>
+            <a:endParaRPr lang="en-US" altLang="zh-CN" dirty="0"/>
+          </a:p>
+          <a:p>
+            <a:r>
+              <a:rPr lang="en-US" altLang="zh-CN" dirty="0"/>
+              <a:t>Encryption:</a:t>
+            </a:r>
+            <a:r>
+              <a:rPr lang="zh-CN" altLang="en-US" dirty="0"/>
+              <a:t> </a:t>
+            </a:r>
+            <a:r>
+              <a:rPr lang="en-US" altLang="zh-CN" dirty="0"/>
+              <a:t>ChaChao20-Poly1305</a:t>
+            </a:r>
+            <a:r>
+              <a:rPr lang="zh-CN" altLang="en-US" dirty="0"/>
+              <a:t> </a:t>
+            </a:r>
+            <a:r>
+              <a:rPr lang="en-US" altLang="zh-CN" dirty="0"/>
+              <a:t>vs</a:t>
+            </a:r>
+            <a:r>
+              <a:rPr lang="zh-CN" altLang="en-US" dirty="0"/>
+              <a:t> </a:t>
+            </a:r>
+            <a:r>
+              <a:rPr lang="en-US" altLang="zh-CN" dirty="0"/>
+              <a:t>AES-GCM</a:t>
+            </a:r>
+            <a:endParaRPr lang="en-GB" altLang="zh-CN" dirty="0"/>
+          </a:p>
+          <a:p>
+            <a:r>
+              <a:rPr lang="en-GB" dirty="0"/>
+              <a:t>TEE: </a:t>
+            </a:r>
+            <a:r>
+              <a:rPr lang="zh-CN" altLang="en-US" dirty="0"/>
+              <a:t> </a:t>
+            </a:r>
+            <a:r>
+              <a:rPr lang="en-US" altLang="zh-CN" dirty="0"/>
+              <a:t>Intel</a:t>
+            </a:r>
+            <a:r>
+              <a:rPr lang="zh-CN" altLang="en-US" dirty="0"/>
+              <a:t> </a:t>
+            </a:r>
+            <a:r>
+              <a:rPr lang="en-US" altLang="zh-CN" dirty="0"/>
+              <a:t>TDX</a:t>
+            </a:r>
+            <a:endParaRPr lang="en-GB" dirty="0"/>
+          </a:p>
+        </p:txBody>
+      </p:sp>
+    </p:spTree>
+    <p:extLst>
+      <p:ext uri="{BB962C8B-B14F-4D97-AF65-F5344CB8AC3E}">
+        <p14:creationId xmlns:p14="http://schemas.microsoft.com/office/powerpoint/2010/main" val="2290997006"/>
+      </p:ext>
+    </p:extLst>
+  </p:cSld>
+  <p:clrMapOvr>
+    <a:masterClrMapping/>
+  </p:clrMapOvr>
+</p:sld>
+</file>
+
+<file path=ppt/slides/slide11.xml><?xml version="1.0" encoding="utf-8"?>
+<p:sld xmlns:a="http://schemas.openxmlformats.org/drawingml/2006/main" xmlns:r="http://schemas.openxmlformats.org/officeDocument/2006/relationships" xmlns:p="http://schemas.openxmlformats.org/presentationml/2006/main">
+  <p:cSld>
+    <p:spTree>
+      <p:nvGrpSpPr>
+        <p:cNvPr id="1" name=""/>
+        <p:cNvGrpSpPr/>
+        <p:nvPr/>
+      </p:nvGrpSpPr>
+      <p:grpSpPr>
+        <a:xfrm>
+          <a:off x="0" y="0"/>
+          <a:ext cx="0" cy="0"/>
+          <a:chOff x="0" y="0"/>
+          <a:chExt cx="0" cy="0"/>
+        </a:xfrm>
+      </p:grpSpPr>
+      <p:sp>
+        <p:nvSpPr>
+          <p:cNvPr id="2" name="Title 1">
+            <a:extLst>
+              <a:ext uri="{FF2B5EF4-FFF2-40B4-BE49-F238E27FC236}">
                 <a16:creationId xmlns:a16="http://schemas.microsoft.com/office/drawing/2014/main" id="{152DB0DE-3E87-978D-3FA2-7EB999849C3B}"/>
               </a:ext>
             </a:extLst>
@@ -5300,7 +5576,7 @@
 </p:sld>
 </file>
 
-<file path=ppt/slides/slide11.xml><?xml version="1.0" encoding="utf-8"?>
+<file path=ppt/slides/slide12.xml><?xml version="1.0" encoding="utf-8"?>
 <p:sld xmlns:a="http://schemas.openxmlformats.org/drawingml/2006/main" xmlns:r="http://schemas.openxmlformats.org/officeDocument/2006/relationships" xmlns:p="http://schemas.openxmlformats.org/presentationml/2006/main">
   <p:cSld>
     <p:spTree>
@@ -5627,615 +5903,6 @@
     <p:extLst>
       <p:ext uri="{BB962C8B-B14F-4D97-AF65-F5344CB8AC3E}">
         <p14:creationId xmlns:p14="http://schemas.microsoft.com/office/powerpoint/2010/main" val="3929797536"/>
-      </p:ext>
-    </p:extLst>
-  </p:cSld>
-  <p:clrMapOvr>
-    <a:masterClrMapping/>
-  </p:clrMapOvr>
-</p:sld>
-</file>
-
-<file path=ppt/slides/slide12.xml><?xml version="1.0" encoding="utf-8"?>
-<p:sld xmlns:a="http://schemas.openxmlformats.org/drawingml/2006/main" xmlns:r="http://schemas.openxmlformats.org/officeDocument/2006/relationships" xmlns:p="http://schemas.openxmlformats.org/presentationml/2006/main">
-  <p:cSld>
-    <p:spTree>
-      <p:nvGrpSpPr>
-        <p:cNvPr id="1" name=""/>
-        <p:cNvGrpSpPr/>
-        <p:nvPr/>
-      </p:nvGrpSpPr>
-      <p:grpSpPr>
-        <a:xfrm>
-          <a:off x="0" y="0"/>
-          <a:ext cx="0" cy="0"/>
-          <a:chOff x="0" y="0"/>
-          <a:chExt cx="0" cy="0"/>
-        </a:xfrm>
-      </p:grpSpPr>
-      <p:sp>
-        <p:nvSpPr>
-          <p:cNvPr id="2" name="Title 1">
-            <a:extLst>
-              <a:ext uri="{FF2B5EF4-FFF2-40B4-BE49-F238E27FC236}">
-                <a16:creationId xmlns:a16="http://schemas.microsoft.com/office/drawing/2014/main" id="{73FF0AC1-191B-A69F-9504-49F22BCD7B03}"/>
-              </a:ext>
-            </a:extLst>
-          </p:cNvPr>
-          <p:cNvSpPr>
-            <a:spLocks noGrp="1"/>
-          </p:cNvSpPr>
-          <p:nvPr>
-            <p:ph type="title"/>
-          </p:nvPr>
-        </p:nvSpPr>
-        <p:spPr>
-          <a:xfrm>
-            <a:off x="838200" y="136525"/>
-            <a:ext cx="10515600" cy="1325563"/>
-          </a:xfrm>
-        </p:spPr>
-        <p:txBody>
-          <a:bodyPr>
-            <a:normAutofit fontScale="90000"/>
-          </a:bodyPr>
-          <a:lstStyle/>
-          <a:p>
-            <a:r>
-              <a:rPr lang="en-GB" b="1" dirty="0"/>
-              <a:t>A privacy-preserving multi-user retrieval system for multimodal artificial intelligence</a:t>
-            </a:r>
-            <a:r>
-              <a:rPr lang="zh-CN" altLang="en-US" b="1" dirty="0"/>
-              <a:t> </a:t>
-            </a:r>
-            <a:r>
-              <a:rPr lang="en-US" altLang="zh-CN" b="1" dirty="0"/>
-              <a:t>-</a:t>
-            </a:r>
-            <a:r>
-              <a:rPr lang="zh-CN" altLang="en-US" b="1" dirty="0"/>
-              <a:t> </a:t>
-            </a:r>
-            <a:r>
-              <a:rPr lang="en-US" altLang="zh-CN" b="1" dirty="0"/>
-              <a:t>1</a:t>
-            </a:r>
-            <a:endParaRPr lang="en-US" dirty="0"/>
-          </a:p>
-        </p:txBody>
-      </p:sp>
-      <p:sp>
-        <p:nvSpPr>
-          <p:cNvPr id="3" name="Content Placeholder 2">
-            <a:extLst>
-              <a:ext uri="{FF2B5EF4-FFF2-40B4-BE49-F238E27FC236}">
-                <a16:creationId xmlns:a16="http://schemas.microsoft.com/office/drawing/2014/main" id="{C0190995-3564-B1CE-A3D1-396A01B6A52D}"/>
-              </a:ext>
-            </a:extLst>
-          </p:cNvPr>
-          <p:cNvSpPr>
-            <a:spLocks noGrp="1"/>
-          </p:cNvSpPr>
-          <p:nvPr>
-            <p:ph idx="1"/>
-          </p:nvPr>
-        </p:nvSpPr>
-        <p:spPr>
-          <a:xfrm>
-            <a:off x="838200" y="1462088"/>
-            <a:ext cx="10783186" cy="4530725"/>
-          </a:xfrm>
-        </p:spPr>
-        <p:txBody>
-          <a:bodyPr>
-            <a:noAutofit/>
-          </a:bodyPr>
-          <a:lstStyle/>
-          <a:p>
-            <a:pPr>
-              <a:lnSpc>
-                <a:spcPct val="120000"/>
-              </a:lnSpc>
-            </a:pPr>
-            <a:r>
-              <a:rPr lang="en-US" altLang="zh-CN" sz="1400" b="1" dirty="0"/>
-              <a:t>W</a:t>
-            </a:r>
-            <a:r>
-              <a:rPr lang="en-GB" sz="1400" b="1" dirty="0"/>
-              <a:t>hat problem</a:t>
-            </a:r>
-            <a:r>
-              <a:rPr lang="en-US" altLang="zh-CN" sz="1400" b="1" dirty="0"/>
-              <a:t>?</a:t>
-            </a:r>
-          </a:p>
-          <a:p>
-            <a:pPr lvl="1"/>
-            <a:r>
-              <a:rPr lang="en-US" altLang="zh-CN" sz="1400" b="1" dirty="0"/>
-              <a:t>Main</a:t>
-            </a:r>
-            <a:r>
-              <a:rPr lang="zh-CN" altLang="en-US" sz="1400" b="1" dirty="0"/>
-              <a:t> </a:t>
-            </a:r>
-            <a:r>
-              <a:rPr lang="en-US" altLang="zh-CN" sz="1400" b="1" dirty="0"/>
-              <a:t>Framework:</a:t>
-            </a:r>
-            <a:r>
-              <a:rPr lang="zh-CN" altLang="en-US" sz="1400" b="1" dirty="0"/>
-              <a:t> </a:t>
-            </a:r>
-            <a:r>
-              <a:rPr lang="en-GB" sz="1400" dirty="0"/>
-              <a:t>distributed edge nodes</a:t>
-            </a:r>
-            <a:r>
-              <a:rPr lang="zh-CN" altLang="en-US" sz="1400" dirty="0"/>
-              <a:t> </a:t>
-            </a:r>
-            <a:r>
-              <a:rPr lang="en-US" altLang="zh-CN" sz="1400" dirty="0"/>
-              <a:t>+</a:t>
-            </a:r>
-            <a:r>
-              <a:rPr lang="zh-CN" altLang="en-US" sz="1400" dirty="0"/>
-              <a:t> </a:t>
-            </a:r>
-            <a:r>
-              <a:rPr lang="en-US" altLang="zh-CN" sz="1400" dirty="0"/>
-              <a:t>cloud-based</a:t>
-            </a:r>
-            <a:r>
-              <a:rPr lang="zh-CN" altLang="en-US" sz="1400" dirty="0"/>
-              <a:t> </a:t>
-            </a:r>
-            <a:r>
-              <a:rPr lang="en-US" altLang="zh-CN" sz="1400" dirty="0"/>
-              <a:t>AI</a:t>
-            </a:r>
-            <a:r>
-              <a:rPr lang="zh-CN" altLang="en-US" sz="1400" dirty="0"/>
-              <a:t> </a:t>
-            </a:r>
-            <a:r>
-              <a:rPr lang="en-US" altLang="zh-CN" sz="1400" dirty="0"/>
-              <a:t>applications.</a:t>
-            </a:r>
-          </a:p>
-          <a:p>
-            <a:pPr lvl="1"/>
-            <a:r>
-              <a:rPr lang="en-US" altLang="zh-CN" sz="1400" b="1" dirty="0"/>
-              <a:t>Edge-side:</a:t>
-            </a:r>
-            <a:r>
-              <a:rPr lang="zh-CN" altLang="en-US" sz="1400" b="1" dirty="0"/>
-              <a:t> </a:t>
-            </a:r>
-            <a:r>
-              <a:rPr lang="en-GB" sz="1400" dirty="0"/>
-              <a:t>User image / text</a:t>
-            </a:r>
-            <a:r>
-              <a:rPr lang="zh-CN" altLang="en-US" sz="1400" dirty="0"/>
-              <a:t> </a:t>
-            </a:r>
-            <a:r>
-              <a:rPr lang="en-US" altLang="zh-CN" sz="1400" dirty="0"/>
-              <a:t>-&gt;</a:t>
-            </a:r>
-            <a:r>
-              <a:rPr lang="zh-CN" altLang="en-US" sz="1400" dirty="0"/>
-              <a:t> </a:t>
-            </a:r>
-            <a:r>
-              <a:rPr lang="en-GB" sz="1400" dirty="0"/>
-              <a:t>Encoder</a:t>
-            </a:r>
-            <a:r>
-              <a:rPr lang="zh-CN" altLang="en-US" sz="1400" dirty="0"/>
-              <a:t> </a:t>
-            </a:r>
-            <a:r>
-              <a:rPr lang="en-US" altLang="zh-CN" sz="1400" dirty="0"/>
-              <a:t>-&gt;</a:t>
-            </a:r>
-            <a:r>
-              <a:rPr lang="zh-CN" altLang="en-US" sz="1400" dirty="0"/>
-              <a:t> </a:t>
-            </a:r>
-            <a:r>
-              <a:rPr lang="en-GB" sz="1400" dirty="0"/>
-              <a:t>Embedding</a:t>
-            </a:r>
-            <a:r>
-              <a:rPr lang="zh-CN" altLang="en-US" sz="1400" dirty="0"/>
-              <a:t> </a:t>
-            </a:r>
-            <a:endParaRPr lang="en-US" altLang="zh-CN" sz="1400" dirty="0"/>
-          </a:p>
-          <a:p>
-            <a:pPr lvl="1"/>
-            <a:r>
-              <a:rPr lang="en-US" altLang="zh-CN" sz="1400" b="1" dirty="0"/>
-              <a:t>Cloud–side:</a:t>
-            </a:r>
-            <a:r>
-              <a:rPr lang="zh-CN" altLang="en-US" sz="1400" b="1" dirty="0"/>
-              <a:t> </a:t>
-            </a:r>
-            <a:r>
-              <a:rPr lang="en-GB" sz="1400" dirty="0"/>
-              <a:t>Cloud retrieval / matching</a:t>
-            </a:r>
-            <a:r>
-              <a:rPr lang="zh-CN" altLang="en-US" sz="1400" dirty="0"/>
-              <a:t> </a:t>
-            </a:r>
-            <a:r>
-              <a:rPr lang="en-US" altLang="zh-CN" sz="1400" dirty="0"/>
-              <a:t>-&gt;</a:t>
-            </a:r>
-            <a:r>
-              <a:rPr lang="zh-CN" altLang="en-US" sz="1400" dirty="0"/>
-              <a:t> </a:t>
-            </a:r>
-            <a:r>
-              <a:rPr lang="en-GB" sz="1400" dirty="0"/>
-              <a:t>Return relevant image</a:t>
-            </a:r>
-            <a:r>
-              <a:rPr lang="en-US" altLang="zh-CN" sz="1400" dirty="0"/>
-              <a:t>/text</a:t>
-            </a:r>
-            <a:r>
-              <a:rPr lang="zh-CN" altLang="en-US" sz="1400" dirty="0"/>
-              <a:t> </a:t>
-            </a:r>
-            <a:r>
-              <a:rPr lang="en-US" altLang="zh-CN" sz="1400" dirty="0"/>
-              <a:t>result</a:t>
-            </a:r>
-            <a:endParaRPr lang="en-GB" sz="1400" dirty="0"/>
-          </a:p>
-          <a:p>
-            <a:pPr lvl="1"/>
-            <a:r>
-              <a:rPr lang="en-US" altLang="zh-CN" sz="1400" b="1" dirty="0"/>
-              <a:t>Context:</a:t>
-            </a:r>
-            <a:r>
-              <a:rPr lang="zh-CN" altLang="en-US" sz="1400" b="1" dirty="0"/>
-              <a:t> </a:t>
-            </a:r>
-            <a:r>
-              <a:rPr lang="en-GB" sz="1400" dirty="0"/>
-              <a:t>Raw image, text, or embedding may contain private information.</a:t>
-            </a:r>
-          </a:p>
-          <a:p>
-            <a:pPr lvl="1"/>
-            <a:r>
-              <a:rPr lang="en-US" altLang="zh-CN" sz="1400" b="1" dirty="0"/>
-              <a:t>Used</a:t>
-            </a:r>
-            <a:r>
-              <a:rPr lang="zh-CN" altLang="en-US" sz="1400" b="1" dirty="0"/>
-              <a:t> </a:t>
-            </a:r>
-            <a:r>
-              <a:rPr lang="en-US" altLang="zh-CN" sz="1400" b="1" dirty="0"/>
-              <a:t>for:</a:t>
-            </a:r>
-            <a:r>
-              <a:rPr lang="zh-CN" altLang="en-US" sz="1400" b="1" dirty="0"/>
-              <a:t> </a:t>
-            </a:r>
-            <a:r>
-              <a:rPr lang="en-GB" sz="1400" dirty="0"/>
-              <a:t>medical image retrieval</a:t>
-            </a:r>
-            <a:r>
-              <a:rPr lang="en-US" altLang="zh-CN" sz="1400" dirty="0"/>
-              <a:t>,</a:t>
-            </a:r>
-            <a:r>
-              <a:rPr lang="zh-CN" altLang="en-US" sz="1400" dirty="0"/>
-              <a:t> </a:t>
-            </a:r>
-            <a:r>
-              <a:rPr lang="en-GB" sz="1400" dirty="0"/>
-              <a:t>privacy-conscious customer service bots</a:t>
-            </a:r>
-            <a:r>
-              <a:rPr lang="en-US" altLang="zh-CN" sz="1400" dirty="0"/>
-              <a:t>.</a:t>
-            </a:r>
-          </a:p>
-          <a:p>
-            <a:r>
-              <a:rPr lang="en-US" altLang="zh-CN" sz="1400" b="1" dirty="0"/>
-              <a:t>W</a:t>
-            </a:r>
-            <a:r>
-              <a:rPr lang="en-GB" sz="1400" b="1" dirty="0"/>
-              <a:t>hat method</a:t>
-            </a:r>
-            <a:r>
-              <a:rPr lang="zh-CN" altLang="en-US" sz="1400" b="1" dirty="0"/>
-              <a:t> </a:t>
-            </a:r>
-            <a:r>
-              <a:rPr lang="en-US" altLang="zh-CN" sz="1400" b="1" dirty="0"/>
-              <a:t>(Main</a:t>
-            </a:r>
-            <a:r>
-              <a:rPr lang="zh-CN" altLang="en-US" sz="1400" b="1" dirty="0"/>
-              <a:t> </a:t>
-            </a:r>
-            <a:r>
-              <a:rPr lang="en-US" altLang="zh-CN" sz="1400" b="1" dirty="0"/>
-              <a:t>Idea)?</a:t>
-            </a:r>
-          </a:p>
-          <a:p>
-            <a:pPr lvl="1">
-              <a:lnSpc>
-                <a:spcPct val="120000"/>
-              </a:lnSpc>
-            </a:pPr>
-            <a:r>
-              <a:rPr lang="en-US" altLang="zh-CN" sz="1400" dirty="0"/>
-              <a:t>Present</a:t>
-            </a:r>
-            <a:r>
-              <a:rPr lang="zh-CN" altLang="en-US" sz="1400" dirty="0"/>
-              <a:t> </a:t>
-            </a:r>
-            <a:r>
-              <a:rPr lang="en-US" altLang="zh-CN" sz="1400" dirty="0"/>
-              <a:t>PMIRS,</a:t>
-            </a:r>
-            <a:r>
-              <a:rPr lang="zh-CN" altLang="en-US" sz="1400" dirty="0"/>
-              <a:t> </a:t>
-            </a:r>
-            <a:r>
-              <a:rPr lang="en-US" altLang="zh-CN" sz="1400" dirty="0"/>
-              <a:t>a</a:t>
-            </a:r>
-            <a:r>
-              <a:rPr lang="zh-CN" altLang="en-US" sz="1400" dirty="0"/>
-              <a:t> </a:t>
-            </a:r>
-            <a:r>
-              <a:rPr lang="en-US" altLang="zh-CN" sz="1400" dirty="0"/>
-              <a:t>system</a:t>
-            </a:r>
-            <a:r>
-              <a:rPr lang="zh-CN" altLang="en-US" sz="1400" dirty="0"/>
-              <a:t> </a:t>
-            </a:r>
-            <a:r>
-              <a:rPr lang="en-US" altLang="zh-CN" sz="1400" dirty="0"/>
-              <a:t>Combinates</a:t>
-            </a:r>
-            <a:r>
-              <a:rPr lang="zh-CN" altLang="en-US" sz="1400" dirty="0"/>
-              <a:t> </a:t>
-            </a:r>
-            <a:r>
-              <a:rPr lang="en-US" altLang="zh-CN" sz="1400" dirty="0"/>
-              <a:t>obfuscation</a:t>
-            </a:r>
-            <a:r>
-              <a:rPr lang="zh-CN" altLang="en-US" sz="1400" dirty="0"/>
-              <a:t> </a:t>
-            </a:r>
-            <a:r>
-              <a:rPr lang="en-US" altLang="zh-CN" sz="1400" dirty="0"/>
-              <a:t>techniques</a:t>
-            </a:r>
-            <a:r>
-              <a:rPr lang="zh-CN" altLang="en-US" sz="1400" dirty="0"/>
-              <a:t> </a:t>
-            </a:r>
-            <a:r>
-              <a:rPr lang="en-US" altLang="zh-CN" sz="1400" dirty="0"/>
-              <a:t>(</a:t>
-            </a:r>
-            <a:r>
-              <a:rPr lang="en-GB" sz="1400" dirty="0"/>
-              <a:t>block-wise projection</a:t>
-            </a:r>
-            <a:r>
-              <a:rPr lang="en-US" altLang="zh-CN" sz="1400" dirty="0"/>
-              <a:t>),</a:t>
-            </a:r>
-            <a:r>
-              <a:rPr lang="zh-CN" altLang="en-US" sz="1400" dirty="0"/>
-              <a:t> </a:t>
-            </a:r>
-            <a:r>
-              <a:rPr lang="en-US" altLang="zh-CN" sz="1400" dirty="0"/>
-              <a:t>encrypted</a:t>
-            </a:r>
-            <a:r>
-              <a:rPr lang="zh-CN" altLang="en-US" sz="1400" dirty="0"/>
-              <a:t> </a:t>
-            </a:r>
-            <a:r>
-              <a:rPr lang="en-US" altLang="zh-CN" sz="1400" dirty="0"/>
-              <a:t>inference</a:t>
-            </a:r>
-            <a:r>
-              <a:rPr lang="zh-CN" altLang="en-US" sz="1400" dirty="0"/>
-              <a:t> </a:t>
-            </a:r>
-            <a:r>
-              <a:rPr lang="en-US" altLang="zh-CN" sz="1400" dirty="0"/>
-              <a:t>(AES</a:t>
-            </a:r>
-            <a:r>
-              <a:rPr lang="zh-CN" altLang="en-US" sz="1400" dirty="0"/>
-              <a:t> </a:t>
-            </a:r>
-            <a:r>
-              <a:rPr lang="en-US" altLang="zh-CN" sz="1400" dirty="0"/>
-              <a:t>+</a:t>
-            </a:r>
-            <a:r>
-              <a:rPr lang="zh-CN" altLang="en-US" sz="1400" dirty="0"/>
-              <a:t> </a:t>
-            </a:r>
-            <a:r>
-              <a:rPr lang="en-US" altLang="zh-CN" sz="1400" dirty="0"/>
-              <a:t>CBC</a:t>
-            </a:r>
-            <a:r>
-              <a:rPr lang="zh-CN" altLang="en-US" sz="1400" dirty="0"/>
-              <a:t> </a:t>
-            </a:r>
-            <a:r>
-              <a:rPr lang="en-US" altLang="zh-CN" sz="1400" dirty="0"/>
-              <a:t>1</a:t>
-            </a:r>
-            <a:r>
-              <a:rPr lang="en-GB" sz="1400" dirty="0"/>
-              <a:t>28-bit keys</a:t>
-            </a:r>
-            <a:r>
-              <a:rPr lang="en-US" altLang="zh-CN" sz="1400" dirty="0"/>
-              <a:t>),</a:t>
-            </a:r>
-            <a:r>
-              <a:rPr lang="zh-CN" altLang="en-US" sz="1400" dirty="0"/>
-              <a:t> </a:t>
-            </a:r>
-            <a:r>
-              <a:rPr lang="en-GB" sz="1400" dirty="0"/>
-              <a:t>secure</a:t>
-            </a:r>
-            <a:r>
-              <a:rPr lang="zh-CN" altLang="en-US" sz="1400" dirty="0"/>
-              <a:t> </a:t>
-            </a:r>
-            <a:r>
-              <a:rPr lang="en-US" altLang="zh-CN" sz="1400" dirty="0"/>
-              <a:t>key</a:t>
-            </a:r>
-            <a:r>
-              <a:rPr lang="zh-CN" altLang="en-US" sz="1400" dirty="0"/>
-              <a:t> </a:t>
-            </a:r>
-            <a:r>
-              <a:rPr lang="en-US" altLang="zh-CN" sz="1400" dirty="0"/>
-              <a:t>management</a:t>
-            </a:r>
-            <a:r>
-              <a:rPr lang="zh-CN" altLang="en-US" sz="1400" dirty="0"/>
-              <a:t> </a:t>
-            </a:r>
-            <a:r>
-              <a:rPr lang="en-US" altLang="zh-CN" sz="1400" dirty="0"/>
-              <a:t>(</a:t>
-            </a:r>
-            <a:r>
-              <a:rPr lang="en-GB" sz="1400" dirty="0"/>
-              <a:t>Diffie-Hellman</a:t>
-            </a:r>
-            <a:r>
-              <a:rPr lang="en-US" altLang="zh-CN" sz="1400" dirty="0"/>
-              <a:t>)</a:t>
-            </a:r>
-            <a:r>
-              <a:rPr lang="zh-CN" altLang="en-US" sz="1400" dirty="0"/>
-              <a:t>  </a:t>
-            </a:r>
-            <a:r>
-              <a:rPr lang="en-US" altLang="zh-CN" sz="1400" dirty="0"/>
-              <a:t>+</a:t>
-            </a:r>
-            <a:r>
-              <a:rPr lang="zh-CN" altLang="en-US" sz="1400" dirty="0"/>
-              <a:t> </a:t>
-            </a:r>
-            <a:r>
-              <a:rPr lang="en-US" altLang="zh-CN" sz="1400" dirty="0"/>
-              <a:t>federated</a:t>
-            </a:r>
-            <a:r>
-              <a:rPr lang="zh-CN" altLang="en-US" sz="1400" dirty="0"/>
-              <a:t> </a:t>
-            </a:r>
-            <a:r>
-              <a:rPr lang="en-US" altLang="zh-CN" sz="1400" dirty="0"/>
-              <a:t>learning.</a:t>
-            </a:r>
-            <a:r>
-              <a:rPr lang="zh-CN" altLang="en-US" sz="1400" dirty="0"/>
-              <a:t> </a:t>
-            </a:r>
-            <a:endParaRPr lang="en-GB" altLang="zh-CN" sz="1400" dirty="0"/>
-          </a:p>
-          <a:p>
-            <a:pPr lvl="1">
-              <a:lnSpc>
-                <a:spcPct val="120000"/>
-              </a:lnSpc>
-            </a:pPr>
-            <a:r>
-              <a:rPr lang="en-GB" sz="1400" dirty="0"/>
-              <a:t>In the training phase, using Federated learning for Privacy-Preserving Training, which improves the F1-score and precision of the model without user-sensitive data.  In the inference phase, combining obfuscation techniques, encrypted techniques (AES + CBC) and DH for secure key management.</a:t>
-            </a:r>
-            <a:endParaRPr lang="en-GB" altLang="zh-CN" sz="1400" dirty="0"/>
-          </a:p>
-        </p:txBody>
-      </p:sp>
-      <p:sp>
-        <p:nvSpPr>
-          <p:cNvPr id="4" name="Footer Placeholder 3">
-            <a:extLst>
-              <a:ext uri="{FF2B5EF4-FFF2-40B4-BE49-F238E27FC236}">
-                <a16:creationId xmlns:a16="http://schemas.microsoft.com/office/drawing/2014/main" id="{E95F6BB6-488C-819E-0492-AB04D9C6336A}"/>
-              </a:ext>
-            </a:extLst>
-          </p:cNvPr>
-          <p:cNvSpPr>
-            <a:spLocks noGrp="1"/>
-          </p:cNvSpPr>
-          <p:nvPr>
-            <p:ph type="ftr" sz="quarter" idx="11"/>
-          </p:nvPr>
-        </p:nvSpPr>
-        <p:spPr/>
-        <p:txBody>
-          <a:bodyPr/>
-          <a:lstStyle/>
-          <a:p>
-            <a:r>
-              <a:rPr lang="en-US" dirty="0"/>
-              <a:t>https://</a:t>
-            </a:r>
-            <a:r>
-              <a:rPr lang="en-US" dirty="0" err="1"/>
-              <a:t>www.nature.com</a:t>
-            </a:r>
-            <a:r>
-              <a:rPr lang="en-US" dirty="0"/>
-              <a:t>/articles/s41598-026-40734-w</a:t>
-            </a:r>
-          </a:p>
-        </p:txBody>
-      </p:sp>
-    </p:spTree>
-    <p:extLst>
-      <p:ext uri="{BB962C8B-B14F-4D97-AF65-F5344CB8AC3E}">
-        <p14:creationId xmlns:p14="http://schemas.microsoft.com/office/powerpoint/2010/main" val="2621794148"/>
       </p:ext>
     </p:extLst>
   </p:cSld>
@@ -6267,7 +5934,7 @@
           <p:cNvPr id="2" name="Title 1">
             <a:extLst>
               <a:ext uri="{FF2B5EF4-FFF2-40B4-BE49-F238E27FC236}">
-                <a16:creationId xmlns:a16="http://schemas.microsoft.com/office/drawing/2014/main" id="{E44F908C-28C7-6B0F-B44D-D2DA2C3C6071}"/>
+                <a16:creationId xmlns:a16="http://schemas.microsoft.com/office/drawing/2014/main" id="{73FF0AC1-191B-A69F-9504-49F22BCD7B03}"/>
               </a:ext>
             </a:extLst>
           </p:cNvPr>
@@ -6278,7 +5945,12 @@
             <p:ph type="title"/>
           </p:nvPr>
         </p:nvSpPr>
-        <p:spPr/>
+        <p:spPr>
+          <a:xfrm>
+            <a:off x="838200" y="136525"/>
+            <a:ext cx="10515600" cy="1325563"/>
+          </a:xfrm>
+        </p:spPr>
         <p:txBody>
           <a:bodyPr>
             <a:normAutofit fontScale="90000"/>
@@ -6303,7 +5975,7 @@
             </a:r>
             <a:r>
               <a:rPr lang="en-US" altLang="zh-CN" b="1" dirty="0"/>
-              <a:t>2</a:t>
+              <a:t>1</a:t>
             </a:r>
             <a:endParaRPr lang="en-US" dirty="0"/>
           </a:p>
@@ -6314,7 +5986,7 @@
           <p:cNvPr id="3" name="Content Placeholder 2">
             <a:extLst>
               <a:ext uri="{FF2B5EF4-FFF2-40B4-BE49-F238E27FC236}">
-                <a16:creationId xmlns:a16="http://schemas.microsoft.com/office/drawing/2014/main" id="{8F04DE2E-D81A-FC94-4DA8-8CE8BD15DED1}"/>
+                <a16:creationId xmlns:a16="http://schemas.microsoft.com/office/drawing/2014/main" id="{C0190995-3564-B1CE-A3D1-396A01B6A52D}"/>
               </a:ext>
             </a:extLst>
           </p:cNvPr>
@@ -6325,10 +5997,15 @@
             <p:ph idx="1"/>
           </p:nvPr>
         </p:nvSpPr>
-        <p:spPr/>
+        <p:spPr>
+          <a:xfrm>
+            <a:off x="838200" y="1462088"/>
+            <a:ext cx="10783186" cy="4530725"/>
+          </a:xfrm>
+        </p:spPr>
         <p:txBody>
           <a:bodyPr>
-            <a:normAutofit/>
+            <a:noAutofit/>
           </a:bodyPr>
           <a:lstStyle/>
           <a:p>
@@ -6339,7 +6016,22 @@
             </a:pPr>
             <a:r>
               <a:rPr lang="en-US" altLang="zh-CN" sz="1400" b="1" dirty="0"/>
-              <a:t>Threat</a:t>
+              <a:t>W</a:t>
+            </a:r>
+            <a:r>
+              <a:rPr lang="en-GB" sz="1400" b="1" dirty="0"/>
+              <a:t>hat problem</a:t>
+            </a:r>
+            <a:r>
+              <a:rPr lang="en-US" altLang="zh-CN" sz="1400" b="1" dirty="0"/>
+              <a:t>?</a:t>
+            </a:r>
+          </a:p>
+          <a:p>
+            <a:pPr lvl="1"/>
+            <a:r>
+              <a:rPr lang="en-US" altLang="zh-CN" sz="1400" b="1" dirty="0"/>
+              <a:t>Main</a:t>
             </a:r>
             <a:r>
               <a:rPr lang="zh-CN" altLang="en-US" sz="1400" b="1" dirty="0"/>
@@ -6347,19 +6039,193 @@
             </a:r>
             <a:r>
               <a:rPr lang="en-US" altLang="zh-CN" sz="1400" b="1" dirty="0"/>
-              <a:t>Model</a:t>
+              <a:t>Framework:</a:t>
+            </a:r>
+            <a:r>
+              <a:rPr lang="zh-CN" altLang="en-US" sz="1400" b="1" dirty="0"/>
+              <a:t> </a:t>
+            </a:r>
+            <a:r>
+              <a:rPr lang="en-GB" sz="1400" dirty="0"/>
+              <a:t>distributed edge nodes</a:t>
+            </a:r>
+            <a:r>
+              <a:rPr lang="zh-CN" altLang="en-US" sz="1400" dirty="0"/>
+              <a:t> </a:t>
             </a:r>
             <a:r>
               <a:rPr lang="en-US" altLang="zh-CN" sz="1400" dirty="0"/>
-              <a:t>:</a:t>
+              <a:t>+</a:t>
             </a:r>
             <a:r>
               <a:rPr lang="zh-CN" altLang="en-US" sz="1400" dirty="0"/>
               <a:t> </a:t>
             </a:r>
             <a:r>
+              <a:rPr lang="en-US" altLang="zh-CN" sz="1400" dirty="0"/>
+              <a:t>cloud-based</a:t>
+            </a:r>
+            <a:r>
+              <a:rPr lang="zh-CN" altLang="en-US" sz="1400" dirty="0"/>
+              <a:t> </a:t>
+            </a:r>
+            <a:r>
+              <a:rPr lang="en-US" altLang="zh-CN" sz="1400" dirty="0"/>
+              <a:t>AI</a:t>
+            </a:r>
+            <a:r>
+              <a:rPr lang="zh-CN" altLang="en-US" sz="1400" dirty="0"/>
+              <a:t> </a:t>
+            </a:r>
+            <a:r>
+              <a:rPr lang="en-US" altLang="zh-CN" sz="1400" dirty="0"/>
+              <a:t>applications.</a:t>
+            </a:r>
+          </a:p>
+          <a:p>
+            <a:pPr lvl="1"/>
+            <a:r>
+              <a:rPr lang="en-US" altLang="zh-CN" sz="1400" b="1" dirty="0"/>
+              <a:t>Edge-side:</a:t>
+            </a:r>
+            <a:r>
+              <a:rPr lang="zh-CN" altLang="en-US" sz="1400" b="1" dirty="0"/>
+              <a:t> </a:t>
+            </a:r>
+            <a:r>
               <a:rPr lang="en-GB" sz="1400" dirty="0"/>
-              <a:t>The threat model assumes that the cloud server is not fully trusted</a:t>
+              <a:t>User image / text</a:t>
+            </a:r>
+            <a:r>
+              <a:rPr lang="zh-CN" altLang="en-US" sz="1400" dirty="0"/>
+              <a:t> </a:t>
+            </a:r>
+            <a:r>
+              <a:rPr lang="en-US" altLang="zh-CN" sz="1400" dirty="0"/>
+              <a:t>-&gt;</a:t>
+            </a:r>
+            <a:r>
+              <a:rPr lang="zh-CN" altLang="en-US" sz="1400" dirty="0"/>
+              <a:t> </a:t>
+            </a:r>
+            <a:r>
+              <a:rPr lang="en-GB" sz="1400" dirty="0"/>
+              <a:t>Encoder</a:t>
+            </a:r>
+            <a:r>
+              <a:rPr lang="zh-CN" altLang="en-US" sz="1400" dirty="0"/>
+              <a:t> </a:t>
+            </a:r>
+            <a:r>
+              <a:rPr lang="en-US" altLang="zh-CN" sz="1400" dirty="0"/>
+              <a:t>-&gt;</a:t>
+            </a:r>
+            <a:r>
+              <a:rPr lang="zh-CN" altLang="en-US" sz="1400" dirty="0"/>
+              <a:t> </a:t>
+            </a:r>
+            <a:r>
+              <a:rPr lang="en-GB" sz="1400" dirty="0"/>
+              <a:t>Embedding</a:t>
+            </a:r>
+            <a:r>
+              <a:rPr lang="zh-CN" altLang="en-US" sz="1400" dirty="0"/>
+              <a:t> </a:t>
+            </a:r>
+            <a:endParaRPr lang="en-US" altLang="zh-CN" sz="1400" dirty="0"/>
+          </a:p>
+          <a:p>
+            <a:pPr lvl="1"/>
+            <a:r>
+              <a:rPr lang="en-US" altLang="zh-CN" sz="1400" b="1" dirty="0"/>
+              <a:t>Cloud–side:</a:t>
+            </a:r>
+            <a:r>
+              <a:rPr lang="zh-CN" altLang="en-US" sz="1400" b="1" dirty="0"/>
+              <a:t> </a:t>
+            </a:r>
+            <a:r>
+              <a:rPr lang="en-GB" sz="1400" dirty="0"/>
+              <a:t>Cloud retrieval / matching</a:t>
+            </a:r>
+            <a:r>
+              <a:rPr lang="zh-CN" altLang="en-US" sz="1400" dirty="0"/>
+              <a:t> </a:t>
+            </a:r>
+            <a:r>
+              <a:rPr lang="en-US" altLang="zh-CN" sz="1400" dirty="0"/>
+              <a:t>-&gt;</a:t>
+            </a:r>
+            <a:r>
+              <a:rPr lang="zh-CN" altLang="en-US" sz="1400" dirty="0"/>
+              <a:t> </a:t>
+            </a:r>
+            <a:r>
+              <a:rPr lang="en-GB" sz="1400" dirty="0"/>
+              <a:t>Return relevant image</a:t>
+            </a:r>
+            <a:r>
+              <a:rPr lang="en-US" altLang="zh-CN" sz="1400" dirty="0"/>
+              <a:t>/text</a:t>
+            </a:r>
+            <a:r>
+              <a:rPr lang="zh-CN" altLang="en-US" sz="1400" dirty="0"/>
+              <a:t> </a:t>
+            </a:r>
+            <a:r>
+              <a:rPr lang="en-US" altLang="zh-CN" sz="1400" dirty="0"/>
+              <a:t>result</a:t>
+            </a:r>
+            <a:endParaRPr lang="en-GB" sz="1400" dirty="0"/>
+          </a:p>
+          <a:p>
+            <a:pPr lvl="1"/>
+            <a:r>
+              <a:rPr lang="en-US" altLang="zh-CN" sz="1400" b="1" dirty="0"/>
+              <a:t>Context:</a:t>
+            </a:r>
+            <a:r>
+              <a:rPr lang="zh-CN" altLang="en-US" sz="1400" b="1" dirty="0"/>
+              <a:t> </a:t>
+            </a:r>
+            <a:r>
+              <a:rPr lang="en-GB" sz="1400" dirty="0"/>
+              <a:t>Raw image, text, or embedding may contain private information.</a:t>
+            </a:r>
+          </a:p>
+          <a:p>
+            <a:pPr lvl="1"/>
+            <a:r>
+              <a:rPr lang="en-US" altLang="zh-CN" sz="1400" b="1" dirty="0"/>
+              <a:t>Used</a:t>
+            </a:r>
+            <a:r>
+              <a:rPr lang="zh-CN" altLang="en-US" sz="1400" b="1" dirty="0"/>
+              <a:t> </a:t>
+            </a:r>
+            <a:r>
+              <a:rPr lang="en-US" altLang="zh-CN" sz="1400" b="1" dirty="0"/>
+              <a:t>for:</a:t>
+            </a:r>
+            <a:r>
+              <a:rPr lang="zh-CN" altLang="en-US" sz="1400" b="1" dirty="0"/>
+              <a:t> </a:t>
+            </a:r>
+            <a:r>
+              <a:rPr lang="en-GB" sz="1400" dirty="0"/>
+              <a:t>medical image retrieval</a:t>
+            </a:r>
+            <a:r>
+              <a:rPr lang="en-US" altLang="zh-CN" sz="1400" dirty="0"/>
+              <a:t>,</a:t>
+            </a:r>
+            <a:r>
+              <a:rPr lang="zh-CN" altLang="en-US" sz="1400" dirty="0"/>
+              <a:t> </a:t>
+            </a:r>
+            <a:r>
+              <a:rPr lang="en-GB" sz="1400" dirty="0"/>
+              <a:t>privacy-conscious customer service bots</a:t>
             </a:r>
             <a:r>
               <a:rPr lang="en-US" altLang="zh-CN" sz="1400" dirty="0"/>
@@ -6369,7 +6235,11 @@
           <a:p>
             <a:r>
               <a:rPr lang="en-US" altLang="zh-CN" sz="1400" b="1" dirty="0"/>
-              <a:t>Framework</a:t>
+              <a:t>W</a:t>
+            </a:r>
+            <a:r>
+              <a:rPr lang="en-GB" sz="1400" b="1" dirty="0"/>
+              <a:t>hat method</a:t>
             </a:r>
             <a:r>
               <a:rPr lang="zh-CN" altLang="en-US" sz="1400" b="1" dirty="0"/>
@@ -6377,303 +6247,228 @@
             </a:r>
             <a:r>
               <a:rPr lang="en-US" altLang="zh-CN" sz="1400" b="1" dirty="0"/>
-              <a:t>Design:</a:t>
+              <a:t>(Main</a:t>
             </a:r>
             <a:r>
               <a:rPr lang="zh-CN" altLang="en-US" sz="1400" b="1" dirty="0"/>
               <a:t> </a:t>
             </a:r>
-            <a:endParaRPr lang="en-US" altLang="zh-CN" sz="1400" b="1" dirty="0"/>
-          </a:p>
-          <a:p>
             <a:r>
               <a:rPr lang="en-US" altLang="zh-CN" sz="1400" b="1" dirty="0"/>
-              <a:t>Component</a:t>
-            </a:r>
-            <a:r>
-              <a:rPr lang="zh-CN" altLang="en-US" sz="1400" b="1" dirty="0"/>
-              <a:t> </a:t>
-            </a:r>
-            <a:r>
-              <a:rPr lang="en-US" altLang="zh-CN" sz="1400" b="1" dirty="0"/>
-              <a:t>Selection:</a:t>
-            </a:r>
-          </a:p>
-          <a:p>
-            <a:pPr lvl="1"/>
-            <a:r>
-              <a:rPr lang="en-US" altLang="zh-CN" sz="1400" dirty="0"/>
-              <a:t>A</a:t>
-            </a:r>
-            <a:r>
-              <a:rPr lang="zh-CN" altLang="en-US" sz="1400" dirty="0"/>
-              <a:t> </a:t>
-            </a:r>
-            <a:r>
-              <a:rPr lang="en-US" altLang="zh-CN" sz="1400" dirty="0"/>
-              <a:t>lightweight</a:t>
-            </a:r>
-            <a:r>
-              <a:rPr lang="zh-CN" altLang="en-US" sz="1400" dirty="0"/>
-              <a:t> </a:t>
-            </a:r>
-            <a:r>
-              <a:rPr lang="en-US" altLang="zh-CN" sz="1400" dirty="0"/>
-              <a:t>model</a:t>
-            </a:r>
-            <a:r>
-              <a:rPr lang="zh-CN" altLang="en-US" sz="1400" dirty="0"/>
-              <a:t> </a:t>
-            </a:r>
-            <a:r>
-              <a:rPr lang="en-US" altLang="zh-CN" sz="1400" dirty="0"/>
-              <a:t>based</a:t>
-            </a:r>
-            <a:r>
-              <a:rPr lang="zh-CN" altLang="en-US" sz="1400" dirty="0"/>
-              <a:t> </a:t>
-            </a:r>
-            <a:r>
-              <a:rPr lang="en-US" altLang="zh-CN" sz="1400" dirty="0"/>
-              <a:t>on</a:t>
-            </a:r>
-            <a:r>
-              <a:rPr lang="zh-CN" altLang="en-US" sz="1400" dirty="0"/>
-              <a:t> </a:t>
-            </a:r>
-            <a:r>
-              <a:rPr lang="en-US" altLang="zh-CN" sz="1400" dirty="0"/>
-              <a:t>the</a:t>
-            </a:r>
-            <a:r>
-              <a:rPr lang="zh-CN" altLang="en-US" sz="1400" dirty="0"/>
-              <a:t> </a:t>
-            </a:r>
-            <a:r>
-              <a:rPr lang="en-US" altLang="zh-CN" sz="1400" dirty="0"/>
-              <a:t>CLIP</a:t>
-            </a:r>
-            <a:r>
-              <a:rPr lang="zh-CN" altLang="en-US" sz="1400" dirty="0"/>
-              <a:t> </a:t>
-            </a:r>
-            <a:r>
-              <a:rPr lang="en-US" altLang="zh-CN" sz="1400" dirty="0"/>
-              <a:t>codebase.</a:t>
-            </a:r>
-            <a:r>
-              <a:rPr lang="zh-CN" altLang="en-US" sz="1400" dirty="0"/>
-              <a:t> </a:t>
-            </a:r>
-            <a:r>
-              <a:rPr lang="en-US" altLang="zh-CN" sz="1400" dirty="0"/>
-              <a:t>(Pre-trained</a:t>
-            </a:r>
-            <a:r>
-              <a:rPr lang="zh-CN" altLang="en-US" sz="1400" dirty="0"/>
-              <a:t> </a:t>
-            </a:r>
-            <a:r>
-              <a:rPr lang="en-US" altLang="zh-CN" sz="1400" dirty="0"/>
-              <a:t>model</a:t>
-            </a:r>
-            <a:r>
-              <a:rPr lang="zh-CN" altLang="en-US" sz="1400" dirty="0"/>
-              <a:t> </a:t>
-            </a:r>
-            <a:r>
-              <a:rPr lang="en-US" altLang="zh-CN" sz="1400" dirty="0"/>
-              <a:t>and</a:t>
-            </a:r>
-            <a:r>
-              <a:rPr lang="zh-CN" altLang="en-US" sz="1400" dirty="0"/>
-              <a:t> </a:t>
-            </a:r>
-            <a:r>
-              <a:rPr lang="en-US" altLang="zh-CN" sz="1400" dirty="0"/>
-              <a:t>fine-tuned)</a:t>
-            </a:r>
-            <a:r>
-              <a:rPr lang="zh-CN" altLang="en-US" sz="1400" dirty="0"/>
-              <a:t> </a:t>
-            </a:r>
-            <a:endParaRPr lang="en-US" altLang="zh-CN" sz="1400" dirty="0"/>
-          </a:p>
-          <a:p>
-            <a:pPr lvl="1"/>
-            <a:r>
-              <a:rPr lang="en-US" altLang="zh-CN" sz="1400" dirty="0"/>
-              <a:t>Encryption</a:t>
-            </a:r>
-            <a:r>
-              <a:rPr lang="zh-CN" altLang="en-US" sz="1400" dirty="0"/>
-              <a:t> </a:t>
-            </a:r>
-            <a:r>
-              <a:rPr lang="en-US" altLang="zh-CN" sz="1400" dirty="0"/>
-              <a:t>Algorithm</a:t>
-            </a:r>
-            <a:r>
-              <a:rPr lang="zh-CN" altLang="en-US" sz="1400" dirty="0"/>
-              <a:t> </a:t>
-            </a:r>
-            <a:r>
-              <a:rPr lang="en-US" altLang="zh-CN" sz="1400" dirty="0"/>
-              <a:t>:</a:t>
-            </a:r>
-            <a:r>
-              <a:rPr lang="zh-CN" altLang="en-US" sz="1400" dirty="0"/>
-              <a:t> </a:t>
-            </a:r>
-            <a:r>
-              <a:rPr lang="en-US" altLang="zh-CN" sz="1400" dirty="0"/>
-              <a:t>AES-CBC</a:t>
-            </a:r>
-            <a:r>
-              <a:rPr lang="zh-CN" altLang="en-US" sz="1400" dirty="0"/>
-              <a:t> </a:t>
-            </a:r>
-            <a:r>
-              <a:rPr lang="en-US" altLang="zh-CN" sz="1400" dirty="0"/>
-              <a:t>128</a:t>
-            </a:r>
-            <a:r>
-              <a:rPr lang="zh-CN" altLang="en-US" sz="1400" dirty="0"/>
-              <a:t> </a:t>
-            </a:r>
-            <a:r>
-              <a:rPr lang="en-US" altLang="zh-CN" sz="1400" dirty="0"/>
-              <a:t>bits,</a:t>
-            </a:r>
-            <a:r>
-              <a:rPr lang="zh-CN" altLang="en-US" sz="1400" dirty="0"/>
-              <a:t>                                      </a:t>
-            </a:r>
-            <a:endParaRPr lang="en-GB" altLang="zh-CN" sz="1400" dirty="0"/>
-          </a:p>
-          <a:p>
-            <a:pPr lvl="1"/>
-            <a:r>
-              <a:rPr lang="en-GB" sz="1400" b="1" dirty="0"/>
-              <a:t>Fine-tuning method: </a:t>
-            </a:r>
-            <a:r>
-              <a:rPr lang="en-GB" sz="1400" dirty="0"/>
-              <a:t>Federated Learning</a:t>
-            </a:r>
-            <a:r>
-              <a:rPr lang="zh-CN" altLang="en-US" sz="1400" dirty="0"/>
-              <a:t> </a:t>
-            </a:r>
-            <a:r>
-              <a:rPr lang="en-US" altLang="zh-CN" sz="1400" dirty="0"/>
-              <a:t>(Upload</a:t>
-            </a:r>
-            <a:r>
-              <a:rPr lang="zh-CN" altLang="en-US" sz="1400" dirty="0"/>
-              <a:t> </a:t>
-            </a:r>
-            <a:r>
-              <a:rPr lang="en-US" altLang="zh-CN" sz="1400" dirty="0"/>
-              <a:t>weights</a:t>
-            </a:r>
-            <a:r>
-              <a:rPr lang="zh-CN" altLang="en-US" sz="1400" dirty="0"/>
-              <a:t> </a:t>
-            </a:r>
-            <a:r>
-              <a:rPr lang="en-US" altLang="zh-CN" sz="1400" dirty="0"/>
-              <a:t>with</a:t>
-            </a:r>
-            <a:r>
-              <a:rPr lang="zh-CN" altLang="en-US" sz="1400" dirty="0"/>
-              <a:t> </a:t>
-            </a:r>
-            <a:r>
-              <a:rPr lang="en-US" altLang="zh-CN" sz="1400" dirty="0"/>
-              <a:t>AES</a:t>
-            </a:r>
-            <a:r>
-              <a:rPr lang="zh-CN" altLang="en-US" sz="1400" dirty="0"/>
-              <a:t> </a:t>
-            </a:r>
-            <a:r>
-              <a:rPr lang="en-US" altLang="zh-CN" sz="1400" dirty="0"/>
-              <a:t>Encryption)</a:t>
-            </a:r>
-            <a:endParaRPr lang="en-GB" altLang="zh-CN" sz="1400" dirty="0"/>
-          </a:p>
-          <a:p>
-            <a:pPr>
+              <a:t>Idea)?</a:t>
+            </a:r>
+          </a:p>
+          <a:p>
+            <a:pPr lvl="1">
               <a:lnSpc>
-                <a:spcPct val="100000"/>
+                <a:spcPct val="120000"/>
               </a:lnSpc>
             </a:pPr>
             <a:r>
-              <a:rPr lang="en-US" altLang="zh-CN" sz="1400" b="1" dirty="0"/>
-              <a:t>Evaluation:</a:t>
-            </a:r>
+              <a:rPr lang="en-US" altLang="zh-CN" sz="1400" dirty="0"/>
+              <a:t>Present</a:t>
+            </a:r>
+            <a:r>
+              <a:rPr lang="zh-CN" altLang="en-US" sz="1400" dirty="0"/>
+              <a:t> </a:t>
+            </a:r>
+            <a:r>
+              <a:rPr lang="en-US" altLang="zh-CN" sz="1400" dirty="0"/>
+              <a:t>PMIRS,</a:t>
+            </a:r>
+            <a:r>
+              <a:rPr lang="zh-CN" altLang="en-US" sz="1400" dirty="0"/>
+              <a:t> </a:t>
+            </a:r>
+            <a:r>
+              <a:rPr lang="en-US" altLang="zh-CN" sz="1400" dirty="0"/>
+              <a:t>a</a:t>
+            </a:r>
+            <a:r>
+              <a:rPr lang="zh-CN" altLang="en-US" sz="1400" dirty="0"/>
+              <a:t> </a:t>
+            </a:r>
+            <a:r>
+              <a:rPr lang="en-US" altLang="zh-CN" sz="1400" dirty="0"/>
+              <a:t>system</a:t>
+            </a:r>
+            <a:r>
+              <a:rPr lang="zh-CN" altLang="en-US" sz="1400" dirty="0"/>
+              <a:t> </a:t>
+            </a:r>
+            <a:r>
+              <a:rPr lang="en-US" altLang="zh-CN" sz="1400" dirty="0"/>
+              <a:t>Combinates</a:t>
+            </a:r>
+            <a:r>
+              <a:rPr lang="zh-CN" altLang="en-US" sz="1400" dirty="0"/>
+              <a:t> </a:t>
+            </a:r>
+            <a:r>
+              <a:rPr lang="en-US" altLang="zh-CN" sz="1400" dirty="0"/>
+              <a:t>obfuscation</a:t>
+            </a:r>
+            <a:r>
+              <a:rPr lang="zh-CN" altLang="en-US" sz="1400" dirty="0"/>
+              <a:t> </a:t>
+            </a:r>
+            <a:r>
+              <a:rPr lang="en-US" altLang="zh-CN" sz="1400" dirty="0"/>
+              <a:t>techniques</a:t>
+            </a:r>
+            <a:r>
+              <a:rPr lang="zh-CN" altLang="en-US" sz="1400" dirty="0"/>
+              <a:t> </a:t>
+            </a:r>
+            <a:r>
+              <a:rPr lang="en-US" altLang="zh-CN" sz="1400" dirty="0"/>
+              <a:t>(</a:t>
+            </a:r>
+            <a:r>
+              <a:rPr lang="en-GB" sz="1400" dirty="0"/>
+              <a:t>block-wise projection</a:t>
+            </a:r>
+            <a:r>
+              <a:rPr lang="en-US" altLang="zh-CN" sz="1400" dirty="0"/>
+              <a:t>),</a:t>
+            </a:r>
+            <a:r>
+              <a:rPr lang="zh-CN" altLang="en-US" sz="1400" dirty="0"/>
+              <a:t> </a:t>
+            </a:r>
+            <a:r>
+              <a:rPr lang="en-US" altLang="zh-CN" sz="1400" dirty="0"/>
+              <a:t>encrypted</a:t>
+            </a:r>
+            <a:r>
+              <a:rPr lang="zh-CN" altLang="en-US" sz="1400" dirty="0"/>
+              <a:t> </a:t>
+            </a:r>
+            <a:r>
+              <a:rPr lang="en-US" altLang="zh-CN" sz="1400" dirty="0"/>
+              <a:t>inference</a:t>
+            </a:r>
+            <a:r>
+              <a:rPr lang="zh-CN" altLang="en-US" sz="1400" dirty="0"/>
+              <a:t> </a:t>
+            </a:r>
+            <a:r>
+              <a:rPr lang="en-US" altLang="zh-CN" sz="1400" dirty="0"/>
+              <a:t>(AES</a:t>
+            </a:r>
+            <a:r>
+              <a:rPr lang="zh-CN" altLang="en-US" sz="1400" dirty="0"/>
+              <a:t> </a:t>
+            </a:r>
+            <a:r>
+              <a:rPr lang="en-US" altLang="zh-CN" sz="1400" dirty="0"/>
+              <a:t>+</a:t>
+            </a:r>
+            <a:r>
+              <a:rPr lang="zh-CN" altLang="en-US" sz="1400" dirty="0"/>
+              <a:t> </a:t>
+            </a:r>
+            <a:r>
+              <a:rPr lang="en-US" altLang="zh-CN" sz="1400" dirty="0"/>
+              <a:t>CBC</a:t>
+            </a:r>
+            <a:r>
+              <a:rPr lang="zh-CN" altLang="en-US" sz="1400" dirty="0"/>
+              <a:t> </a:t>
+            </a:r>
+            <a:r>
+              <a:rPr lang="en-US" altLang="zh-CN" sz="1400" dirty="0"/>
+              <a:t>1</a:t>
+            </a:r>
+            <a:r>
+              <a:rPr lang="en-GB" sz="1400" dirty="0"/>
+              <a:t>28-bit keys</a:t>
+            </a:r>
+            <a:r>
+              <a:rPr lang="en-US" altLang="zh-CN" sz="1400" dirty="0"/>
+              <a:t>),</a:t>
+            </a:r>
+            <a:r>
+              <a:rPr lang="zh-CN" altLang="en-US" sz="1400" dirty="0"/>
+              <a:t> </a:t>
+            </a:r>
+            <a:r>
+              <a:rPr lang="en-GB" sz="1400" dirty="0"/>
+              <a:t>secure</a:t>
+            </a:r>
+            <a:r>
+              <a:rPr lang="zh-CN" altLang="en-US" sz="1400" dirty="0"/>
+              <a:t> </a:t>
+            </a:r>
+            <a:r>
+              <a:rPr lang="en-US" altLang="zh-CN" sz="1400" dirty="0"/>
+              <a:t>key</a:t>
+            </a:r>
+            <a:r>
+              <a:rPr lang="zh-CN" altLang="en-US" sz="1400" dirty="0"/>
+              <a:t> </a:t>
+            </a:r>
+            <a:r>
+              <a:rPr lang="en-US" altLang="zh-CN" sz="1400" dirty="0"/>
+              <a:t>management</a:t>
+            </a:r>
+            <a:r>
+              <a:rPr lang="zh-CN" altLang="en-US" sz="1400" dirty="0"/>
+              <a:t> </a:t>
+            </a:r>
+            <a:r>
+              <a:rPr lang="en-US" altLang="zh-CN" sz="1400" dirty="0"/>
+              <a:t>(</a:t>
+            </a:r>
+            <a:r>
+              <a:rPr lang="en-GB" sz="1400" dirty="0"/>
+              <a:t>Diffie-Hellman</a:t>
+            </a:r>
+            <a:r>
+              <a:rPr lang="en-US" altLang="zh-CN" sz="1400" dirty="0"/>
+              <a:t>)</a:t>
+            </a:r>
+            <a:r>
+              <a:rPr lang="zh-CN" altLang="en-US" sz="1400" dirty="0"/>
+              <a:t>  </a:t>
+            </a:r>
+            <a:r>
+              <a:rPr lang="en-US" altLang="zh-CN" sz="1400" dirty="0"/>
+              <a:t>+</a:t>
+            </a:r>
+            <a:r>
+              <a:rPr lang="zh-CN" altLang="en-US" sz="1400" dirty="0"/>
+              <a:t> </a:t>
+            </a:r>
+            <a:r>
+              <a:rPr lang="en-US" altLang="zh-CN" sz="1400" dirty="0"/>
+              <a:t>federated</a:t>
+            </a:r>
+            <a:r>
+              <a:rPr lang="zh-CN" altLang="en-US" sz="1400" dirty="0"/>
+              <a:t> </a:t>
+            </a:r>
+            <a:r>
+              <a:rPr lang="en-US" altLang="zh-CN" sz="1400" dirty="0"/>
+              <a:t>learning.</a:t>
+            </a:r>
+            <a:r>
+              <a:rPr lang="zh-CN" altLang="en-US" sz="1400" dirty="0"/>
+              <a:t> </a:t>
+            </a:r>
+            <a:endParaRPr lang="en-GB" altLang="zh-CN" sz="1400" dirty="0"/>
           </a:p>
           <a:p>
             <a:pPr lvl="1">
               <a:lnSpc>
-                <a:spcPct val="100000"/>
+                <a:spcPct val="120000"/>
               </a:lnSpc>
             </a:pPr>
             <a:r>
               <a:rPr lang="en-GB" sz="1400" dirty="0"/>
-              <a:t>Simulated cloud-based LLM environment </a:t>
-            </a:r>
-          </a:p>
-          <a:p>
-            <a:pPr lvl="1">
-              <a:lnSpc>
-                <a:spcPct val="100000"/>
-              </a:lnSpc>
-            </a:pPr>
-            <a:r>
-              <a:rPr lang="en-US" altLang="zh-CN" sz="1400" dirty="0"/>
-              <a:t>F1-score</a:t>
-            </a:r>
-          </a:p>
-          <a:p>
-            <a:pPr>
-              <a:lnSpc>
-                <a:spcPct val="100000"/>
-              </a:lnSpc>
-            </a:pPr>
-            <a:r>
-              <a:rPr lang="en-US" altLang="zh-CN" sz="1400" b="1" dirty="0"/>
-              <a:t>Data</a:t>
-            </a:r>
-            <a:r>
-              <a:rPr lang="zh-CN" altLang="en-US" sz="1400" b="1" dirty="0"/>
-              <a:t> </a:t>
-            </a:r>
-            <a:r>
-              <a:rPr lang="en-US" altLang="zh-CN" sz="1400" b="1" dirty="0"/>
-              <a:t>Set:</a:t>
-            </a:r>
-          </a:p>
-          <a:p>
-            <a:pPr lvl="1">
-              <a:lnSpc>
-                <a:spcPct val="100000"/>
-              </a:lnSpc>
-            </a:pPr>
-            <a:r>
-              <a:rPr lang="en-GB" altLang="zh-CN" sz="1400" dirty="0"/>
-              <a:t>ImageNet</a:t>
-            </a:r>
-            <a:endParaRPr lang="en-US" altLang="zh-CN" sz="1400" dirty="0"/>
-          </a:p>
-          <a:p>
-            <a:pPr>
-              <a:lnSpc>
-                <a:spcPct val="100000"/>
-              </a:lnSpc>
-            </a:pPr>
-            <a:endParaRPr lang="en-US" sz="1400" dirty="0"/>
+              <a:t>In the training phase, using Federated learning for Privacy-Preserving Training, which improves the F1-score and precision of the model without user-sensitive data.  In the inference phase, combining obfuscation techniques, encrypted techniques (AES + CBC) and DH for secure key management.</a:t>
+            </a:r>
+            <a:endParaRPr lang="en-GB" altLang="zh-CN" sz="1400" dirty="0"/>
           </a:p>
         </p:txBody>
       </p:sp>
@@ -6682,7 +6477,7 @@
           <p:cNvPr id="4" name="Footer Placeholder 3">
             <a:extLst>
               <a:ext uri="{FF2B5EF4-FFF2-40B4-BE49-F238E27FC236}">
-                <a16:creationId xmlns:a16="http://schemas.microsoft.com/office/drawing/2014/main" id="{5EA341F8-C67F-B0B7-7EF7-16F1814F28D8}"/>
+                <a16:creationId xmlns:a16="http://schemas.microsoft.com/office/drawing/2014/main" id="{E95F6BB6-488C-819E-0492-AB04D9C6336A}"/>
               </a:ext>
             </a:extLst>
           </p:cNvPr>
@@ -6699,8 +6494,16 @@
           <a:lstStyle/>
           <a:p>
             <a:r>
-              <a:rPr lang="en-US"/>
-              <a:t>https://www.nature.com/articles/s41598-026-40734-w</a:t>
+              <a:rPr lang="en-US" dirty="0"/>
+              <a:t>https://</a:t>
+            </a:r>
+            <a:r>
+              <a:rPr lang="en-US" dirty="0" err="1"/>
+              <a:t>www.nature.com</a:t>
+            </a:r>
+            <a:r>
+              <a:rPr lang="en-US" dirty="0"/>
+              <a:t>/articles/s41598-026-40734-w</a:t>
             </a:r>
           </a:p>
         </p:txBody>
@@ -6708,7 +6511,7 @@
     </p:spTree>
     <p:extLst>
       <p:ext uri="{BB962C8B-B14F-4D97-AF65-F5344CB8AC3E}">
-        <p14:creationId xmlns:p14="http://schemas.microsoft.com/office/powerpoint/2010/main" val="4138975813"/>
+        <p14:creationId xmlns:p14="http://schemas.microsoft.com/office/powerpoint/2010/main" val="2621794148"/>
       </p:ext>
     </p:extLst>
   </p:cSld>
@@ -6740,6 +6543,479 @@
           <p:cNvPr id="2" name="Title 1">
             <a:extLst>
               <a:ext uri="{FF2B5EF4-FFF2-40B4-BE49-F238E27FC236}">
+                <a16:creationId xmlns:a16="http://schemas.microsoft.com/office/drawing/2014/main" id="{E44F908C-28C7-6B0F-B44D-D2DA2C3C6071}"/>
+              </a:ext>
+            </a:extLst>
+          </p:cNvPr>
+          <p:cNvSpPr>
+            <a:spLocks noGrp="1"/>
+          </p:cNvSpPr>
+          <p:nvPr>
+            <p:ph type="title"/>
+          </p:nvPr>
+        </p:nvSpPr>
+        <p:spPr/>
+        <p:txBody>
+          <a:bodyPr>
+            <a:normAutofit fontScale="90000"/>
+          </a:bodyPr>
+          <a:lstStyle/>
+          <a:p>
+            <a:r>
+              <a:rPr lang="en-GB" b="1" dirty="0"/>
+              <a:t>A privacy-preserving multi-user retrieval system for multimodal artificial intelligence</a:t>
+            </a:r>
+            <a:r>
+              <a:rPr lang="zh-CN" altLang="en-US" b="1" dirty="0"/>
+              <a:t> </a:t>
+            </a:r>
+            <a:r>
+              <a:rPr lang="en-US" altLang="zh-CN" b="1" dirty="0"/>
+              <a:t>-</a:t>
+            </a:r>
+            <a:r>
+              <a:rPr lang="zh-CN" altLang="en-US" b="1" dirty="0"/>
+              <a:t> </a:t>
+            </a:r>
+            <a:r>
+              <a:rPr lang="en-US" altLang="zh-CN" b="1" dirty="0"/>
+              <a:t>2</a:t>
+            </a:r>
+            <a:endParaRPr lang="en-US" dirty="0"/>
+          </a:p>
+        </p:txBody>
+      </p:sp>
+      <p:sp>
+        <p:nvSpPr>
+          <p:cNvPr id="3" name="Content Placeholder 2">
+            <a:extLst>
+              <a:ext uri="{FF2B5EF4-FFF2-40B4-BE49-F238E27FC236}">
+                <a16:creationId xmlns:a16="http://schemas.microsoft.com/office/drawing/2014/main" id="{8F04DE2E-D81A-FC94-4DA8-8CE8BD15DED1}"/>
+              </a:ext>
+            </a:extLst>
+          </p:cNvPr>
+          <p:cNvSpPr>
+            <a:spLocks noGrp="1"/>
+          </p:cNvSpPr>
+          <p:nvPr>
+            <p:ph idx="1"/>
+          </p:nvPr>
+        </p:nvSpPr>
+        <p:spPr/>
+        <p:txBody>
+          <a:bodyPr>
+            <a:normAutofit/>
+          </a:bodyPr>
+          <a:lstStyle/>
+          <a:p>
+            <a:pPr>
+              <a:lnSpc>
+                <a:spcPct val="120000"/>
+              </a:lnSpc>
+            </a:pPr>
+            <a:r>
+              <a:rPr lang="en-US" altLang="zh-CN" sz="1400" b="1" dirty="0"/>
+              <a:t>Threat</a:t>
+            </a:r>
+            <a:r>
+              <a:rPr lang="zh-CN" altLang="en-US" sz="1400" b="1" dirty="0"/>
+              <a:t> </a:t>
+            </a:r>
+            <a:r>
+              <a:rPr lang="en-US" altLang="zh-CN" sz="1400" b="1" dirty="0"/>
+              <a:t>Model</a:t>
+            </a:r>
+            <a:r>
+              <a:rPr lang="en-US" altLang="zh-CN" sz="1400" dirty="0"/>
+              <a:t>:</a:t>
+            </a:r>
+            <a:r>
+              <a:rPr lang="zh-CN" altLang="en-US" sz="1400" dirty="0"/>
+              <a:t> </a:t>
+            </a:r>
+            <a:r>
+              <a:rPr lang="en-GB" sz="1400" dirty="0"/>
+              <a:t>The threat model assumes that the cloud server is not fully trusted</a:t>
+            </a:r>
+            <a:r>
+              <a:rPr lang="en-US" altLang="zh-CN" sz="1400" dirty="0"/>
+              <a:t>.</a:t>
+            </a:r>
+          </a:p>
+          <a:p>
+            <a:r>
+              <a:rPr lang="en-US" altLang="zh-CN" sz="1400" b="1" dirty="0"/>
+              <a:t>Framework</a:t>
+            </a:r>
+            <a:r>
+              <a:rPr lang="zh-CN" altLang="en-US" sz="1400" b="1" dirty="0"/>
+              <a:t> </a:t>
+            </a:r>
+            <a:r>
+              <a:rPr lang="en-US" altLang="zh-CN" sz="1400" b="1" dirty="0"/>
+              <a:t>Design:</a:t>
+            </a:r>
+            <a:r>
+              <a:rPr lang="zh-CN" altLang="en-US" sz="1400" b="1" dirty="0"/>
+              <a:t> </a:t>
+            </a:r>
+            <a:endParaRPr lang="en-US" altLang="zh-CN" sz="1400" b="1" dirty="0"/>
+          </a:p>
+          <a:p>
+            <a:r>
+              <a:rPr lang="en-US" altLang="zh-CN" sz="1400" b="1" dirty="0"/>
+              <a:t>Component</a:t>
+            </a:r>
+            <a:r>
+              <a:rPr lang="zh-CN" altLang="en-US" sz="1400" b="1" dirty="0"/>
+              <a:t> </a:t>
+            </a:r>
+            <a:r>
+              <a:rPr lang="en-US" altLang="zh-CN" sz="1400" b="1" dirty="0"/>
+              <a:t>Selection:</a:t>
+            </a:r>
+          </a:p>
+          <a:p>
+            <a:pPr lvl="1"/>
+            <a:r>
+              <a:rPr lang="en-US" altLang="zh-CN" sz="1400" dirty="0"/>
+              <a:t>A</a:t>
+            </a:r>
+            <a:r>
+              <a:rPr lang="zh-CN" altLang="en-US" sz="1400" dirty="0"/>
+              <a:t> </a:t>
+            </a:r>
+            <a:r>
+              <a:rPr lang="en-US" altLang="zh-CN" sz="1400" dirty="0"/>
+              <a:t>lightweight</a:t>
+            </a:r>
+            <a:r>
+              <a:rPr lang="zh-CN" altLang="en-US" sz="1400" dirty="0"/>
+              <a:t> </a:t>
+            </a:r>
+            <a:r>
+              <a:rPr lang="en-US" altLang="zh-CN" sz="1400" dirty="0"/>
+              <a:t>model</a:t>
+            </a:r>
+            <a:r>
+              <a:rPr lang="zh-CN" altLang="en-US" sz="1400" dirty="0"/>
+              <a:t> </a:t>
+            </a:r>
+            <a:r>
+              <a:rPr lang="en-US" altLang="zh-CN" sz="1400" dirty="0"/>
+              <a:t>based</a:t>
+            </a:r>
+            <a:r>
+              <a:rPr lang="zh-CN" altLang="en-US" sz="1400" dirty="0"/>
+              <a:t> </a:t>
+            </a:r>
+            <a:r>
+              <a:rPr lang="en-US" altLang="zh-CN" sz="1400" dirty="0"/>
+              <a:t>on</a:t>
+            </a:r>
+            <a:r>
+              <a:rPr lang="zh-CN" altLang="en-US" sz="1400" dirty="0"/>
+              <a:t> </a:t>
+            </a:r>
+            <a:r>
+              <a:rPr lang="en-US" altLang="zh-CN" sz="1400" dirty="0"/>
+              <a:t>the</a:t>
+            </a:r>
+            <a:r>
+              <a:rPr lang="zh-CN" altLang="en-US" sz="1400" dirty="0"/>
+              <a:t> </a:t>
+            </a:r>
+            <a:r>
+              <a:rPr lang="en-US" altLang="zh-CN" sz="1400" dirty="0"/>
+              <a:t>CLIP</a:t>
+            </a:r>
+            <a:r>
+              <a:rPr lang="zh-CN" altLang="en-US" sz="1400" dirty="0"/>
+              <a:t> </a:t>
+            </a:r>
+            <a:r>
+              <a:rPr lang="en-US" altLang="zh-CN" sz="1400" dirty="0"/>
+              <a:t>codebase.</a:t>
+            </a:r>
+            <a:r>
+              <a:rPr lang="zh-CN" altLang="en-US" sz="1400" dirty="0"/>
+              <a:t> </a:t>
+            </a:r>
+            <a:r>
+              <a:rPr lang="en-US" altLang="zh-CN" sz="1400" dirty="0"/>
+              <a:t>(Pre-trained</a:t>
+            </a:r>
+            <a:r>
+              <a:rPr lang="zh-CN" altLang="en-US" sz="1400" dirty="0"/>
+              <a:t> </a:t>
+            </a:r>
+            <a:r>
+              <a:rPr lang="en-US" altLang="zh-CN" sz="1400" dirty="0"/>
+              <a:t>model</a:t>
+            </a:r>
+            <a:r>
+              <a:rPr lang="zh-CN" altLang="en-US" sz="1400" dirty="0"/>
+              <a:t> </a:t>
+            </a:r>
+            <a:r>
+              <a:rPr lang="en-US" altLang="zh-CN" sz="1400" dirty="0"/>
+              <a:t>and</a:t>
+            </a:r>
+            <a:r>
+              <a:rPr lang="zh-CN" altLang="en-US" sz="1400" dirty="0"/>
+              <a:t> </a:t>
+            </a:r>
+            <a:r>
+              <a:rPr lang="en-US" altLang="zh-CN" sz="1400" dirty="0"/>
+              <a:t>fine-tuned)</a:t>
+            </a:r>
+            <a:r>
+              <a:rPr lang="zh-CN" altLang="en-US" sz="1400" dirty="0"/>
+              <a:t> </a:t>
+            </a:r>
+            <a:endParaRPr lang="en-US" altLang="zh-CN" sz="1400" dirty="0"/>
+          </a:p>
+          <a:p>
+            <a:pPr lvl="1"/>
+            <a:r>
+              <a:rPr lang="en-US" altLang="zh-CN" sz="1400" dirty="0"/>
+              <a:t>Encryption</a:t>
+            </a:r>
+            <a:r>
+              <a:rPr lang="zh-CN" altLang="en-US" sz="1400" dirty="0"/>
+              <a:t> </a:t>
+            </a:r>
+            <a:r>
+              <a:rPr lang="en-US" altLang="zh-CN" sz="1400" dirty="0"/>
+              <a:t>Algorithm</a:t>
+            </a:r>
+            <a:r>
+              <a:rPr lang="zh-CN" altLang="en-US" sz="1400" dirty="0"/>
+              <a:t> </a:t>
+            </a:r>
+            <a:r>
+              <a:rPr lang="en-US" altLang="zh-CN" sz="1400" dirty="0"/>
+              <a:t>:</a:t>
+            </a:r>
+            <a:r>
+              <a:rPr lang="zh-CN" altLang="en-US" sz="1400" dirty="0"/>
+              <a:t> </a:t>
+            </a:r>
+            <a:r>
+              <a:rPr lang="en-US" altLang="zh-CN" sz="1400" dirty="0"/>
+              <a:t>AES-CBC</a:t>
+            </a:r>
+            <a:r>
+              <a:rPr lang="zh-CN" altLang="en-US" sz="1400" dirty="0"/>
+              <a:t> </a:t>
+            </a:r>
+            <a:r>
+              <a:rPr lang="en-US" altLang="zh-CN" sz="1400" dirty="0"/>
+              <a:t>128</a:t>
+            </a:r>
+            <a:r>
+              <a:rPr lang="zh-CN" altLang="en-US" sz="1400" dirty="0"/>
+              <a:t> </a:t>
+            </a:r>
+            <a:r>
+              <a:rPr lang="en-US" altLang="zh-CN" sz="1400" dirty="0"/>
+              <a:t>bits,</a:t>
+            </a:r>
+            <a:r>
+              <a:rPr lang="zh-CN" altLang="en-US" sz="1400" dirty="0"/>
+              <a:t>                                      </a:t>
+            </a:r>
+            <a:endParaRPr lang="en-GB" altLang="zh-CN" sz="1400" dirty="0"/>
+          </a:p>
+          <a:p>
+            <a:pPr lvl="1"/>
+            <a:r>
+              <a:rPr lang="en-GB" sz="1400" b="1" dirty="0"/>
+              <a:t>Fine-tuning method: </a:t>
+            </a:r>
+            <a:r>
+              <a:rPr lang="en-GB" sz="1400" dirty="0"/>
+              <a:t>Federated Learning</a:t>
+            </a:r>
+            <a:r>
+              <a:rPr lang="zh-CN" altLang="en-US" sz="1400" dirty="0"/>
+              <a:t> </a:t>
+            </a:r>
+            <a:r>
+              <a:rPr lang="en-US" altLang="zh-CN" sz="1400" dirty="0"/>
+              <a:t>(Upload</a:t>
+            </a:r>
+            <a:r>
+              <a:rPr lang="zh-CN" altLang="en-US" sz="1400" dirty="0"/>
+              <a:t> </a:t>
+            </a:r>
+            <a:r>
+              <a:rPr lang="en-US" altLang="zh-CN" sz="1400" dirty="0"/>
+              <a:t>weights</a:t>
+            </a:r>
+            <a:r>
+              <a:rPr lang="zh-CN" altLang="en-US" sz="1400" dirty="0"/>
+              <a:t> </a:t>
+            </a:r>
+            <a:r>
+              <a:rPr lang="en-US" altLang="zh-CN" sz="1400" dirty="0"/>
+              <a:t>with</a:t>
+            </a:r>
+            <a:r>
+              <a:rPr lang="zh-CN" altLang="en-US" sz="1400" dirty="0"/>
+              <a:t> </a:t>
+            </a:r>
+            <a:r>
+              <a:rPr lang="en-US" altLang="zh-CN" sz="1400" dirty="0"/>
+              <a:t>AES</a:t>
+            </a:r>
+            <a:r>
+              <a:rPr lang="zh-CN" altLang="en-US" sz="1400" dirty="0"/>
+              <a:t> </a:t>
+            </a:r>
+            <a:r>
+              <a:rPr lang="en-US" altLang="zh-CN" sz="1400" dirty="0"/>
+              <a:t>Encryption)</a:t>
+            </a:r>
+            <a:endParaRPr lang="en-GB" altLang="zh-CN" sz="1400" dirty="0"/>
+          </a:p>
+          <a:p>
+            <a:pPr>
+              <a:lnSpc>
+                <a:spcPct val="100000"/>
+              </a:lnSpc>
+            </a:pPr>
+            <a:r>
+              <a:rPr lang="en-US" altLang="zh-CN" sz="1400" b="1" dirty="0"/>
+              <a:t>Evaluation:</a:t>
+            </a:r>
+          </a:p>
+          <a:p>
+            <a:pPr lvl="1">
+              <a:lnSpc>
+                <a:spcPct val="100000"/>
+              </a:lnSpc>
+            </a:pPr>
+            <a:r>
+              <a:rPr lang="en-GB" sz="1400" dirty="0"/>
+              <a:t>Simulated cloud-based LLM environment </a:t>
+            </a:r>
+          </a:p>
+          <a:p>
+            <a:pPr lvl="1">
+              <a:lnSpc>
+                <a:spcPct val="100000"/>
+              </a:lnSpc>
+            </a:pPr>
+            <a:r>
+              <a:rPr lang="en-US" altLang="zh-CN" sz="1400" dirty="0"/>
+              <a:t>F1-score</a:t>
+            </a:r>
+          </a:p>
+          <a:p>
+            <a:pPr>
+              <a:lnSpc>
+                <a:spcPct val="100000"/>
+              </a:lnSpc>
+            </a:pPr>
+            <a:r>
+              <a:rPr lang="en-US" altLang="zh-CN" sz="1400" b="1" dirty="0"/>
+              <a:t>Data</a:t>
+            </a:r>
+            <a:r>
+              <a:rPr lang="zh-CN" altLang="en-US" sz="1400" b="1" dirty="0"/>
+              <a:t> </a:t>
+            </a:r>
+            <a:r>
+              <a:rPr lang="en-US" altLang="zh-CN" sz="1400" b="1" dirty="0"/>
+              <a:t>Set:</a:t>
+            </a:r>
+          </a:p>
+          <a:p>
+            <a:pPr lvl="1">
+              <a:lnSpc>
+                <a:spcPct val="100000"/>
+              </a:lnSpc>
+            </a:pPr>
+            <a:r>
+              <a:rPr lang="en-GB" altLang="zh-CN" sz="1400" dirty="0"/>
+              <a:t>ImageNet</a:t>
+            </a:r>
+            <a:endParaRPr lang="en-US" altLang="zh-CN" sz="1400" dirty="0"/>
+          </a:p>
+          <a:p>
+            <a:pPr>
+              <a:lnSpc>
+                <a:spcPct val="100000"/>
+              </a:lnSpc>
+            </a:pPr>
+            <a:endParaRPr lang="en-US" sz="1400" dirty="0"/>
+          </a:p>
+        </p:txBody>
+      </p:sp>
+      <p:sp>
+        <p:nvSpPr>
+          <p:cNvPr id="4" name="Footer Placeholder 3">
+            <a:extLst>
+              <a:ext uri="{FF2B5EF4-FFF2-40B4-BE49-F238E27FC236}">
+                <a16:creationId xmlns:a16="http://schemas.microsoft.com/office/drawing/2014/main" id="{5EA341F8-C67F-B0B7-7EF7-16F1814F28D8}"/>
+              </a:ext>
+            </a:extLst>
+          </p:cNvPr>
+          <p:cNvSpPr>
+            <a:spLocks noGrp="1"/>
+          </p:cNvSpPr>
+          <p:nvPr>
+            <p:ph type="ftr" sz="quarter" idx="11"/>
+          </p:nvPr>
+        </p:nvSpPr>
+        <p:spPr/>
+        <p:txBody>
+          <a:bodyPr/>
+          <a:lstStyle/>
+          <a:p>
+            <a:r>
+              <a:rPr lang="en-US"/>
+              <a:t>https://www.nature.com/articles/s41598-026-40734-w</a:t>
+            </a:r>
+          </a:p>
+        </p:txBody>
+      </p:sp>
+    </p:spTree>
+    <p:extLst>
+      <p:ext uri="{BB962C8B-B14F-4D97-AF65-F5344CB8AC3E}">
+        <p14:creationId xmlns:p14="http://schemas.microsoft.com/office/powerpoint/2010/main" val="4138975813"/>
+      </p:ext>
+    </p:extLst>
+  </p:cSld>
+  <p:clrMapOvr>
+    <a:masterClrMapping/>
+  </p:clrMapOvr>
+</p:sld>
+</file>
+
+<file path=ppt/slides/slide15.xml><?xml version="1.0" encoding="utf-8"?>
+<p:sld xmlns:a="http://schemas.openxmlformats.org/drawingml/2006/main" xmlns:r="http://schemas.openxmlformats.org/officeDocument/2006/relationships" xmlns:p="http://schemas.openxmlformats.org/presentationml/2006/main">
+  <p:cSld>
+    <p:spTree>
+      <p:nvGrpSpPr>
+        <p:cNvPr id="1" name=""/>
+        <p:cNvGrpSpPr/>
+        <p:nvPr/>
+      </p:nvGrpSpPr>
+      <p:grpSpPr>
+        <a:xfrm>
+          <a:off x="0" y="0"/>
+          <a:ext cx="0" cy="0"/>
+          <a:chOff x="0" y="0"/>
+          <a:chExt cx="0" cy="0"/>
+        </a:xfrm>
+      </p:grpSpPr>
+      <p:sp>
+        <p:nvSpPr>
+          <p:cNvPr id="2" name="Title 1">
+            <a:extLst>
+              <a:ext uri="{FF2B5EF4-FFF2-40B4-BE49-F238E27FC236}">
                 <a16:creationId xmlns:a16="http://schemas.microsoft.com/office/drawing/2014/main" id="{B72AF47D-19A6-CBF7-155E-C22C0B9CEB17}"/>
               </a:ext>
             </a:extLst>
@@ -6933,7 +7209,7 @@
 </p:sld>
 </file>
 
-<file path=ppt/slides/slide15.xml><?xml version="1.0" encoding="utf-8"?>
+<file path=ppt/slides/slide16.xml><?xml version="1.0" encoding="utf-8"?>
 <p:sld xmlns:a="http://schemas.openxmlformats.org/drawingml/2006/main" xmlns:r="http://schemas.openxmlformats.org/officeDocument/2006/relationships" xmlns:p="http://schemas.openxmlformats.org/presentationml/2006/main">
   <p:cSld>
     <p:spTree>
@@ -7168,7 +7444,7 @@
 </p:sld>
 </file>
 
-<file path=ppt/slides/slide16.xml><?xml version="1.0" encoding="utf-8"?>
+<file path=ppt/slides/slide17.xml><?xml version="1.0" encoding="utf-8"?>
 <p:sld xmlns:a="http://schemas.openxmlformats.org/drawingml/2006/main" xmlns:r="http://schemas.openxmlformats.org/officeDocument/2006/relationships" xmlns:p="http://schemas.openxmlformats.org/presentationml/2006/main">
   <p:cSld>
     <p:spTree>
@@ -7383,7 +7659,7 @@
 </p:sld>
 </file>
 
-<file path=ppt/slides/slide17.xml><?xml version="1.0" encoding="utf-8"?>
+<file path=ppt/slides/slide18.xml><?xml version="1.0" encoding="utf-8"?>
 <p:sld xmlns:a="http://schemas.openxmlformats.org/drawingml/2006/main" xmlns:r="http://schemas.openxmlformats.org/officeDocument/2006/relationships" xmlns:p="http://schemas.openxmlformats.org/presentationml/2006/main">
   <p:cSld>
     <p:spTree>
@@ -10740,7 +11016,13 @@
   <p:cSld>
     <p:spTree>
       <p:nvGrpSpPr>
-        <p:cNvPr id="1" name=""/>
+        <p:cNvPr id="1" name="">
+          <a:extLst>
+            <a:ext uri="{FF2B5EF4-FFF2-40B4-BE49-F238E27FC236}">
+              <a16:creationId xmlns:a16="http://schemas.microsoft.com/office/drawing/2014/main" id="{81199970-B548-4FC9-4864-87AF3013B714}"/>
+            </a:ext>
+          </a:extLst>
+        </p:cNvPr>
         <p:cNvGrpSpPr/>
         <p:nvPr/>
       </p:nvGrpSpPr>
@@ -10754,219 +11036,1664 @@
       </p:grpSpPr>
       <p:sp>
         <p:nvSpPr>
-          <p:cNvPr id="2" name="Title 1">
-            <a:extLst>
-              <a:ext uri="{FF2B5EF4-FFF2-40B4-BE49-F238E27FC236}">
-                <a16:creationId xmlns:a16="http://schemas.microsoft.com/office/drawing/2014/main" id="{C4C9DB24-529F-E8F9-536A-6C8005194892}"/>
-              </a:ext>
-            </a:extLst>
-          </p:cNvPr>
-          <p:cNvSpPr>
-            <a:spLocks noGrp="1"/>
-          </p:cNvSpPr>
-          <p:nvPr>
-            <p:ph type="title"/>
-          </p:nvPr>
-        </p:nvSpPr>
-        <p:spPr/>
-        <p:txBody>
-          <a:bodyPr/>
+          <p:cNvPr id="29" name="Rounded Rectangle 28">
+            <a:extLst>
+              <a:ext uri="{FF2B5EF4-FFF2-40B4-BE49-F238E27FC236}">
+                <a16:creationId xmlns:a16="http://schemas.microsoft.com/office/drawing/2014/main" id="{494FA997-2D10-E415-416A-76FAE0307F92}"/>
+              </a:ext>
+            </a:extLst>
+          </p:cNvPr>
+          <p:cNvSpPr/>
+          <p:nvPr/>
+        </p:nvSpPr>
+        <p:spPr>
+          <a:xfrm>
+            <a:off x="8379050" y="1002963"/>
+            <a:ext cx="3057690" cy="5518417"/>
+          </a:xfrm>
+          <a:prstGeom prst="roundRect">
+            <a:avLst>
+              <a:gd name="adj" fmla="val 1566"/>
+            </a:avLst>
+          </a:prstGeom>
+          <a:solidFill>
+            <a:schemeClr val="accent6">
+              <a:lumMod val="40000"/>
+              <a:lumOff val="60000"/>
+            </a:schemeClr>
+          </a:solidFill>
+          <a:ln>
+            <a:prstDash val="dash"/>
+          </a:ln>
+        </p:spPr>
+        <p:style>
+          <a:lnRef idx="2">
+            <a:schemeClr val="accent1">
+              <a:shade val="15000"/>
+            </a:schemeClr>
+          </a:lnRef>
+          <a:fillRef idx="1">
+            <a:schemeClr val="accent1"/>
+          </a:fillRef>
+          <a:effectRef idx="0">
+            <a:schemeClr val="accent1"/>
+          </a:effectRef>
+          <a:fontRef idx="minor">
+            <a:schemeClr val="lt1"/>
+          </a:fontRef>
+        </p:style>
+        <p:txBody>
+          <a:bodyPr rtlCol="0" anchor="t"/>
           <a:lstStyle/>
           <a:p>
-            <a:r>
-              <a:rPr lang="en-US" altLang="zh-CN" dirty="0"/>
-              <a:t>Initial</a:t>
-            </a:r>
-            <a:r>
-              <a:rPr lang="zh-CN" altLang="en-US" dirty="0"/>
-              <a:t> </a:t>
-            </a:r>
-            <a:r>
-              <a:rPr lang="en-US" altLang="zh-CN" dirty="0"/>
-              <a:t>Ideas</a:t>
-            </a:r>
-            <a:endParaRPr lang="en-US" dirty="0"/>
-          </a:p>
-        </p:txBody>
-      </p:sp>
-      <p:sp>
-        <p:nvSpPr>
-          <p:cNvPr id="3" name="Content Placeholder 2">
-            <a:extLst>
-              <a:ext uri="{FF2B5EF4-FFF2-40B4-BE49-F238E27FC236}">
-                <a16:creationId xmlns:a16="http://schemas.microsoft.com/office/drawing/2014/main" id="{21F482A8-7823-7754-9344-36EA99AB2D06}"/>
-              </a:ext>
-            </a:extLst>
-          </p:cNvPr>
-          <p:cNvSpPr>
-            <a:spLocks noGrp="1"/>
-          </p:cNvSpPr>
-          <p:nvPr>
-            <p:ph idx="1"/>
-          </p:nvPr>
-        </p:nvSpPr>
-        <p:spPr/>
-        <p:txBody>
-          <a:bodyPr>
-            <a:normAutofit/>
+            <a:pPr algn="ctr"/>
+            <a:r>
+              <a:rPr lang="en-US" sz="1400">
+                <a:solidFill>
+                  <a:schemeClr val="tx1"/>
+                </a:solidFill>
+              </a:rPr>
+              <a:t>Trusted Execution Environment</a:t>
+            </a:r>
+          </a:p>
+        </p:txBody>
+      </p:sp>
+      <p:sp>
+        <p:nvSpPr>
+          <p:cNvPr id="9" name="Rounded Rectangle 8">
+            <a:extLst>
+              <a:ext uri="{FF2B5EF4-FFF2-40B4-BE49-F238E27FC236}">
+                <a16:creationId xmlns:a16="http://schemas.microsoft.com/office/drawing/2014/main" id="{B7A8941D-0DE7-F132-B4FD-7B0F7263AF29}"/>
+              </a:ext>
+            </a:extLst>
+          </p:cNvPr>
+          <p:cNvSpPr/>
+          <p:nvPr/>
+        </p:nvSpPr>
+        <p:spPr>
+          <a:xfrm>
+            <a:off x="8120743" y="452176"/>
+            <a:ext cx="3565489" cy="6182800"/>
+          </a:xfrm>
+          <a:prstGeom prst="roundRect">
+            <a:avLst>
+              <a:gd name="adj" fmla="val 1566"/>
+            </a:avLst>
+          </a:prstGeom>
+          <a:noFill/>
+          <a:ln>
+            <a:prstDash val="dash"/>
+          </a:ln>
+        </p:spPr>
+        <p:style>
+          <a:lnRef idx="2">
+            <a:schemeClr val="accent1">
+              <a:shade val="15000"/>
+            </a:schemeClr>
+          </a:lnRef>
+          <a:fillRef idx="1">
+            <a:schemeClr val="accent1"/>
+          </a:fillRef>
+          <a:effectRef idx="0">
+            <a:schemeClr val="accent1"/>
+          </a:effectRef>
+          <a:fontRef idx="minor">
+            <a:schemeClr val="lt1"/>
+          </a:fontRef>
+        </p:style>
+        <p:txBody>
+          <a:bodyPr rtlCol="0" anchor="t"/>
+          <a:lstStyle/>
+          <a:p>
+            <a:pPr algn="ctr"/>
+            <a:r>
+              <a:rPr lang="en-US">
+                <a:solidFill>
+                  <a:schemeClr val="tx1"/>
+                </a:solidFill>
+              </a:rPr>
+              <a:t>Cloud Server</a:t>
+            </a:r>
+          </a:p>
+        </p:txBody>
+      </p:sp>
+      <p:sp>
+        <p:nvSpPr>
+          <p:cNvPr id="8" name="Rounded Rectangle 7">
+            <a:extLst>
+              <a:ext uri="{FF2B5EF4-FFF2-40B4-BE49-F238E27FC236}">
+                <a16:creationId xmlns:a16="http://schemas.microsoft.com/office/drawing/2014/main" id="{7AC27DC5-5F28-899C-44FA-33772F71BDF9}"/>
+              </a:ext>
+            </a:extLst>
+          </p:cNvPr>
+          <p:cNvSpPr/>
+          <p:nvPr/>
+        </p:nvSpPr>
+        <p:spPr>
+          <a:xfrm>
+            <a:off x="1426029" y="452176"/>
+            <a:ext cx="3341914" cy="6182800"/>
+          </a:xfrm>
+          <a:prstGeom prst="roundRect">
+            <a:avLst>
+              <a:gd name="adj" fmla="val 1566"/>
+            </a:avLst>
+          </a:prstGeom>
+          <a:noFill/>
+          <a:ln>
+            <a:prstDash val="dash"/>
+          </a:ln>
+        </p:spPr>
+        <p:style>
+          <a:lnRef idx="2">
+            <a:schemeClr val="accent1">
+              <a:shade val="15000"/>
+            </a:schemeClr>
+          </a:lnRef>
+          <a:fillRef idx="1">
+            <a:schemeClr val="accent1"/>
+          </a:fillRef>
+          <a:effectRef idx="0">
+            <a:schemeClr val="accent1"/>
+          </a:effectRef>
+          <a:fontRef idx="minor">
+            <a:schemeClr val="lt1"/>
+          </a:fontRef>
+        </p:style>
+        <p:txBody>
+          <a:bodyPr rtlCol="0" anchor="t"/>
+          <a:lstStyle/>
+          <a:p>
+            <a:pPr algn="ctr"/>
+            <a:r>
+              <a:rPr lang="en-US">
+                <a:solidFill>
+                  <a:schemeClr val="tx1"/>
+                </a:solidFill>
+              </a:rPr>
+              <a:t>Edge Device</a:t>
+            </a:r>
+          </a:p>
+        </p:txBody>
+      </p:sp>
+      <p:sp>
+        <p:nvSpPr>
+          <p:cNvPr id="10" name="Can 9">
+            <a:extLst>
+              <a:ext uri="{FF2B5EF4-FFF2-40B4-BE49-F238E27FC236}">
+                <a16:creationId xmlns:a16="http://schemas.microsoft.com/office/drawing/2014/main" id="{C4DDAB4C-1AE7-1922-F4BC-A65CC78224B1}"/>
+              </a:ext>
+            </a:extLst>
+          </p:cNvPr>
+          <p:cNvSpPr/>
+          <p:nvPr/>
+        </p:nvSpPr>
+        <p:spPr>
+          <a:xfrm>
+            <a:off x="2674101" y="1002963"/>
+            <a:ext cx="947057" cy="706479"/>
+          </a:xfrm>
+          <a:prstGeom prst="can">
+            <a:avLst/>
+          </a:prstGeom>
+          <a:solidFill>
+            <a:schemeClr val="tx2">
+              <a:lumMod val="25000"/>
+              <a:lumOff val="75000"/>
+            </a:schemeClr>
+          </a:solidFill>
+        </p:spPr>
+        <p:style>
+          <a:lnRef idx="2">
+            <a:schemeClr val="accent1">
+              <a:shade val="15000"/>
+            </a:schemeClr>
+          </a:lnRef>
+          <a:fillRef idx="1">
+            <a:schemeClr val="accent1"/>
+          </a:fillRef>
+          <a:effectRef idx="0">
+            <a:schemeClr val="accent1"/>
+          </a:effectRef>
+          <a:fontRef idx="minor">
+            <a:schemeClr val="lt1"/>
+          </a:fontRef>
+        </p:style>
+        <p:txBody>
+          <a:bodyPr rtlCol="0" anchor="ctr"/>
+          <a:lstStyle/>
+          <a:p>
+            <a:pPr algn="ctr"/>
+            <a:r>
+              <a:rPr lang="en-US" sz="1600"/>
+              <a:t>Input</a:t>
+            </a:r>
+            <a:r>
+              <a:rPr lang="zh-CN" altLang="en-US" sz="1600"/>
+              <a:t> </a:t>
+            </a:r>
+            <a:r>
+              <a:rPr lang="en-US" altLang="zh-CN" sz="1600"/>
+              <a:t>Image</a:t>
+            </a:r>
+            <a:endParaRPr lang="en-US" sz="1600"/>
+          </a:p>
+        </p:txBody>
+      </p:sp>
+      <p:sp>
+        <p:nvSpPr>
+          <p:cNvPr id="11" name="Rounded Rectangle 10">
+            <a:extLst>
+              <a:ext uri="{FF2B5EF4-FFF2-40B4-BE49-F238E27FC236}">
+                <a16:creationId xmlns:a16="http://schemas.microsoft.com/office/drawing/2014/main" id="{C164E22E-05CA-BBCC-AFE8-D3CE758510BC}"/>
+              </a:ext>
+            </a:extLst>
+          </p:cNvPr>
+          <p:cNvSpPr/>
+          <p:nvPr/>
+        </p:nvSpPr>
+        <p:spPr>
+          <a:xfrm>
+            <a:off x="2118929" y="2136482"/>
+            <a:ext cx="2057400" cy="424543"/>
+          </a:xfrm>
+          <a:prstGeom prst="roundRect">
+            <a:avLst/>
+          </a:prstGeom>
+          <a:solidFill>
+            <a:schemeClr val="tx2">
+              <a:lumMod val="50000"/>
+              <a:lumOff val="50000"/>
+            </a:schemeClr>
+          </a:solidFill>
+        </p:spPr>
+        <p:style>
+          <a:lnRef idx="2">
+            <a:schemeClr val="accent1">
+              <a:shade val="15000"/>
+            </a:schemeClr>
+          </a:lnRef>
+          <a:fillRef idx="1">
+            <a:schemeClr val="accent1"/>
+          </a:fillRef>
+          <a:effectRef idx="0">
+            <a:schemeClr val="accent1"/>
+          </a:effectRef>
+          <a:fontRef idx="minor">
+            <a:schemeClr val="lt1"/>
+          </a:fontRef>
+        </p:style>
+        <p:txBody>
+          <a:bodyPr rtlCol="0" anchor="ctr"/>
+          <a:lstStyle/>
+          <a:p>
+            <a:pPr algn="ctr"/>
+            <a:r>
+              <a:rPr lang="en-US"/>
+              <a:t>Visual</a:t>
+            </a:r>
+            <a:r>
+              <a:rPr lang="zh-CN" altLang="en-US"/>
+              <a:t> </a:t>
+            </a:r>
+            <a:r>
+              <a:rPr lang="en-US" altLang="zh-CN"/>
+              <a:t>Encoder</a:t>
+            </a:r>
+            <a:r>
+              <a:rPr lang="zh-CN" altLang="en-US"/>
+              <a:t> </a:t>
+            </a:r>
+            <a:endParaRPr lang="en-US"/>
+          </a:p>
+        </p:txBody>
+      </p:sp>
+      <p:sp>
+        <p:nvSpPr>
+          <p:cNvPr id="12" name="Rounded Rectangle 11">
+            <a:extLst>
+              <a:ext uri="{FF2B5EF4-FFF2-40B4-BE49-F238E27FC236}">
+                <a16:creationId xmlns:a16="http://schemas.microsoft.com/office/drawing/2014/main" id="{2D66A471-B91A-D358-C21D-74AB14268A12}"/>
+              </a:ext>
+            </a:extLst>
+          </p:cNvPr>
+          <p:cNvSpPr/>
+          <p:nvPr/>
+        </p:nvSpPr>
+        <p:spPr>
+          <a:xfrm>
+            <a:off x="2118712" y="3020148"/>
+            <a:ext cx="2057400" cy="424543"/>
+          </a:xfrm>
+          <a:prstGeom prst="roundRect">
+            <a:avLst/>
+          </a:prstGeom>
+          <a:solidFill>
+            <a:schemeClr val="tx2">
+              <a:lumMod val="50000"/>
+              <a:lumOff val="50000"/>
+            </a:schemeClr>
+          </a:solidFill>
+        </p:spPr>
+        <p:style>
+          <a:lnRef idx="2">
+            <a:schemeClr val="accent1">
+              <a:shade val="15000"/>
+            </a:schemeClr>
+          </a:lnRef>
+          <a:fillRef idx="1">
+            <a:schemeClr val="accent1"/>
+          </a:fillRef>
+          <a:effectRef idx="0">
+            <a:schemeClr val="accent1"/>
+          </a:effectRef>
+          <a:fontRef idx="minor">
+            <a:schemeClr val="lt1"/>
+          </a:fontRef>
+        </p:style>
+        <p:txBody>
+          <a:bodyPr rtlCol="0" anchor="ctr"/>
+          <a:lstStyle/>
+          <a:p>
+            <a:pPr algn="ctr"/>
+            <a:r>
+              <a:rPr lang="en-GB"/>
+              <a:t>Projection</a:t>
+            </a:r>
+            <a:r>
+              <a:rPr lang="zh-CN" altLang="en-US"/>
+              <a:t> </a:t>
+            </a:r>
+            <a:r>
+              <a:rPr lang="en-US" altLang="zh-CN"/>
+              <a:t>Model</a:t>
+            </a:r>
+            <a:endParaRPr lang="en-US"/>
+          </a:p>
+        </p:txBody>
+      </p:sp>
+      <p:cxnSp>
+        <p:nvCxnSpPr>
+          <p:cNvPr id="14" name="Straight Arrow Connector 13">
+            <a:extLst>
+              <a:ext uri="{FF2B5EF4-FFF2-40B4-BE49-F238E27FC236}">
+                <a16:creationId xmlns:a16="http://schemas.microsoft.com/office/drawing/2014/main" id="{9DDE814D-729A-80CC-789C-CDCD3D8519AF}"/>
+              </a:ext>
+            </a:extLst>
+          </p:cNvPr>
+          <p:cNvCxnSpPr>
+            <a:cxnSpLocks/>
+            <a:stCxn id="10" idx="3"/>
+            <a:endCxn id="11" idx="0"/>
+          </p:cNvCxnSpPr>
+          <p:nvPr/>
+        </p:nvCxnSpPr>
+        <p:spPr>
+          <a:xfrm flipH="1">
+            <a:off x="3147629" y="1709442"/>
+            <a:ext cx="1" cy="427040"/>
+          </a:xfrm>
+          <a:prstGeom prst="straightConnector1">
+            <a:avLst/>
+          </a:prstGeom>
+          <a:ln>
+            <a:tailEnd type="triangle"/>
+          </a:ln>
+        </p:spPr>
+        <p:style>
+          <a:lnRef idx="2">
+            <a:schemeClr val="accent1"/>
+          </a:lnRef>
+          <a:fillRef idx="0">
+            <a:schemeClr val="accent1"/>
+          </a:fillRef>
+          <a:effectRef idx="1">
+            <a:schemeClr val="accent1"/>
+          </a:effectRef>
+          <a:fontRef idx="minor">
+            <a:schemeClr val="tx1"/>
+          </a:fontRef>
+        </p:style>
+      </p:cxnSp>
+      <p:cxnSp>
+        <p:nvCxnSpPr>
+          <p:cNvPr id="17" name="Straight Arrow Connector 16">
+            <a:extLst>
+              <a:ext uri="{FF2B5EF4-FFF2-40B4-BE49-F238E27FC236}">
+                <a16:creationId xmlns:a16="http://schemas.microsoft.com/office/drawing/2014/main" id="{D7DDBCB5-7D6E-7A8C-4429-CEC9907BD60D}"/>
+              </a:ext>
+            </a:extLst>
+          </p:cNvPr>
+          <p:cNvCxnSpPr>
+            <a:stCxn id="11" idx="2"/>
+            <a:endCxn id="12" idx="0"/>
+          </p:cNvCxnSpPr>
+          <p:nvPr/>
+        </p:nvCxnSpPr>
+        <p:spPr>
+          <a:xfrm flipH="1">
+            <a:off x="3147412" y="2561025"/>
+            <a:ext cx="217" cy="459123"/>
+          </a:xfrm>
+          <a:prstGeom prst="straightConnector1">
+            <a:avLst/>
+          </a:prstGeom>
+          <a:ln>
+            <a:tailEnd type="triangle"/>
+          </a:ln>
+        </p:spPr>
+        <p:style>
+          <a:lnRef idx="2">
+            <a:schemeClr val="accent1"/>
+          </a:lnRef>
+          <a:fillRef idx="0">
+            <a:schemeClr val="accent1"/>
+          </a:fillRef>
+          <a:effectRef idx="1">
+            <a:schemeClr val="accent1"/>
+          </a:effectRef>
+          <a:fontRef idx="minor">
+            <a:schemeClr val="tx1"/>
+          </a:fontRef>
+        </p:style>
+      </p:cxnSp>
+      <p:sp>
+        <p:nvSpPr>
+          <p:cNvPr id="18" name="Rounded Rectangle 17">
+            <a:extLst>
+              <a:ext uri="{FF2B5EF4-FFF2-40B4-BE49-F238E27FC236}">
+                <a16:creationId xmlns:a16="http://schemas.microsoft.com/office/drawing/2014/main" id="{88F9D4CC-1D62-1860-9604-2F25D8CAD055}"/>
+              </a:ext>
+            </a:extLst>
+          </p:cNvPr>
+          <p:cNvSpPr/>
+          <p:nvPr/>
+        </p:nvSpPr>
+        <p:spPr>
+          <a:xfrm>
+            <a:off x="1961706" y="4156234"/>
+            <a:ext cx="2371412" cy="548863"/>
+          </a:xfrm>
+          <a:prstGeom prst="roundRect">
+            <a:avLst/>
+          </a:prstGeom>
+          <a:solidFill>
+            <a:schemeClr val="accent2">
+              <a:lumMod val="60000"/>
+              <a:lumOff val="40000"/>
+            </a:schemeClr>
+          </a:solidFill>
+        </p:spPr>
+        <p:style>
+          <a:lnRef idx="2">
+            <a:schemeClr val="accent1">
+              <a:shade val="15000"/>
+            </a:schemeClr>
+          </a:lnRef>
+          <a:fillRef idx="1">
+            <a:schemeClr val="accent1"/>
+          </a:fillRef>
+          <a:effectRef idx="0">
+            <a:schemeClr val="accent1"/>
+          </a:effectRef>
+          <a:fontRef idx="minor">
+            <a:schemeClr val="lt1"/>
+          </a:fontRef>
+        </p:style>
+        <p:txBody>
+          <a:bodyPr rtlCol="0" anchor="ctr"/>
+          <a:lstStyle/>
+          <a:p>
+            <a:pPr algn="ctr"/>
+            <a:r>
+              <a:rPr lang="en-GB" sz="1400"/>
+              <a:t>Intermediate Visual Embeddings</a:t>
+            </a:r>
+            <a:endParaRPr lang="en-US" sz="1400"/>
+          </a:p>
+        </p:txBody>
+      </p:sp>
+      <p:sp>
+        <p:nvSpPr>
+          <p:cNvPr id="34" name="Rounded Rectangle 33">
+            <a:extLst>
+              <a:ext uri="{FF2B5EF4-FFF2-40B4-BE49-F238E27FC236}">
+                <a16:creationId xmlns:a16="http://schemas.microsoft.com/office/drawing/2014/main" id="{86AB97C0-EB97-54D2-A50E-0D07B0057592}"/>
+              </a:ext>
+            </a:extLst>
+          </p:cNvPr>
+          <p:cNvSpPr/>
+          <p:nvPr/>
+        </p:nvSpPr>
+        <p:spPr>
+          <a:xfrm>
+            <a:off x="8770516" y="1635328"/>
+            <a:ext cx="2057400" cy="424543"/>
+          </a:xfrm>
+          <a:prstGeom prst="roundRect">
+            <a:avLst/>
+          </a:prstGeom>
+          <a:solidFill>
+            <a:schemeClr val="tx2">
+              <a:lumMod val="50000"/>
+              <a:lumOff val="50000"/>
+            </a:schemeClr>
+          </a:solidFill>
+        </p:spPr>
+        <p:style>
+          <a:lnRef idx="2">
+            <a:schemeClr val="accent1">
+              <a:shade val="15000"/>
+            </a:schemeClr>
+          </a:lnRef>
+          <a:fillRef idx="1">
+            <a:schemeClr val="accent1"/>
+          </a:fillRef>
+          <a:effectRef idx="0">
+            <a:schemeClr val="accent1"/>
+          </a:effectRef>
+          <a:fontRef idx="minor">
+            <a:schemeClr val="lt1"/>
+          </a:fontRef>
+        </p:style>
+        <p:txBody>
+          <a:bodyPr rtlCol="0" anchor="ctr"/>
+          <a:lstStyle/>
+          <a:p>
+            <a:pPr algn="ctr"/>
+            <a:r>
+              <a:rPr lang="en-US" sz="1400"/>
+              <a:t>Generate Output text</a:t>
+            </a:r>
+          </a:p>
+        </p:txBody>
+      </p:sp>
+      <p:sp>
+        <p:nvSpPr>
+          <p:cNvPr id="35" name="Rounded Rectangle 34">
+            <a:extLst>
+              <a:ext uri="{FF2B5EF4-FFF2-40B4-BE49-F238E27FC236}">
+                <a16:creationId xmlns:a16="http://schemas.microsoft.com/office/drawing/2014/main" id="{CC8BFBAC-0B5E-B210-8F18-00548CEF9F66}"/>
+              </a:ext>
+            </a:extLst>
+          </p:cNvPr>
+          <p:cNvSpPr/>
+          <p:nvPr/>
+        </p:nvSpPr>
+        <p:spPr>
+          <a:xfrm>
+            <a:off x="8770516" y="2359388"/>
+            <a:ext cx="2057400" cy="424543"/>
+          </a:xfrm>
+          <a:prstGeom prst="roundRect">
+            <a:avLst/>
+          </a:prstGeom>
+          <a:solidFill>
+            <a:schemeClr val="tx2">
+              <a:lumMod val="50000"/>
+              <a:lumOff val="50000"/>
+            </a:schemeClr>
+          </a:solidFill>
+        </p:spPr>
+        <p:style>
+          <a:lnRef idx="2">
+            <a:schemeClr val="accent1">
+              <a:shade val="15000"/>
+            </a:schemeClr>
+          </a:lnRef>
+          <a:fillRef idx="1">
+            <a:schemeClr val="accent1"/>
+          </a:fillRef>
+          <a:effectRef idx="0">
+            <a:schemeClr val="accent1"/>
+          </a:effectRef>
+          <a:fontRef idx="minor">
+            <a:schemeClr val="lt1"/>
+          </a:fontRef>
+        </p:style>
+        <p:txBody>
+          <a:bodyPr rtlCol="0" anchor="ctr"/>
+          <a:lstStyle/>
+          <a:p>
+            <a:pPr algn="ctr"/>
+            <a:r>
+              <a:rPr lang="en-US" sz="1400"/>
+              <a:t>LLM decoder</a:t>
+            </a:r>
+          </a:p>
+        </p:txBody>
+      </p:sp>
+      <p:sp>
+        <p:nvSpPr>
+          <p:cNvPr id="36" name="Rounded Rectangle 35">
+            <a:extLst>
+              <a:ext uri="{FF2B5EF4-FFF2-40B4-BE49-F238E27FC236}">
+                <a16:creationId xmlns:a16="http://schemas.microsoft.com/office/drawing/2014/main" id="{1BB18A80-BC94-3685-3609-92BA732DFA61}"/>
+              </a:ext>
+            </a:extLst>
+          </p:cNvPr>
+          <p:cNvSpPr/>
+          <p:nvPr/>
+        </p:nvSpPr>
+        <p:spPr>
+          <a:xfrm>
+            <a:off x="8558245" y="3098980"/>
+            <a:ext cx="2481942" cy="588117"/>
+          </a:xfrm>
+          <a:prstGeom prst="roundRect">
+            <a:avLst/>
+          </a:prstGeom>
+          <a:solidFill>
+            <a:schemeClr val="tx2">
+              <a:lumMod val="50000"/>
+              <a:lumOff val="50000"/>
+            </a:schemeClr>
+          </a:solidFill>
+        </p:spPr>
+        <p:style>
+          <a:lnRef idx="2">
+            <a:schemeClr val="accent1">
+              <a:shade val="15000"/>
+            </a:schemeClr>
+          </a:lnRef>
+          <a:fillRef idx="1">
+            <a:schemeClr val="accent1"/>
+          </a:fillRef>
+          <a:effectRef idx="0">
+            <a:schemeClr val="accent1"/>
+          </a:effectRef>
+          <a:fontRef idx="minor">
+            <a:schemeClr val="lt1"/>
+          </a:fontRef>
+        </p:style>
+        <p:txBody>
+          <a:bodyPr rtlCol="0" anchor="ctr"/>
+          <a:lstStyle/>
+          <a:p>
+            <a:pPr algn="ctr"/>
+            <a:r>
+              <a:rPr lang="en-US" sz="1200"/>
+              <a:t>Multimodal Input Construction</a:t>
+            </a:r>
+          </a:p>
+          <a:p>
+            <a:pPr algn="ctr"/>
+            <a:r>
+              <a:rPr lang="en-US" sz="1200"/>
+              <a:t>(Visual Embedding + Text Prompt)</a:t>
+            </a:r>
+          </a:p>
+        </p:txBody>
+      </p:sp>
+      <p:cxnSp>
+        <p:nvCxnSpPr>
+          <p:cNvPr id="38" name="Straight Arrow Connector 37">
+            <a:extLst>
+              <a:ext uri="{FF2B5EF4-FFF2-40B4-BE49-F238E27FC236}">
+                <a16:creationId xmlns:a16="http://schemas.microsoft.com/office/drawing/2014/main" id="{F2F27438-F9C2-5B9D-DCBC-AE29DACD9A4D}"/>
+              </a:ext>
+            </a:extLst>
+          </p:cNvPr>
+          <p:cNvCxnSpPr>
+            <a:cxnSpLocks/>
+            <a:stCxn id="12" idx="2"/>
+            <a:endCxn id="18" idx="0"/>
+          </p:cNvCxnSpPr>
+          <p:nvPr/>
+        </p:nvCxnSpPr>
+        <p:spPr>
+          <a:xfrm>
+            <a:off x="3147412" y="3444691"/>
+            <a:ext cx="0" cy="711543"/>
+          </a:xfrm>
+          <a:prstGeom prst="straightConnector1">
+            <a:avLst/>
+          </a:prstGeom>
+          <a:ln>
+            <a:tailEnd type="triangle"/>
+          </a:ln>
+        </p:spPr>
+        <p:style>
+          <a:lnRef idx="2">
+            <a:schemeClr val="accent1"/>
+          </a:lnRef>
+          <a:fillRef idx="0">
+            <a:schemeClr val="accent1"/>
+          </a:fillRef>
+          <a:effectRef idx="1">
+            <a:schemeClr val="accent1"/>
+          </a:effectRef>
+          <a:fontRef idx="minor">
+            <a:schemeClr val="tx1"/>
+          </a:fontRef>
+        </p:style>
+      </p:cxnSp>
+      <p:cxnSp>
+        <p:nvCxnSpPr>
+          <p:cNvPr id="43" name="Straight Arrow Connector 42">
+            <a:extLst>
+              <a:ext uri="{FF2B5EF4-FFF2-40B4-BE49-F238E27FC236}">
+                <a16:creationId xmlns:a16="http://schemas.microsoft.com/office/drawing/2014/main" id="{2C959B12-81D1-01EE-0C45-2AA93BA6963A}"/>
+              </a:ext>
+            </a:extLst>
+          </p:cNvPr>
+          <p:cNvCxnSpPr>
+            <a:cxnSpLocks/>
+            <a:stCxn id="36" idx="0"/>
+            <a:endCxn id="35" idx="2"/>
+          </p:cNvCxnSpPr>
+          <p:nvPr/>
+        </p:nvCxnSpPr>
+        <p:spPr>
+          <a:xfrm flipV="1">
+            <a:off x="9799216" y="2783931"/>
+            <a:ext cx="0" cy="315049"/>
+          </a:xfrm>
+          <a:prstGeom prst="straightConnector1">
+            <a:avLst/>
+          </a:prstGeom>
+          <a:ln>
+            <a:tailEnd type="triangle"/>
+          </a:ln>
+        </p:spPr>
+        <p:style>
+          <a:lnRef idx="2">
+            <a:schemeClr val="accent1"/>
+          </a:lnRef>
+          <a:fillRef idx="0">
+            <a:schemeClr val="accent1"/>
+          </a:fillRef>
+          <a:effectRef idx="1">
+            <a:schemeClr val="accent1"/>
+          </a:effectRef>
+          <a:fontRef idx="minor">
+            <a:schemeClr val="tx1"/>
+          </a:fontRef>
+        </p:style>
+      </p:cxnSp>
+      <p:cxnSp>
+        <p:nvCxnSpPr>
+          <p:cNvPr id="45" name="Straight Arrow Connector 44">
+            <a:extLst>
+              <a:ext uri="{FF2B5EF4-FFF2-40B4-BE49-F238E27FC236}">
+                <a16:creationId xmlns:a16="http://schemas.microsoft.com/office/drawing/2014/main" id="{6AF4A15B-0AA0-F584-7A5D-EE410872F786}"/>
+              </a:ext>
+            </a:extLst>
+          </p:cNvPr>
+          <p:cNvCxnSpPr>
+            <a:stCxn id="35" idx="0"/>
+            <a:endCxn id="34" idx="2"/>
+          </p:cNvCxnSpPr>
+          <p:nvPr/>
+        </p:nvCxnSpPr>
+        <p:spPr>
+          <a:xfrm flipV="1">
+            <a:off x="9799216" y="2059871"/>
+            <a:ext cx="0" cy="299517"/>
+          </a:xfrm>
+          <a:prstGeom prst="straightConnector1">
+            <a:avLst/>
+          </a:prstGeom>
+          <a:ln>
+            <a:tailEnd type="triangle"/>
+          </a:ln>
+        </p:spPr>
+        <p:style>
+          <a:lnRef idx="2">
+            <a:schemeClr val="accent1"/>
+          </a:lnRef>
+          <a:fillRef idx="0">
+            <a:schemeClr val="accent1"/>
+          </a:fillRef>
+          <a:effectRef idx="1">
+            <a:schemeClr val="accent1"/>
+          </a:effectRef>
+          <a:fontRef idx="minor">
+            <a:schemeClr val="tx1"/>
+          </a:fontRef>
+        </p:style>
+      </p:cxnSp>
+      <p:sp>
+        <p:nvSpPr>
+          <p:cNvPr id="48" name="Rounded Rectangle 47">
+            <a:extLst>
+              <a:ext uri="{FF2B5EF4-FFF2-40B4-BE49-F238E27FC236}">
+                <a16:creationId xmlns:a16="http://schemas.microsoft.com/office/drawing/2014/main" id="{0BBC7B86-E722-E1D1-E9B1-4F06B98866AE}"/>
+              </a:ext>
+            </a:extLst>
+          </p:cNvPr>
+          <p:cNvSpPr/>
+          <p:nvPr/>
+        </p:nvSpPr>
+        <p:spPr>
+          <a:xfrm>
+            <a:off x="1951658" y="5828993"/>
+            <a:ext cx="2371412" cy="548863"/>
+          </a:xfrm>
+          <a:prstGeom prst="roundRect">
+            <a:avLst/>
+          </a:prstGeom>
+          <a:solidFill>
+            <a:schemeClr val="accent2">
+              <a:lumMod val="60000"/>
+              <a:lumOff val="40000"/>
+            </a:schemeClr>
+          </a:solidFill>
+        </p:spPr>
+        <p:style>
+          <a:lnRef idx="2">
+            <a:schemeClr val="accent1">
+              <a:shade val="15000"/>
+            </a:schemeClr>
+          </a:lnRef>
+          <a:fillRef idx="1">
+            <a:schemeClr val="accent1"/>
+          </a:fillRef>
+          <a:effectRef idx="0">
+            <a:schemeClr val="accent1"/>
+          </a:effectRef>
+          <a:fontRef idx="minor">
+            <a:schemeClr val="lt1"/>
+          </a:fontRef>
+        </p:style>
+        <p:txBody>
+          <a:bodyPr rtlCol="0" anchor="ctr"/>
+          <a:lstStyle/>
+          <a:p>
+            <a:pPr algn="ctr"/>
+            <a:r>
+              <a:rPr lang="en-US" sz="1600"/>
+              <a:t>TLS Sesion Establishment </a:t>
+            </a:r>
+          </a:p>
+        </p:txBody>
+      </p:sp>
+      <p:sp>
+        <p:nvSpPr>
+          <p:cNvPr id="49" name="Rounded Rectangle 48">
+            <a:extLst>
+              <a:ext uri="{FF2B5EF4-FFF2-40B4-BE49-F238E27FC236}">
+                <a16:creationId xmlns:a16="http://schemas.microsoft.com/office/drawing/2014/main" id="{2A414B40-0706-EEE1-4362-180FB7A57B75}"/>
+              </a:ext>
+            </a:extLst>
+          </p:cNvPr>
+          <p:cNvSpPr/>
+          <p:nvPr/>
+        </p:nvSpPr>
+        <p:spPr>
+          <a:xfrm>
+            <a:off x="1952830" y="5078054"/>
+            <a:ext cx="2371412" cy="352894"/>
+          </a:xfrm>
+          <a:prstGeom prst="roundRect">
+            <a:avLst/>
+          </a:prstGeom>
+          <a:solidFill>
+            <a:schemeClr val="accent2">
+              <a:lumMod val="60000"/>
+              <a:lumOff val="40000"/>
+            </a:schemeClr>
+          </a:solidFill>
+        </p:spPr>
+        <p:style>
+          <a:lnRef idx="2">
+            <a:schemeClr val="accent1">
+              <a:shade val="15000"/>
+            </a:schemeClr>
+          </a:lnRef>
+          <a:fillRef idx="1">
+            <a:schemeClr val="accent1"/>
+          </a:fillRef>
+          <a:effectRef idx="0">
+            <a:schemeClr val="accent1"/>
+          </a:effectRef>
+          <a:fontRef idx="minor">
+            <a:schemeClr val="lt1"/>
+          </a:fontRef>
+        </p:style>
+        <p:txBody>
+          <a:bodyPr rtlCol="0" anchor="ctr"/>
+          <a:lstStyle/>
+          <a:p>
+            <a:pPr algn="ctr"/>
+            <a:r>
+              <a:rPr lang="en-US" sz="1600"/>
+              <a:t>TDX Verify Quote</a:t>
+            </a:r>
+          </a:p>
+        </p:txBody>
+      </p:sp>
+      <p:sp>
+        <p:nvSpPr>
+          <p:cNvPr id="51" name="Rounded Rectangle 50">
+            <a:extLst>
+              <a:ext uri="{FF2B5EF4-FFF2-40B4-BE49-F238E27FC236}">
+                <a16:creationId xmlns:a16="http://schemas.microsoft.com/office/drawing/2014/main" id="{B21157A1-75C7-7D39-C50E-74EBDD6B82AA}"/>
+              </a:ext>
+            </a:extLst>
+          </p:cNvPr>
+          <p:cNvSpPr/>
+          <p:nvPr/>
+        </p:nvSpPr>
+        <p:spPr>
+          <a:xfrm>
+            <a:off x="8668774" y="4156234"/>
+            <a:ext cx="2263834" cy="537201"/>
+          </a:xfrm>
+          <a:prstGeom prst="roundRect">
+            <a:avLst/>
+          </a:prstGeom>
+          <a:solidFill>
+            <a:schemeClr val="accent2">
+              <a:lumMod val="60000"/>
+              <a:lumOff val="40000"/>
+            </a:schemeClr>
+          </a:solidFill>
+        </p:spPr>
+        <p:style>
+          <a:lnRef idx="2">
+            <a:schemeClr val="accent1">
+              <a:shade val="15000"/>
+            </a:schemeClr>
+          </a:lnRef>
+          <a:fillRef idx="1">
+            <a:schemeClr val="accent1"/>
+          </a:fillRef>
+          <a:effectRef idx="0">
+            <a:schemeClr val="accent1"/>
+          </a:effectRef>
+          <a:fontRef idx="minor">
+            <a:schemeClr val="lt1"/>
+          </a:fontRef>
+        </p:style>
+        <p:txBody>
+          <a:bodyPr rtlCol="0" anchor="ctr"/>
+          <a:lstStyle/>
+          <a:p>
+            <a:pPr algn="ctr"/>
+            <a:r>
+              <a:rPr lang="en-GB" sz="1400"/>
+              <a:t>Reconstruct Intermediate Embeddings</a:t>
+            </a:r>
+            <a:endParaRPr lang="en-US" sz="1400"/>
+          </a:p>
+        </p:txBody>
+      </p:sp>
+      <p:cxnSp>
+        <p:nvCxnSpPr>
+          <p:cNvPr id="55" name="Straight Arrow Connector 54">
+            <a:extLst>
+              <a:ext uri="{FF2B5EF4-FFF2-40B4-BE49-F238E27FC236}">
+                <a16:creationId xmlns:a16="http://schemas.microsoft.com/office/drawing/2014/main" id="{23AACDE0-8837-06D5-AC5D-6AED4E6160E4}"/>
+              </a:ext>
+            </a:extLst>
+          </p:cNvPr>
+          <p:cNvCxnSpPr>
+            <a:cxnSpLocks/>
+            <a:stCxn id="51" idx="0"/>
+            <a:endCxn id="36" idx="2"/>
+          </p:cNvCxnSpPr>
+          <p:nvPr/>
+        </p:nvCxnSpPr>
+        <p:spPr>
+          <a:xfrm flipH="1" flipV="1">
+            <a:off x="9799216" y="3687097"/>
+            <a:ext cx="1475" cy="469137"/>
+          </a:xfrm>
+          <a:prstGeom prst="straightConnector1">
+            <a:avLst/>
+          </a:prstGeom>
+          <a:ln>
+            <a:tailEnd type="triangle"/>
+          </a:ln>
+        </p:spPr>
+        <p:style>
+          <a:lnRef idx="2">
+            <a:schemeClr val="accent1"/>
+          </a:lnRef>
+          <a:fillRef idx="0">
+            <a:schemeClr val="accent1"/>
+          </a:fillRef>
+          <a:effectRef idx="1">
+            <a:schemeClr val="accent1"/>
+          </a:effectRef>
+          <a:fontRef idx="minor">
+            <a:schemeClr val="tx1"/>
+          </a:fontRef>
+        </p:style>
+      </p:cxnSp>
+      <p:sp>
+        <p:nvSpPr>
+          <p:cNvPr id="56" name="Rounded Rectangle 55">
+            <a:extLst>
+              <a:ext uri="{FF2B5EF4-FFF2-40B4-BE49-F238E27FC236}">
+                <a16:creationId xmlns:a16="http://schemas.microsoft.com/office/drawing/2014/main" id="{F102A57D-098F-4011-B740-8D7704BE1B91}"/>
+              </a:ext>
+            </a:extLst>
+          </p:cNvPr>
+          <p:cNvSpPr/>
+          <p:nvPr/>
+        </p:nvSpPr>
+        <p:spPr>
+          <a:xfrm>
+            <a:off x="8668775" y="5060670"/>
+            <a:ext cx="2263834" cy="352893"/>
+          </a:xfrm>
+          <a:prstGeom prst="roundRect">
+            <a:avLst/>
+          </a:prstGeom>
+          <a:solidFill>
+            <a:schemeClr val="accent2">
+              <a:lumMod val="60000"/>
+              <a:lumOff val="40000"/>
+            </a:schemeClr>
+          </a:solidFill>
+        </p:spPr>
+        <p:style>
+          <a:lnRef idx="2">
+            <a:schemeClr val="accent1">
+              <a:shade val="15000"/>
+            </a:schemeClr>
+          </a:lnRef>
+          <a:fillRef idx="1">
+            <a:schemeClr val="accent1"/>
+          </a:fillRef>
+          <a:effectRef idx="0">
+            <a:schemeClr val="accent1"/>
+          </a:effectRef>
+          <a:fontRef idx="minor">
+            <a:schemeClr val="lt1"/>
+          </a:fontRef>
+        </p:style>
+        <p:txBody>
+          <a:bodyPr rtlCol="0" anchor="ctr"/>
+          <a:lstStyle/>
+          <a:p>
+            <a:pPr algn="ctr"/>
+            <a:r>
+              <a:rPr lang="en-US" sz="1600"/>
+              <a:t>TDX Generate Quote</a:t>
+            </a:r>
+          </a:p>
+        </p:txBody>
+      </p:sp>
+      <p:sp>
+        <p:nvSpPr>
+          <p:cNvPr id="57" name="Rounded Rectangle 56">
+            <a:extLst>
+              <a:ext uri="{FF2B5EF4-FFF2-40B4-BE49-F238E27FC236}">
+                <a16:creationId xmlns:a16="http://schemas.microsoft.com/office/drawing/2014/main" id="{48B03B15-0CF5-4DDD-F885-C0B99F2E55CB}"/>
+              </a:ext>
+            </a:extLst>
+          </p:cNvPr>
+          <p:cNvSpPr/>
+          <p:nvPr/>
+        </p:nvSpPr>
+        <p:spPr>
+          <a:xfrm>
+            <a:off x="8668775" y="5828993"/>
+            <a:ext cx="2263833" cy="537201"/>
+          </a:xfrm>
+          <a:prstGeom prst="roundRect">
+            <a:avLst/>
+          </a:prstGeom>
+          <a:solidFill>
+            <a:schemeClr val="accent2">
+              <a:lumMod val="60000"/>
+              <a:lumOff val="40000"/>
+            </a:schemeClr>
+          </a:solidFill>
+        </p:spPr>
+        <p:style>
+          <a:lnRef idx="2">
+            <a:schemeClr val="accent1">
+              <a:shade val="15000"/>
+            </a:schemeClr>
+          </a:lnRef>
+          <a:fillRef idx="1">
+            <a:schemeClr val="accent1"/>
+          </a:fillRef>
+          <a:effectRef idx="0">
+            <a:schemeClr val="accent1"/>
+          </a:effectRef>
+          <a:fontRef idx="minor">
+            <a:schemeClr val="lt1"/>
+          </a:fontRef>
+        </p:style>
+        <p:txBody>
+          <a:bodyPr rtlCol="0" anchor="ctr"/>
+          <a:lstStyle/>
+          <a:p>
+            <a:pPr algn="ctr"/>
+            <a:r>
+              <a:rPr lang="en-US" sz="1600"/>
+              <a:t>TLS Sesion Establishment </a:t>
+            </a:r>
+          </a:p>
+        </p:txBody>
+      </p:sp>
+      <p:sp>
+        <p:nvSpPr>
+          <p:cNvPr id="58" name="Rounded Rectangle 57">
+            <a:extLst>
+              <a:ext uri="{FF2B5EF4-FFF2-40B4-BE49-F238E27FC236}">
+                <a16:creationId xmlns:a16="http://schemas.microsoft.com/office/drawing/2014/main" id="{5A639947-7071-0E60-4F67-A444EF1B513B}"/>
+              </a:ext>
+            </a:extLst>
+          </p:cNvPr>
+          <p:cNvSpPr/>
+          <p:nvPr/>
+        </p:nvSpPr>
+        <p:spPr>
+          <a:xfrm>
+            <a:off x="5582433" y="5088102"/>
+            <a:ext cx="1831578" cy="352894"/>
+          </a:xfrm>
+          <a:prstGeom prst="roundRect">
+            <a:avLst/>
+          </a:prstGeom>
+          <a:solidFill>
+            <a:schemeClr val="bg1"/>
+          </a:solidFill>
+          <a:ln>
+            <a:solidFill>
+              <a:schemeClr val="accent2"/>
+            </a:solidFill>
+            <a:prstDash val="dash"/>
+          </a:ln>
+        </p:spPr>
+        <p:style>
+          <a:lnRef idx="2">
+            <a:schemeClr val="accent6"/>
+          </a:lnRef>
+          <a:fillRef idx="1">
+            <a:schemeClr val="lt1"/>
+          </a:fillRef>
+          <a:effectRef idx="0">
+            <a:schemeClr val="accent6"/>
+          </a:effectRef>
+          <a:fontRef idx="minor">
+            <a:schemeClr val="dk1"/>
+          </a:fontRef>
+        </p:style>
+        <p:txBody>
+          <a:bodyPr rtlCol="0" anchor="ctr"/>
+          <a:lstStyle/>
+          <a:p>
+            <a:pPr algn="ctr"/>
+            <a:r>
+              <a:rPr lang="en-US" sz="1400"/>
+              <a:t>Remote Assetation</a:t>
+            </a:r>
+          </a:p>
+        </p:txBody>
+      </p:sp>
+      <p:sp>
+        <p:nvSpPr>
+          <p:cNvPr id="67" name="Left-right Arrow 66">
+            <a:extLst>
+              <a:ext uri="{FF2B5EF4-FFF2-40B4-BE49-F238E27FC236}">
+                <a16:creationId xmlns:a16="http://schemas.microsoft.com/office/drawing/2014/main" id="{2E3DBB46-C938-2DC5-97D9-EB88A127BCBA}"/>
+              </a:ext>
+            </a:extLst>
+          </p:cNvPr>
+          <p:cNvSpPr/>
+          <p:nvPr/>
+        </p:nvSpPr>
+        <p:spPr>
+          <a:xfrm>
+            <a:off x="4334290" y="6029008"/>
+            <a:ext cx="4309261" cy="146052"/>
+          </a:xfrm>
+          <a:prstGeom prst="leftRightArrow">
+            <a:avLst/>
+          </a:prstGeom>
+          <a:solidFill>
+            <a:schemeClr val="accent2">
+              <a:lumMod val="20000"/>
+              <a:lumOff val="80000"/>
+            </a:schemeClr>
+          </a:solidFill>
+          <a:ln>
+            <a:solidFill>
+              <a:schemeClr val="accent2"/>
+            </a:solidFill>
+            <a:prstDash val="sysDash"/>
+          </a:ln>
+        </p:spPr>
+        <p:style>
+          <a:lnRef idx="2">
+            <a:schemeClr val="accent1">
+              <a:shade val="15000"/>
+            </a:schemeClr>
+          </a:lnRef>
+          <a:fillRef idx="1">
+            <a:schemeClr val="accent1"/>
+          </a:fillRef>
+          <a:effectRef idx="0">
+            <a:schemeClr val="accent1"/>
+          </a:effectRef>
+          <a:fontRef idx="minor">
+            <a:schemeClr val="lt1"/>
+          </a:fontRef>
+        </p:style>
+        <p:txBody>
+          <a:bodyPr rtlCol="0" anchor="ctr"/>
+          <a:lstStyle/>
+          <a:p>
+            <a:pPr algn="ctr"/>
+            <a:endParaRPr lang="en-US"/>
+          </a:p>
+        </p:txBody>
+      </p:sp>
+      <p:sp>
+        <p:nvSpPr>
+          <p:cNvPr id="69" name="Left-right Arrow 68">
+            <a:extLst>
+              <a:ext uri="{FF2B5EF4-FFF2-40B4-BE49-F238E27FC236}">
+                <a16:creationId xmlns:a16="http://schemas.microsoft.com/office/drawing/2014/main" id="{DA8C3B23-AEE1-1DC4-61E5-B707E620234A}"/>
+              </a:ext>
+            </a:extLst>
+          </p:cNvPr>
+          <p:cNvSpPr/>
+          <p:nvPr/>
+        </p:nvSpPr>
+        <p:spPr>
+          <a:xfrm>
+            <a:off x="4345511" y="5180788"/>
+            <a:ext cx="1217360" cy="146052"/>
+          </a:xfrm>
+          <a:prstGeom prst="leftRightArrow">
+            <a:avLst/>
+          </a:prstGeom>
+          <a:solidFill>
+            <a:schemeClr val="accent2">
+              <a:lumMod val="20000"/>
+              <a:lumOff val="80000"/>
+            </a:schemeClr>
+          </a:solidFill>
+          <a:ln>
+            <a:solidFill>
+              <a:schemeClr val="accent2"/>
+            </a:solidFill>
+            <a:prstDash val="sysDash"/>
+          </a:ln>
+        </p:spPr>
+        <p:style>
+          <a:lnRef idx="2">
+            <a:schemeClr val="accent1">
+              <a:shade val="15000"/>
+            </a:schemeClr>
+          </a:lnRef>
+          <a:fillRef idx="1">
+            <a:schemeClr val="accent1"/>
+          </a:fillRef>
+          <a:effectRef idx="0">
+            <a:schemeClr val="accent1"/>
+          </a:effectRef>
+          <a:fontRef idx="minor">
+            <a:schemeClr val="lt1"/>
+          </a:fontRef>
+        </p:style>
+        <p:txBody>
+          <a:bodyPr rtlCol="0" anchor="ctr"/>
+          <a:lstStyle/>
+          <a:p>
+            <a:pPr algn="ctr"/>
+            <a:endParaRPr lang="en-US"/>
+          </a:p>
+        </p:txBody>
+      </p:sp>
+      <p:sp>
+        <p:nvSpPr>
+          <p:cNvPr id="70" name="Left-right Arrow 69">
+            <a:extLst>
+              <a:ext uri="{FF2B5EF4-FFF2-40B4-BE49-F238E27FC236}">
+                <a16:creationId xmlns:a16="http://schemas.microsoft.com/office/drawing/2014/main" id="{6A7BBC29-A0EE-F4A3-4348-DFFB531DC605}"/>
+              </a:ext>
+            </a:extLst>
+          </p:cNvPr>
+          <p:cNvSpPr/>
+          <p:nvPr/>
+        </p:nvSpPr>
+        <p:spPr>
+          <a:xfrm>
+            <a:off x="7424059" y="5180788"/>
+            <a:ext cx="1219492" cy="146052"/>
+          </a:xfrm>
+          <a:prstGeom prst="leftRightArrow">
+            <a:avLst/>
+          </a:prstGeom>
+          <a:solidFill>
+            <a:schemeClr val="accent2">
+              <a:lumMod val="20000"/>
+              <a:lumOff val="80000"/>
+            </a:schemeClr>
+          </a:solidFill>
+          <a:ln>
+            <a:solidFill>
+              <a:schemeClr val="accent2"/>
+            </a:solidFill>
+            <a:prstDash val="sysDash"/>
+          </a:ln>
+        </p:spPr>
+        <p:style>
+          <a:lnRef idx="2">
+            <a:schemeClr val="accent1">
+              <a:shade val="15000"/>
+            </a:schemeClr>
+          </a:lnRef>
+          <a:fillRef idx="1">
+            <a:schemeClr val="accent1"/>
+          </a:fillRef>
+          <a:effectRef idx="0">
+            <a:schemeClr val="accent1"/>
+          </a:effectRef>
+          <a:fontRef idx="minor">
+            <a:schemeClr val="lt1"/>
+          </a:fontRef>
+        </p:style>
+        <p:txBody>
+          <a:bodyPr rtlCol="0" anchor="ctr"/>
+          <a:lstStyle/>
+          <a:p>
+            <a:pPr algn="ctr"/>
+            <a:endParaRPr lang="en-US"/>
+          </a:p>
+        </p:txBody>
+      </p:sp>
+      <p:cxnSp>
+        <p:nvCxnSpPr>
+          <p:cNvPr id="72" name="Straight Arrow Connector 71">
+            <a:extLst>
+              <a:ext uri="{FF2B5EF4-FFF2-40B4-BE49-F238E27FC236}">
+                <a16:creationId xmlns:a16="http://schemas.microsoft.com/office/drawing/2014/main" id="{D3BBAA70-1361-82C9-01DF-441081A74775}"/>
+              </a:ext>
+            </a:extLst>
+          </p:cNvPr>
+          <p:cNvCxnSpPr>
+            <a:stCxn id="48" idx="0"/>
+            <a:endCxn id="49" idx="2"/>
+          </p:cNvCxnSpPr>
+          <p:nvPr/>
+        </p:nvCxnSpPr>
+        <p:spPr>
+          <a:xfrm flipV="1">
+            <a:off x="3137364" y="5430948"/>
+            <a:ext cx="1172" cy="398045"/>
+          </a:xfrm>
+          <a:prstGeom prst="straightConnector1">
+            <a:avLst/>
+          </a:prstGeom>
+          <a:ln>
+            <a:solidFill>
+              <a:schemeClr val="accent2">
+                <a:lumMod val="50000"/>
+              </a:schemeClr>
+            </a:solidFill>
+            <a:tailEnd type="triangle"/>
+          </a:ln>
+        </p:spPr>
+        <p:style>
+          <a:lnRef idx="2">
+            <a:schemeClr val="accent1"/>
+          </a:lnRef>
+          <a:fillRef idx="0">
+            <a:schemeClr val="accent1"/>
+          </a:fillRef>
+          <a:effectRef idx="1">
+            <a:schemeClr val="accent1"/>
+          </a:effectRef>
+          <a:fontRef idx="minor">
+            <a:schemeClr val="tx1"/>
+          </a:fontRef>
+        </p:style>
+      </p:cxnSp>
+      <p:cxnSp>
+        <p:nvCxnSpPr>
+          <p:cNvPr id="74" name="Straight Arrow Connector 73">
+            <a:extLst>
+              <a:ext uri="{FF2B5EF4-FFF2-40B4-BE49-F238E27FC236}">
+                <a16:creationId xmlns:a16="http://schemas.microsoft.com/office/drawing/2014/main" id="{B8B3B404-2FFE-39B0-DCE2-D2BD9D1C53E9}"/>
+              </a:ext>
+            </a:extLst>
+          </p:cNvPr>
+          <p:cNvCxnSpPr>
+            <a:cxnSpLocks/>
+            <a:stCxn id="49" idx="0"/>
+            <a:endCxn id="18" idx="2"/>
+          </p:cNvCxnSpPr>
+          <p:nvPr/>
+        </p:nvCxnSpPr>
+        <p:spPr>
+          <a:xfrm flipV="1">
+            <a:off x="3138536" y="4705097"/>
+            <a:ext cx="8876" cy="372957"/>
+          </a:xfrm>
+          <a:prstGeom prst="straightConnector1">
+            <a:avLst/>
+          </a:prstGeom>
+          <a:ln>
+            <a:solidFill>
+              <a:schemeClr val="accent2">
+                <a:lumMod val="50000"/>
+              </a:schemeClr>
+            </a:solidFill>
+            <a:tailEnd type="triangle"/>
+          </a:ln>
+        </p:spPr>
+        <p:style>
+          <a:lnRef idx="2">
+            <a:schemeClr val="accent1"/>
+          </a:lnRef>
+          <a:fillRef idx="0">
+            <a:schemeClr val="accent1"/>
+          </a:fillRef>
+          <a:effectRef idx="1">
+            <a:schemeClr val="accent1"/>
+          </a:effectRef>
+          <a:fontRef idx="minor">
+            <a:schemeClr val="tx1"/>
+          </a:fontRef>
+        </p:style>
+      </p:cxnSp>
+      <p:cxnSp>
+        <p:nvCxnSpPr>
+          <p:cNvPr id="85" name="Straight Arrow Connector 84">
+            <a:extLst>
+              <a:ext uri="{FF2B5EF4-FFF2-40B4-BE49-F238E27FC236}">
+                <a16:creationId xmlns:a16="http://schemas.microsoft.com/office/drawing/2014/main" id="{A08011FF-EDC7-D46F-B1D7-40C485358480}"/>
+              </a:ext>
+            </a:extLst>
+          </p:cNvPr>
+          <p:cNvCxnSpPr>
+            <a:cxnSpLocks/>
+            <a:stCxn id="57" idx="0"/>
+            <a:endCxn id="56" idx="2"/>
+          </p:cNvCxnSpPr>
+          <p:nvPr/>
+        </p:nvCxnSpPr>
+        <p:spPr>
+          <a:xfrm flipV="1">
+            <a:off x="9800692" y="5413563"/>
+            <a:ext cx="0" cy="415430"/>
+          </a:xfrm>
+          <a:prstGeom prst="straightConnector1">
+            <a:avLst/>
+          </a:prstGeom>
+          <a:ln>
+            <a:solidFill>
+              <a:schemeClr val="accent2">
+                <a:lumMod val="50000"/>
+              </a:schemeClr>
+            </a:solidFill>
+            <a:tailEnd type="triangle"/>
+          </a:ln>
+        </p:spPr>
+        <p:style>
+          <a:lnRef idx="2">
+            <a:schemeClr val="accent1"/>
+          </a:lnRef>
+          <a:fillRef idx="0">
+            <a:schemeClr val="accent1"/>
+          </a:fillRef>
+          <a:effectRef idx="1">
+            <a:schemeClr val="accent1"/>
+          </a:effectRef>
+          <a:fontRef idx="minor">
+            <a:schemeClr val="tx1"/>
+          </a:fontRef>
+        </p:style>
+      </p:cxnSp>
+      <p:cxnSp>
+        <p:nvCxnSpPr>
+          <p:cNvPr id="90" name="Straight Arrow Connector 89">
+            <a:extLst>
+              <a:ext uri="{FF2B5EF4-FFF2-40B4-BE49-F238E27FC236}">
+                <a16:creationId xmlns:a16="http://schemas.microsoft.com/office/drawing/2014/main" id="{F2345AD3-4445-C74A-7F76-68714DBEF64B}"/>
+              </a:ext>
+            </a:extLst>
+          </p:cNvPr>
+          <p:cNvCxnSpPr>
+            <a:cxnSpLocks/>
+            <a:stCxn id="56" idx="0"/>
+            <a:endCxn id="51" idx="2"/>
+          </p:cNvCxnSpPr>
+          <p:nvPr/>
+        </p:nvCxnSpPr>
+        <p:spPr>
+          <a:xfrm flipH="1" flipV="1">
+            <a:off x="9800691" y="4693435"/>
+            <a:ext cx="1" cy="367235"/>
+          </a:xfrm>
+          <a:prstGeom prst="straightConnector1">
+            <a:avLst/>
+          </a:prstGeom>
+          <a:ln>
+            <a:solidFill>
+              <a:schemeClr val="accent2">
+                <a:lumMod val="50000"/>
+              </a:schemeClr>
+            </a:solidFill>
+            <a:tailEnd type="triangle"/>
+          </a:ln>
+        </p:spPr>
+        <p:style>
+          <a:lnRef idx="2">
+            <a:schemeClr val="accent1"/>
+          </a:lnRef>
+          <a:fillRef idx="0">
+            <a:schemeClr val="accent1"/>
+          </a:fillRef>
+          <a:effectRef idx="1">
+            <a:schemeClr val="accent1"/>
+          </a:effectRef>
+          <a:fontRef idx="minor">
+            <a:schemeClr val="tx1"/>
+          </a:fontRef>
+        </p:style>
+      </p:cxnSp>
+      <p:sp>
+        <p:nvSpPr>
+          <p:cNvPr id="104" name="Right Arrow 103">
+            <a:extLst>
+              <a:ext uri="{FF2B5EF4-FFF2-40B4-BE49-F238E27FC236}">
+                <a16:creationId xmlns:a16="http://schemas.microsoft.com/office/drawing/2014/main" id="{C6BB7DEB-225F-C068-6B63-7AD28F411E56}"/>
+              </a:ext>
+            </a:extLst>
+          </p:cNvPr>
+          <p:cNvSpPr/>
+          <p:nvPr/>
+        </p:nvSpPr>
+        <p:spPr>
+          <a:xfrm>
+            <a:off x="4345510" y="4355611"/>
+            <a:ext cx="4323263" cy="133516"/>
+          </a:xfrm>
+          <a:prstGeom prst="rightArrow">
+            <a:avLst/>
+          </a:prstGeom>
+          <a:solidFill>
+            <a:schemeClr val="accent2">
+              <a:lumMod val="20000"/>
+              <a:lumOff val="80000"/>
+              <a:alpha val="80000"/>
+            </a:schemeClr>
+          </a:solidFill>
+          <a:ln>
+            <a:solidFill>
+              <a:schemeClr val="accent2">
+                <a:lumMod val="75000"/>
+              </a:schemeClr>
+            </a:solidFill>
+            <a:prstDash val="sysDash"/>
+          </a:ln>
+        </p:spPr>
+        <p:style>
+          <a:lnRef idx="2">
+            <a:schemeClr val="accent1">
+              <a:shade val="15000"/>
+            </a:schemeClr>
+          </a:lnRef>
+          <a:fillRef idx="1">
+            <a:schemeClr val="accent1"/>
+          </a:fillRef>
+          <a:effectRef idx="0">
+            <a:schemeClr val="accent1"/>
+          </a:effectRef>
+          <a:fontRef idx="minor">
+            <a:schemeClr val="lt1"/>
+          </a:fontRef>
+        </p:style>
+        <p:txBody>
+          <a:bodyPr rtlCol="0" anchor="ctr"/>
+          <a:lstStyle/>
+          <a:p>
+            <a:pPr algn="ctr"/>
+            <a:endParaRPr lang="en-US"/>
+          </a:p>
+        </p:txBody>
+      </p:sp>
+      <p:sp>
+        <p:nvSpPr>
+          <p:cNvPr id="108" name="TextBox 107">
+            <a:extLst>
+              <a:ext uri="{FF2B5EF4-FFF2-40B4-BE49-F238E27FC236}">
+                <a16:creationId xmlns:a16="http://schemas.microsoft.com/office/drawing/2014/main" id="{C1CEEDE8-E9EB-8338-7BC9-0A1EAE87CAE6}"/>
+              </a:ext>
+            </a:extLst>
+          </p:cNvPr>
+          <p:cNvSpPr txBox="1"/>
+          <p:nvPr/>
+        </p:nvSpPr>
+        <p:spPr>
+          <a:xfrm>
+            <a:off x="3457467" y="4010384"/>
+            <a:ext cx="6099348" cy="307777"/>
+          </a:xfrm>
+          <a:prstGeom prst="rect">
+            <a:avLst/>
+          </a:prstGeom>
+          <a:noFill/>
+        </p:spPr>
+        <p:txBody>
+          <a:bodyPr wrap="square">
+            <a:spAutoFit/>
           </a:bodyPr>
           <a:lstStyle/>
           <a:p>
-            <a:r>
-              <a:rPr lang="en-GB" dirty="0"/>
-              <a:t>QUIC TLS 1.3</a:t>
-            </a:r>
-            <a:r>
-              <a:rPr lang="zh-CN" altLang="en-US" dirty="0"/>
-              <a:t> </a:t>
-            </a:r>
-            <a:r>
-              <a:rPr lang="en-US" altLang="zh-CN" dirty="0"/>
-              <a:t>(UDP,</a:t>
-            </a:r>
-            <a:r>
-              <a:rPr lang="zh-CN" altLang="en-US" dirty="0"/>
-              <a:t> </a:t>
-            </a:r>
-            <a:r>
-              <a:rPr lang="en-US" altLang="zh-CN" dirty="0"/>
-              <a:t>reduce</a:t>
-            </a:r>
-            <a:r>
-              <a:rPr lang="zh-CN" altLang="en-US" dirty="0"/>
-              <a:t> </a:t>
-            </a:r>
-            <a:r>
-              <a:rPr lang="en-US" altLang="zh-CN" dirty="0"/>
-              <a:t>latency,</a:t>
-            </a:r>
-            <a:r>
-              <a:rPr lang="zh-CN" altLang="en-US" dirty="0"/>
-              <a:t> </a:t>
-            </a:r>
-            <a:r>
-              <a:rPr lang="en-US" altLang="zh-CN" dirty="0"/>
-              <a:t>Encryption</a:t>
-            </a:r>
-            <a:r>
-              <a:rPr lang="zh-CN" altLang="en-US" dirty="0"/>
-              <a:t> </a:t>
-            </a:r>
-            <a:r>
-              <a:rPr lang="en-US" altLang="zh-CN" dirty="0"/>
-              <a:t>Algorithm,</a:t>
-            </a:r>
-            <a:r>
-              <a:rPr lang="zh-CN" altLang="en-US" dirty="0"/>
-              <a:t> </a:t>
-            </a:r>
-            <a:r>
-              <a:rPr lang="en-US" altLang="zh-CN" dirty="0"/>
-              <a:t>Key</a:t>
-            </a:r>
-            <a:r>
-              <a:rPr lang="zh-CN" altLang="en-US" dirty="0"/>
-              <a:t> </a:t>
-            </a:r>
-            <a:r>
-              <a:rPr lang="en-US" altLang="zh-CN" dirty="0"/>
-              <a:t>exchange)</a:t>
-            </a:r>
-            <a:r>
-              <a:rPr lang="zh-CN" altLang="en-US" dirty="0"/>
-              <a:t> </a:t>
-            </a:r>
-            <a:endParaRPr lang="en-GB" dirty="0"/>
-          </a:p>
-          <a:p>
-            <a:r>
-              <a:rPr lang="en-US" altLang="zh-CN" dirty="0" err="1"/>
-              <a:t>DataSet</a:t>
-            </a:r>
-            <a:r>
-              <a:rPr lang="en-US" altLang="zh-CN" dirty="0"/>
-              <a:t>: HuggingFaceM4 /</a:t>
-            </a:r>
-            <a:r>
-              <a:rPr lang="en-US" altLang="zh-CN" dirty="0" err="1"/>
-              <a:t>the_cauldron</a:t>
-            </a:r>
-            <a:r>
-              <a:rPr lang="en-US" altLang="zh-CN" dirty="0"/>
-              <a:t> AI2D subset</a:t>
-            </a:r>
-          </a:p>
-          <a:p>
-            <a:r>
-              <a:rPr lang="en-US" dirty="0"/>
-              <a:t>Model: </a:t>
-            </a:r>
-            <a:r>
-              <a:rPr lang="en-US" altLang="zh-CN" dirty="0" err="1"/>
-              <a:t>nanoVLM</a:t>
-            </a:r>
-            <a:endParaRPr lang="en-US" altLang="zh-CN" dirty="0"/>
-          </a:p>
-          <a:p>
-            <a:r>
-              <a:rPr lang="en-US" altLang="zh-CN" dirty="0"/>
-              <a:t>Encryption:</a:t>
-            </a:r>
-            <a:r>
-              <a:rPr lang="zh-CN" altLang="en-US" dirty="0"/>
-              <a:t> </a:t>
-            </a:r>
-            <a:r>
-              <a:rPr lang="en-US" altLang="zh-CN" dirty="0"/>
-              <a:t>ChaChao20-Poly1305</a:t>
-            </a:r>
-            <a:r>
-              <a:rPr lang="zh-CN" altLang="en-US" dirty="0"/>
-              <a:t> </a:t>
-            </a:r>
-            <a:r>
-              <a:rPr lang="en-US" altLang="zh-CN" dirty="0"/>
-              <a:t>vs</a:t>
-            </a:r>
-            <a:r>
-              <a:rPr lang="zh-CN" altLang="en-US" dirty="0"/>
-              <a:t> </a:t>
-            </a:r>
-            <a:r>
-              <a:rPr lang="en-US" altLang="zh-CN" dirty="0"/>
-              <a:t>AES-GCM</a:t>
-            </a:r>
-            <a:endParaRPr lang="en-GB" altLang="zh-CN" dirty="0"/>
-          </a:p>
-          <a:p>
-            <a:r>
-              <a:rPr lang="en-GB" dirty="0"/>
-              <a:t>TEE: </a:t>
-            </a:r>
-            <a:r>
-              <a:rPr lang="zh-CN" altLang="en-US" dirty="0"/>
-              <a:t> </a:t>
-            </a:r>
-            <a:r>
-              <a:rPr lang="en-US" altLang="zh-CN" dirty="0"/>
-              <a:t>Intel</a:t>
-            </a:r>
-            <a:r>
-              <a:rPr lang="zh-CN" altLang="en-US" dirty="0"/>
-              <a:t> </a:t>
-            </a:r>
-            <a:r>
-              <a:rPr lang="en-US" altLang="zh-CN" dirty="0"/>
-              <a:t>TDX</a:t>
-            </a:r>
-            <a:endParaRPr lang="en-GB" dirty="0"/>
+            <a:pPr algn="ctr"/>
+            <a:r>
+              <a:rPr lang="en-US" sz="1400"/>
+              <a:t>TLS Secure Channel</a:t>
+            </a:r>
           </a:p>
         </p:txBody>
       </p:sp>
     </p:spTree>
     <p:extLst>
       <p:ext uri="{BB962C8B-B14F-4D97-AF65-F5344CB8AC3E}">
-        <p14:creationId xmlns:p14="http://schemas.microsoft.com/office/powerpoint/2010/main" val="2290997006"/>
+        <p14:creationId xmlns:p14="http://schemas.microsoft.com/office/powerpoint/2010/main" val="3119878381"/>
       </p:ext>
     </p:extLst>
   </p:cSld>
